--- a/static/ppts/G6_Math_T4_Substitution.pptx
+++ b/static/ppts/G6_Math_T4_Substitution.pptx
@@ -9,9 +9,10 @@
     <p:sldId id="257" r:id="rId3"/>
     <p:sldId id="258" r:id="rId4"/>
     <p:sldId id="259" r:id="rId5"/>
+    <p:sldId id="260" r:id="rId6"/>
   </p:sldIdLst>
   <p:notesMasterIdLst>
-    <p:notesMasterId r:id="rId6"/>
+    <p:notesMasterId r:id="rId7"/>
   </p:notesMasterIdLst>
   <p:sldSz cx="9144000" cy="5143500"/>
   <p:notesSz cx="5143500" cy="9144000"/>
@@ -811,6 +812,94 @@
 </p:notes>
 </file>
 
+<file path=ppt/notesSlides/notesSlide5.xml><?xml version="1.0" encoding="utf-8"?>
+<p:notes xmlns:a="http://schemas.openxmlformats.org/drawingml/2006/main" xmlns:r="http://schemas.openxmlformats.org/officeDocument/2006/relationships" xmlns:p="http://schemas.openxmlformats.org/presentationml/2006/main">
+  <p:cSld>
+    <p:spTree>
+      <p:nvGrpSpPr>
+        <p:cNvPr id="1" name=""/>
+        <p:cNvGrpSpPr/>
+        <p:nvPr/>
+      </p:nvGrpSpPr>
+      <p:grpSpPr>
+        <a:xfrm>
+          <a:off x="0" y="0"/>
+          <a:ext cx="0" cy="0"/>
+          <a:chOff x="0" y="0"/>
+          <a:chExt cx="0" cy="0"/>
+        </a:xfrm>
+      </p:grpSpPr>
+      <p:sp>
+        <p:nvSpPr>
+          <p:cNvPr id="2" name="Slide Image Placeholder 1"/>
+          <p:cNvSpPr>
+            <a:spLocks noGrp="1" noRot="1" noChangeAspect="1"/>
+          </p:cNvSpPr>
+          <p:nvPr>
+            <p:ph type="sldImg"/>
+          </p:nvPr>
+        </p:nvSpPr>
+        <p:spPr/>
+      </p:sp>
+      <p:sp>
+        <p:nvSpPr>
+          <p:cNvPr id="3" name="Notes Placeholder 2"/>
+          <p:cNvSpPr>
+            <a:spLocks noGrp="1"/>
+          </p:cNvSpPr>
+          <p:nvPr>
+            <p:ph type="body" idx="1"/>
+          </p:nvPr>
+        </p:nvSpPr>
+        <p:spPr/>
+        <p:txBody>
+          <a:bodyPr/>
+          <a:lstStyle/>
+          <a:p>
+            <a:r>
+              <a:rPr lang="en-US" dirty="0"/>
+              <a:t/>
+            </a:r>
+            <a:endParaRPr lang="en-US" dirty="0"/>
+          </a:p>
+        </p:txBody>
+      </p:sp>
+      <p:sp>
+        <p:nvSpPr>
+          <p:cNvPr id="4" name="Slide Number Placeholder 3"/>
+          <p:cNvSpPr>
+            <a:spLocks noGrp="1"/>
+          </p:cNvSpPr>
+          <p:nvPr>
+            <p:ph type="sldNum" sz="quarter" idx="10"/>
+          </p:nvPr>
+        </p:nvSpPr>
+        <p:spPr/>
+        <p:txBody>
+          <a:bodyPr/>
+          <a:lstStyle/>
+          <a:p>
+            <a:fld id="{F7021451-1387-4CA6-816F-3879F97B5CBC}" type="slidenum">
+              <a:rPr lang="en-US"/>
+              <a:t>5</a:t>
+            </a:fld>
+            <a:endParaRPr lang="en-US"/>
+          </a:p>
+        </p:txBody>
+      </p:sp>
+    </p:spTree>
+    <p:extLst>
+      <p:ext uri="{BB962C8B-B14F-4D97-AF65-F5344CB8AC3E}">
+        <p14:creationId xmlns:p14="http://schemas.microsoft.com/office/powerpoint/2010/main" val="1024086991"/>
+      </p:ext>
+    </p:extLst>
+  </p:cSld>
+  <p:clrMapOvr>
+    <a:masterClrMapping/>
+  </p:clrMapOvr>
+</p:notes>
+</file>
+
 <file path=ppt/slideLayouts/slideLayout1.xml><?xml version="1.0" encoding="utf-8"?>
 <p:sldLayout xmlns:a="http://schemas.openxmlformats.org/drawingml/2006/main" xmlns:r="http://schemas.openxmlformats.org/officeDocument/2006/relationships" xmlns:p="http://schemas.openxmlformats.org/presentationml/2006/main" preserve="1">
   <p:cSld name="DEFAULT">
@@ -1170,7 +1259,7 @@
         </p:nvSpPr>
         <p:spPr>
           <a:xfrm>
-            <a:off x="731520" y="1280160"/>
+            <a:off x="731520" y="1097280"/>
             <a:ext cx="7772400" cy="1371600"/>
           </a:xfrm>
           <a:prstGeom prst="rect">
@@ -1187,7 +1276,7 @@
               <a:buNone/>
             </a:pPr>
             <a:r>
-              <a:rPr lang="en-US" sz="3600" b="1" dirty="0">
+              <a:rPr lang="en-US" sz="4000" b="1" dirty="0">
                 <a:solidFill>
                   <a:srgbClr val="FFFFFF"/>
                 </a:solidFill>
@@ -1197,7 +1286,7 @@
               </a:rPr>
               <a:t>Substitution</a:t>
             </a:r>
-            <a:endParaRPr lang="en-US" sz="3600" dirty="0"/>
+            <a:endParaRPr lang="en-US" sz="4000" dirty="0"/>
           </a:p>
         </p:txBody>
       </p:sp>
@@ -1209,7 +1298,7 @@
         </p:nvSpPr>
         <p:spPr>
           <a:xfrm>
-            <a:off x="731520" y="2743200"/>
+            <a:off x="731520" y="2560320"/>
             <a:ext cx="7772400" cy="548640"/>
           </a:xfrm>
           <a:prstGeom prst="rect">
@@ -1228,13 +1317,13 @@
             <a:r>
               <a:rPr lang="en-US" sz="1600" dirty="0">
                 <a:solidFill>
-                  <a:srgbClr val="9B9690"/>
+                  <a:srgbClr val="E9C46A"/>
                 </a:solidFill>
                 <a:latin typeface="Calibri" pitchFamily="34" charset="0"/>
                 <a:ea typeface="Calibri" pitchFamily="34" charset="-122"/>
                 <a:cs typeface="Calibri" pitchFamily="34" charset="-120"/>
               </a:rPr>
-              <a:t>G6 Maths · Algebra</a:t>
+              <a:t>Grade 6 Mathematics · Mr Zocchi</a:t>
             </a:r>
             <a:endParaRPr lang="en-US" sz="1600" dirty="0"/>
           </a:p>
@@ -1242,14 +1331,36 @@
       </p:sp>
       <p:sp>
         <p:nvSpPr>
-          <p:cNvPr id="5" name="Text 3"/>
+          <p:cNvPr id="5" name="Shape 3"/>
           <p:cNvSpPr/>
           <p:nvPr/>
         </p:nvSpPr>
         <p:spPr>
           <a:xfrm>
-            <a:off x="731520" y="4389120"/>
-            <a:ext cx="7772400" cy="457200"/>
+            <a:off x="731520" y="3474720"/>
+            <a:ext cx="2011680" cy="411480"/>
+          </a:xfrm>
+          <a:prstGeom prst="roundRect">
+            <a:avLst>
+              <a:gd name="adj" fmla="val 17778"/>
+            </a:avLst>
+          </a:prstGeom>
+          <a:solidFill>
+            <a:srgbClr val="2A9D8F"/>
+          </a:solidFill>
+          <a:ln/>
+        </p:spPr>
+      </p:sp>
+      <p:sp>
+        <p:nvSpPr>
+          <p:cNvPr id="6" name="Text 4"/>
+          <p:cNvSpPr/>
+          <p:nvPr/>
+        </p:nvSpPr>
+        <p:spPr>
+          <a:xfrm>
+            <a:off x="731520" y="3474720"/>
+            <a:ext cx="2011680" cy="411480"/>
           </a:xfrm>
           <a:prstGeom prst="rect">
             <a:avLst/>
@@ -1261,21 +1372,21 @@
           <a:bodyPr wrap="square" rtlCol="0" anchor="ctr"/>
           <a:lstStyle/>
           <a:p>
-            <a:pPr indent="0" marL="0">
+            <a:pPr algn="ctr" indent="0" marL="0">
               <a:buNone/>
             </a:pPr>
             <a:r>
-              <a:rPr lang="en-US" sz="1000" dirty="0">
-                <a:solidFill>
-                  <a:srgbClr val="6B6660"/>
+              <a:rPr lang="en-US" sz="1200" b="1" dirty="0">
+                <a:solidFill>
+                  <a:srgbClr val="FFFFFF"/>
                 </a:solidFill>
                 <a:latin typeface="Calibri" pitchFamily="34" charset="0"/>
                 <a:ea typeface="Calibri" pitchFamily="34" charset="-122"/>
                 <a:cs typeface="Calibri" pitchFamily="34" charset="-120"/>
               </a:rPr>
-              <a:t>Mr Zocchi · mrzocchi.com</a:t>
-            </a:r>
-            <a:endParaRPr lang="en-US" sz="1000" dirty="0"/>
+              <a:t>Term 4 · Algebra</a:t>
+            </a:r>
+            <a:endParaRPr lang="en-US" sz="1200" dirty="0"/>
           </a:p>
         </p:txBody>
       </p:sp>
@@ -1293,7 +1404,7 @@
     <p:bg>
       <p:bgPr>
         <a:solidFill>
-          <a:srgbClr val="FFFFFF"/>
+          <a:srgbClr val="FAF8F5"/>
         </a:solidFill>
       </p:bgPr>
     </p:bg>
@@ -1339,8 +1450,8 @@
         </p:nvSpPr>
         <p:spPr>
           <a:xfrm>
-            <a:off x="548640" y="274320"/>
-            <a:ext cx="8046720" cy="640080"/>
+            <a:off x="7772400" y="4709160"/>
+            <a:ext cx="1097280" cy="320040"/>
           </a:xfrm>
           <a:prstGeom prst="rect">
             <a:avLst/>
@@ -1349,14 +1460,105 @@
           <a:ln/>
         </p:spPr>
         <p:txBody>
-          <a:bodyPr wrap="square" lIns="0" tIns="0" rIns="0" bIns="0" rtlCol="0" anchor="ctr"/>
+          <a:bodyPr wrap="square" rtlCol="0" anchor="ctr"/>
+          <a:lstStyle/>
+          <a:p>
+            <a:pPr algn="r" indent="0" marL="0">
+              <a:buNone/>
+            </a:pPr>
+            <a:r>
+              <a:rPr lang="en-US" sz="900" dirty="0">
+                <a:solidFill>
+                  <a:srgbClr val="6B6660"/>
+                </a:solidFill>
+                <a:latin typeface="Calibri" pitchFamily="34" charset="0"/>
+                <a:ea typeface="Calibri" pitchFamily="34" charset="-122"/>
+                <a:cs typeface="Calibri" pitchFamily="34" charset="-120"/>
+              </a:rPr>
+              <a:t>2 / 5</a:t>
+            </a:r>
+            <a:endParaRPr lang="en-US" sz="900" dirty="0"/>
+          </a:p>
+        </p:txBody>
+      </p:sp>
+      <p:sp>
+        <p:nvSpPr>
+          <p:cNvPr id="4" name="Shape 2"/>
+          <p:cNvSpPr/>
+          <p:nvPr/>
+        </p:nvSpPr>
+        <p:spPr>
+          <a:xfrm>
+            <a:off x="1371600" y="914400"/>
+            <a:ext cx="6400800" cy="3200400"/>
+          </a:xfrm>
+          <a:prstGeom prst="rect">
+            <a:avLst/>
+          </a:prstGeom>
+          <a:solidFill>
+            <a:srgbClr val="FFFFFF"/>
+          </a:solidFill>
+          <a:ln w="12700">
+            <a:solidFill>
+              <a:srgbClr val="E5E2DC"/>
+            </a:solidFill>
+            <a:prstDash val="solid"/>
+          </a:ln>
+          <a:effectLst>
+            <a:outerShdw sx="100000" sy="100000" kx="0" ky="0" algn="bl" rotWithShape="0" blurRad="50800" dist="25400" dir="8100000">
+              <a:srgbClr val="000000">
+                <a:alpha val="10000"/>
+              </a:srgbClr>
+            </a:outerShdw>
+          </a:effectLst>
+        </p:spPr>
+      </p:sp>
+      <p:sp>
+        <p:nvSpPr>
+          <p:cNvPr id="5" name="Shape 3"/>
+          <p:cNvSpPr/>
+          <p:nvPr/>
+        </p:nvSpPr>
+        <p:spPr>
+          <a:xfrm>
+            <a:off x="1371600" y="914400"/>
+            <a:ext cx="91440" cy="3200400"/>
+          </a:xfrm>
+          <a:prstGeom prst="rect">
+            <a:avLst/>
+          </a:prstGeom>
+          <a:solidFill>
+            <a:srgbClr val="2A9D8F"/>
+          </a:solidFill>
+          <a:ln/>
+        </p:spPr>
+      </p:sp>
+      <p:sp>
+        <p:nvSpPr>
+          <p:cNvPr id="6" name="Text 4"/>
+          <p:cNvSpPr/>
+          <p:nvPr/>
+        </p:nvSpPr>
+        <p:spPr>
+          <a:xfrm>
+            <a:off x="1828800" y="1097280"/>
+            <a:ext cx="5669280" cy="640080"/>
+          </a:xfrm>
+          <a:prstGeom prst="rect">
+            <a:avLst/>
+          </a:prstGeom>
+          <a:noFill/>
+          <a:ln/>
+        </p:spPr>
+        <p:txBody>
+          <a:bodyPr wrap="square" rtlCol="0" anchor="ctr"/>
           <a:lstStyle/>
           <a:p>
             <a:pPr indent="0" marL="0">
               <a:buNone/>
             </a:pPr>
             <a:r>
-              <a:rPr lang="en-US" sz="2600" b="1" dirty="0">
+              <a:rPr lang="en-US" sz="2400" b="1" dirty="0">
                 <a:solidFill>
                   <a:srgbClr val="1B2A4A"/>
                 </a:solidFill>
@@ -1364,22 +1566,22 @@
                 <a:ea typeface="Georgia" pitchFamily="34" charset="-122"/>
                 <a:cs typeface="Georgia" pitchFamily="34" charset="-120"/>
               </a:rPr>
-              <a:t>What is Substitution?</a:t>
-            </a:r>
-            <a:endParaRPr lang="en-US" sz="2600" dirty="0"/>
-          </a:p>
-        </p:txBody>
-      </p:sp>
-      <p:sp>
-        <p:nvSpPr>
-          <p:cNvPr id="4" name="Text 2"/>
+              <a:t>Replacing Letters with Numbers</a:t>
+            </a:r>
+            <a:endParaRPr lang="en-US" sz="2400" dirty="0"/>
+          </a:p>
+        </p:txBody>
+      </p:sp>
+      <p:sp>
+        <p:nvSpPr>
+          <p:cNvPr id="7" name="Text 5"/>
           <p:cNvSpPr/>
           <p:nvPr/>
         </p:nvSpPr>
         <p:spPr>
           <a:xfrm>
-            <a:off x="548640" y="1097280"/>
-            <a:ext cx="8046720" cy="3474720"/>
+            <a:off x="1828800" y="1828800"/>
+            <a:ext cx="5669280" cy="2011680"/>
           </a:xfrm>
           <a:prstGeom prst="rect">
             <a:avLst/>
@@ -1391,12 +1593,11 @@
           <a:bodyPr wrap="square" rtlCol="0" anchor="t"/>
           <a:lstStyle/>
           <a:p>
-            <a:pPr marL="342900" indent="-342900">
-              <a:spcAft>
-                <a:spcPts val="800"/>
-              </a:spcAft>
-              <a:buSzPct val="100000"/>
-              <a:buChar char="•"/>
+            <a:pPr indent="0" marL="0">
+              <a:lnSpc>
+                <a:spcPct val="130000"/>
+              </a:lnSpc>
+              <a:buNone/>
             </a:pPr>
             <a:r>
               <a:rPr lang="en-US" sz="1500" dirty="0">
@@ -1407,129 +1608,9 @@
                 <a:ea typeface="Calibri" pitchFamily="34" charset="-122"/>
                 <a:cs typeface="Calibri" pitchFamily="34" charset="-120"/>
               </a:rPr>
-              <a:t>Replacing a letter with a number to calculate the value</a:t>
+              <a:t>Substitution means replacing a letter with a specific number to calculate the value of an expression. If x = 4, then 3x + 2 = 3(4) + 2 = 12 + 2 = 14. Follow BIDMAS rules when calculating.</a:t>
             </a:r>
             <a:endParaRPr lang="en-US" sz="1500" dirty="0"/>
-          </a:p>
-          <a:p>
-            <a:pPr marL="342900" indent="-342900">
-              <a:spcAft>
-                <a:spcPts val="800"/>
-              </a:spcAft>
-              <a:buSzPct val="100000"/>
-              <a:buChar char="•"/>
-            </a:pPr>
-            <a:r>
-              <a:rPr lang="en-US" sz="1500" dirty="0">
-                <a:solidFill>
-                  <a:srgbClr val="3D3A36"/>
-                </a:solidFill>
-                <a:latin typeface="Calibri" pitchFamily="34" charset="0"/>
-                <a:ea typeface="Calibri" pitchFamily="34" charset="-122"/>
-                <a:cs typeface="Calibri" pitchFamily="34" charset="-120"/>
-              </a:rPr>
-              <a:t>If n = 4, then 3n + 2 = 3(4) + 2 = 12 + 2 = 14</a:t>
-            </a:r>
-            <a:endParaRPr lang="en-US" sz="1500" dirty="0"/>
-          </a:p>
-          <a:p>
-            <a:pPr marL="342900" indent="-342900">
-              <a:spcAft>
-                <a:spcPts val="800"/>
-              </a:spcAft>
-              <a:buSzPct val="100000"/>
-              <a:buChar char="•"/>
-            </a:pPr>
-            <a:r>
-              <a:rPr lang="en-US" sz="1500" dirty="0">
-                <a:solidFill>
-                  <a:srgbClr val="3D3A36"/>
-                </a:solidFill>
-                <a:latin typeface="Calibri" pitchFamily="34" charset="0"/>
-                <a:ea typeface="Calibri" pitchFamily="34" charset="-122"/>
-                <a:cs typeface="Calibri" pitchFamily="34" charset="-120"/>
-              </a:rPr>
-              <a:t>Use BIDMAS when calculating</a:t>
-            </a:r>
-            <a:endParaRPr lang="en-US" sz="1500" dirty="0"/>
-          </a:p>
-          <a:p>
-            <a:pPr marL="342900" indent="-342900">
-              <a:spcAft>
-                <a:spcPts val="800"/>
-              </a:spcAft>
-              <a:buSzPct val="100000"/>
-              <a:buChar char="•"/>
-            </a:pPr>
-            <a:r>
-              <a:rPr lang="en-US" sz="1500" dirty="0">
-                <a:solidFill>
-                  <a:srgbClr val="3D3A36"/>
-                </a:solidFill>
-                <a:latin typeface="Calibri" pitchFamily="34" charset="0"/>
-                <a:ea typeface="Calibri" pitchFamily="34" charset="-122"/>
-                <a:cs typeface="Calibri" pitchFamily="34" charset="-120"/>
-              </a:rPr>
-              <a:t>Write out each step clearly</a:t>
-            </a:r>
-            <a:endParaRPr lang="en-US" sz="1500" dirty="0"/>
-          </a:p>
-          <a:p>
-            <a:pPr marL="342900" indent="-342900">
-              <a:spcAft>
-                <a:spcPts val="800"/>
-              </a:spcAft>
-              <a:buSzPct val="100000"/>
-              <a:buChar char="•"/>
-            </a:pPr>
-            <a:r>
-              <a:rPr lang="en-US" sz="1500" dirty="0">
-                <a:solidFill>
-                  <a:srgbClr val="3D3A36"/>
-                </a:solidFill>
-                <a:latin typeface="Calibri" pitchFamily="34" charset="0"/>
-                <a:ea typeface="Calibri" pitchFamily="34" charset="-122"/>
-                <a:cs typeface="Calibri" pitchFamily="34" charset="-120"/>
-              </a:rPr>
-              <a:t>Always substitute into the expression BEFORE simplifying</a:t>
-            </a:r>
-            <a:endParaRPr lang="en-US" sz="1500" dirty="0"/>
-          </a:p>
-        </p:txBody>
-      </p:sp>
-      <p:sp>
-        <p:nvSpPr>
-          <p:cNvPr id="5" name="Text 3"/>
-          <p:cNvSpPr/>
-          <p:nvPr/>
-        </p:nvSpPr>
-        <p:spPr>
-          <a:xfrm>
-            <a:off x="548640" y="4800600"/>
-            <a:ext cx="3657600" cy="274320"/>
-          </a:xfrm>
-          <a:prstGeom prst="rect">
-            <a:avLst/>
-          </a:prstGeom>
-          <a:noFill/>
-          <a:ln/>
-        </p:spPr>
-        <p:txBody>
-          <a:bodyPr wrap="square" rtlCol="0" anchor="ctr"/>
-          <a:lstStyle/>
-          <a:p>
-            <a:pPr indent="0" marL="0">
-              <a:buNone/>
-            </a:pPr>
-            <a:r>
-              <a:rPr lang="en-US" sz="800" dirty="0">
-                <a:solidFill>
-                  <a:srgbClr val="9B9690"/>
-                </a:solidFill>
-              </a:rPr>
-              <a:t>mrzocchi.com</a:t>
-            </a:r>
-            <a:endParaRPr lang="en-US" sz="800" dirty="0"/>
           </a:p>
         </p:txBody>
       </p:sp>
@@ -1547,7 +1628,7 @@
     <p:bg>
       <p:bgPr>
         <a:solidFill>
-          <a:srgbClr val="FFFFFF"/>
+          <a:srgbClr val="FAF8F5"/>
         </a:solidFill>
       </p:bgPr>
     </p:bg>
@@ -1593,8 +1674,8 @@
         </p:nvSpPr>
         <p:spPr>
           <a:xfrm>
-            <a:off x="548640" y="274320"/>
-            <a:ext cx="8046720" cy="640080"/>
+            <a:off x="7772400" y="4709160"/>
+            <a:ext cx="1097280" cy="320040"/>
           </a:xfrm>
           <a:prstGeom prst="rect">
             <a:avLst/>
@@ -1603,7 +1684,46 @@
           <a:ln/>
         </p:spPr>
         <p:txBody>
-          <a:bodyPr wrap="square" lIns="0" tIns="0" rIns="0" bIns="0" rtlCol="0" anchor="ctr"/>
+          <a:bodyPr wrap="square" rtlCol="0" anchor="ctr"/>
+          <a:lstStyle/>
+          <a:p>
+            <a:pPr algn="r" indent="0" marL="0">
+              <a:buNone/>
+            </a:pPr>
+            <a:r>
+              <a:rPr lang="en-US" sz="900" dirty="0">
+                <a:solidFill>
+                  <a:srgbClr val="6B6660"/>
+                </a:solidFill>
+                <a:latin typeface="Calibri" pitchFamily="34" charset="0"/>
+                <a:ea typeface="Calibri" pitchFamily="34" charset="-122"/>
+                <a:cs typeface="Calibri" pitchFamily="34" charset="-120"/>
+              </a:rPr>
+              <a:t>3 / 5</a:t>
+            </a:r>
+            <a:endParaRPr lang="en-US" sz="900" dirty="0"/>
+          </a:p>
+        </p:txBody>
+      </p:sp>
+      <p:sp>
+        <p:nvSpPr>
+          <p:cNvPr id="4" name="Text 2"/>
+          <p:cNvSpPr/>
+          <p:nvPr/>
+        </p:nvSpPr>
+        <p:spPr>
+          <a:xfrm>
+            <a:off x="457200" y="274320"/>
+            <a:ext cx="8229600" cy="640080"/>
+          </a:xfrm>
+          <a:prstGeom prst="rect">
+            <a:avLst/>
+          </a:prstGeom>
+          <a:noFill/>
+          <a:ln/>
+        </p:spPr>
+        <p:txBody>
+          <a:bodyPr wrap="square" rtlCol="0" anchor="ctr"/>
           <a:lstStyle/>
           <a:p>
             <a:pPr indent="0" marL="0">
@@ -1618,7 +1738,7 @@
                 <a:ea typeface="Georgia" pitchFamily="34" charset="-122"/>
                 <a:cs typeface="Georgia" pitchFamily="34" charset="-120"/>
               </a:rPr>
-              <a:t>Worked Examples</a:t>
+              <a:t>Examples</a:t>
             </a:r>
             <a:endParaRPr lang="en-US" sz="2600" dirty="0"/>
           </a:p>
@@ -1626,14 +1746,14 @@
       </p:sp>
       <p:sp>
         <p:nvSpPr>
-          <p:cNvPr id="4" name="Text 2"/>
+          <p:cNvPr id="5" name="Text 3"/>
           <p:cNvSpPr/>
           <p:nvPr/>
         </p:nvSpPr>
         <p:spPr>
           <a:xfrm>
-            <a:off x="548640" y="1097280"/>
-            <a:ext cx="8046720" cy="3474720"/>
+            <a:off x="457200" y="1188720"/>
+            <a:ext cx="3840480" cy="3474720"/>
           </a:xfrm>
           <a:prstGeom prst="rect">
             <a:avLst/>
@@ -1647,13 +1767,13 @@
           <a:p>
             <a:pPr marL="342900" indent="-342900">
               <a:spcAft>
-                <a:spcPts val="800"/>
+                <a:spcPts val="600"/>
               </a:spcAft>
               <a:buSzPct val="100000"/>
               <a:buChar char="•"/>
             </a:pPr>
             <a:r>
-              <a:rPr lang="en-US" sz="1500" dirty="0">
+              <a:rPr lang="en-US" sz="1400" dirty="0">
                 <a:solidFill>
                   <a:srgbClr val="3D3A36"/>
                 </a:solidFill>
@@ -1661,20 +1781,20 @@
                 <a:ea typeface="Calibri" pitchFamily="34" charset="-122"/>
                 <a:cs typeface="Calibri" pitchFamily="34" charset="-120"/>
               </a:rPr>
-              <a:t>If a = 3 and b = 5: find 2a + b = 2(3) + 5 = 6 + 5 = 11</a:t>
-            </a:r>
-            <a:endParaRPr lang="en-US" sz="1500" dirty="0"/>
+              <a:t>If a = 5: 2a + 3 = 2(5) + 3 = 10 + 3 = 13</a:t>
+            </a:r>
+            <a:endParaRPr lang="en-US" sz="1400" dirty="0"/>
           </a:p>
           <a:p>
             <a:pPr marL="342900" indent="-342900">
               <a:spcAft>
-                <a:spcPts val="800"/>
+                <a:spcPts val="600"/>
               </a:spcAft>
               <a:buSzPct val="100000"/>
               <a:buChar char="•"/>
             </a:pPr>
             <a:r>
-              <a:rPr lang="en-US" sz="1500" dirty="0">
+              <a:rPr lang="en-US" sz="1400" dirty="0">
                 <a:solidFill>
                   <a:srgbClr val="3D3A36"/>
                 </a:solidFill>
@@ -1682,20 +1802,20 @@
                 <a:ea typeface="Calibri" pitchFamily="34" charset="-122"/>
                 <a:cs typeface="Calibri" pitchFamily="34" charset="-120"/>
               </a:rPr>
-              <a:t>If x = 4: find x² + 3 = 4² + 3 = 16 + 3 = 19</a:t>
-            </a:r>
-            <a:endParaRPr lang="en-US" sz="1500" dirty="0"/>
+              <a:t>If n = 3: n² + 1 = 3² + 1 = 9 + 1 = 10</a:t>
+            </a:r>
+            <a:endParaRPr lang="en-US" sz="1400" dirty="0"/>
           </a:p>
           <a:p>
             <a:pPr marL="342900" indent="-342900">
               <a:spcAft>
-                <a:spcPts val="800"/>
+                <a:spcPts val="600"/>
               </a:spcAft>
               <a:buSzPct val="100000"/>
               <a:buChar char="•"/>
             </a:pPr>
             <a:r>
-              <a:rPr lang="en-US" sz="1500" dirty="0">
+              <a:rPr lang="en-US" sz="1400" dirty="0">
                 <a:solidFill>
                   <a:srgbClr val="3D3A36"/>
                 </a:solidFill>
@@ -1703,20 +1823,20 @@
                 <a:ea typeface="Calibri" pitchFamily="34" charset="-122"/>
                 <a:cs typeface="Calibri" pitchFamily="34" charset="-120"/>
               </a:rPr>
-              <a:t>If p = 2: find 5p - 3 = 5(2) - 3 = 10 - 3 = 7</a:t>
-            </a:r>
-            <a:endParaRPr lang="en-US" sz="1500" dirty="0"/>
+              <a:t>If x = 4, y = 2: 3x − y = 3(4) − 2 = 12 − 2 = 10</a:t>
+            </a:r>
+            <a:endParaRPr lang="en-US" sz="1400" dirty="0"/>
           </a:p>
           <a:p>
             <a:pPr marL="342900" indent="-342900">
               <a:spcAft>
-                <a:spcPts val="800"/>
+                <a:spcPts val="600"/>
               </a:spcAft>
               <a:buSzPct val="100000"/>
               <a:buChar char="•"/>
             </a:pPr>
             <a:r>
-              <a:rPr lang="en-US" sz="1500" dirty="0">
+              <a:rPr lang="en-US" sz="1400" dirty="0">
                 <a:solidFill>
                   <a:srgbClr val="3D3A36"/>
                 </a:solidFill>
@@ -1724,20 +1844,20 @@
                 <a:ea typeface="Calibri" pitchFamily="34" charset="-122"/>
                 <a:cs typeface="Calibri" pitchFamily="34" charset="-120"/>
               </a:rPr>
-              <a:t>If m = 6: find m/2 + 4 = 6/2 + 4 = 3 + 4 = 7</a:t>
-            </a:r>
-            <a:endParaRPr lang="en-US" sz="1500" dirty="0"/>
+              <a:t>If p = −2: 5p + 1 = 5(−2) + 1 = −10 + 1 = −9</a:t>
+            </a:r>
+            <a:endParaRPr lang="en-US" sz="1400" dirty="0"/>
           </a:p>
           <a:p>
             <a:pPr marL="342900" indent="-342900">
               <a:spcAft>
-                <a:spcPts val="800"/>
+                <a:spcPts val="600"/>
               </a:spcAft>
               <a:buSzPct val="100000"/>
               <a:buChar char="•"/>
             </a:pPr>
             <a:r>
-              <a:rPr lang="en-US" sz="1500" dirty="0">
+              <a:rPr lang="en-US" sz="1400" dirty="0">
                 <a:solidFill>
                   <a:srgbClr val="3D3A36"/>
                 </a:solidFill>
@@ -1745,22 +1865,74 @@
                 <a:ea typeface="Calibri" pitchFamily="34" charset="-122"/>
                 <a:cs typeface="Calibri" pitchFamily="34" charset="-120"/>
               </a:rPr>
-              <a:t>Two variables: if a=3, b=2: find ab = 3×2 = 6</a:t>
-            </a:r>
-            <a:endParaRPr lang="en-US" sz="1500" dirty="0"/>
-          </a:p>
-        </p:txBody>
-      </p:sp>
-      <p:sp>
-        <p:nvSpPr>
-          <p:cNvPr id="5" name="Text 3"/>
+              <a:t>If t = 6: t/2 + 4 = 6/2 + 4 = 3 + 4 = 7</a:t>
+            </a:r>
+            <a:endParaRPr lang="en-US" sz="1400" dirty="0"/>
+          </a:p>
+        </p:txBody>
+      </p:sp>
+      <p:sp>
+        <p:nvSpPr>
+          <p:cNvPr id="6" name="Shape 4"/>
           <p:cNvSpPr/>
           <p:nvPr/>
         </p:nvSpPr>
         <p:spPr>
           <a:xfrm>
-            <a:off x="548640" y="4800600"/>
-            <a:ext cx="3657600" cy="274320"/>
+            <a:off x="4846320" y="1188720"/>
+            <a:ext cx="3840480" cy="3474720"/>
+          </a:xfrm>
+          <a:prstGeom prst="rect">
+            <a:avLst/>
+          </a:prstGeom>
+          <a:solidFill>
+            <a:srgbClr val="FFFFFF"/>
+          </a:solidFill>
+          <a:ln w="12700">
+            <a:solidFill>
+              <a:srgbClr val="E5E2DC"/>
+            </a:solidFill>
+            <a:prstDash val="solid"/>
+          </a:ln>
+          <a:effectLst>
+            <a:outerShdw sx="100000" sy="100000" kx="0" ky="0" algn="bl" rotWithShape="0" blurRad="50800" dist="25400" dir="8100000">
+              <a:srgbClr val="000000">
+                <a:alpha val="10000"/>
+              </a:srgbClr>
+            </a:outerShdw>
+          </a:effectLst>
+        </p:spPr>
+      </p:sp>
+      <p:sp>
+        <p:nvSpPr>
+          <p:cNvPr id="7" name="Shape 5"/>
+          <p:cNvSpPr/>
+          <p:nvPr/>
+        </p:nvSpPr>
+        <p:spPr>
+          <a:xfrm>
+            <a:off x="4846320" y="1188720"/>
+            <a:ext cx="3840480" cy="54864"/>
+          </a:xfrm>
+          <a:prstGeom prst="rect">
+            <a:avLst/>
+          </a:prstGeom>
+          <a:solidFill>
+            <a:srgbClr val="2A9D8F"/>
+          </a:solidFill>
+          <a:ln/>
+        </p:spPr>
+      </p:sp>
+      <p:sp>
+        <p:nvSpPr>
+          <p:cNvPr id="8" name="Text 6"/>
+          <p:cNvSpPr/>
+          <p:nvPr/>
+        </p:nvSpPr>
+        <p:spPr>
+          <a:xfrm>
+            <a:off x="5120640" y="1371600"/>
+            <a:ext cx="3291840" cy="3108960"/>
           </a:xfrm>
           <a:prstGeom prst="rect">
             <a:avLst/>
@@ -1769,21 +1941,136 @@
           <a:ln/>
         </p:spPr>
         <p:txBody>
-          <a:bodyPr wrap="square" rtlCol="0" anchor="ctr"/>
+          <a:bodyPr wrap="square" rtlCol="0" anchor="t"/>
           <a:lstStyle/>
           <a:p>
             <a:pPr indent="0" marL="0">
+              <a:spcAft>
+                <a:spcPts val="400"/>
+              </a:spcAft>
               <a:buNone/>
             </a:pPr>
             <a:r>
-              <a:rPr lang="en-US" sz="800" dirty="0">
-                <a:solidFill>
-                  <a:srgbClr val="9B9690"/>
-                </a:solidFill>
-              </a:rPr>
-              <a:t>mrzocchi.com</a:t>
-            </a:r>
-            <a:endParaRPr lang="en-US" sz="800" dirty="0"/>
+              <a:rPr lang="en-US" sz="1600" b="1" dirty="0">
+                <a:solidFill>
+                  <a:srgbClr val="1B2A4A"/>
+                </a:solidFill>
+                <a:latin typeface="Calibri" pitchFamily="34" charset="0"/>
+                <a:ea typeface="Calibri" pitchFamily="34" charset="-122"/>
+                <a:cs typeface="Calibri" pitchFamily="34" charset="-120"/>
+              </a:rPr>
+              <a:t>Common Mistakes</a:t>
+            </a:r>
+            <a:endParaRPr lang="en-US" sz="1600" dirty="0"/>
+          </a:p>
+          <a:p>
+            <a:pPr indent="0" marL="0">
+              <a:spcAft>
+                <a:spcPts val="400"/>
+              </a:spcAft>
+              <a:buNone/>
+            </a:pPr>
+            <a:endParaRPr lang="en-US" sz="1600" dirty="0"/>
+          </a:p>
+          <a:p>
+            <a:pPr indent="0" marL="0">
+              <a:spcAft>
+                <a:spcPts val="400"/>
+              </a:spcAft>
+              <a:buNone/>
+            </a:pPr>
+            <a:r>
+              <a:rPr lang="en-US" sz="1300" dirty="0">
+                <a:solidFill>
+                  <a:srgbClr val="3D3A36"/>
+                </a:solidFill>
+                <a:latin typeface="Calibri" pitchFamily="34" charset="0"/>
+                <a:ea typeface="Calibri" pitchFamily="34" charset="-122"/>
+                <a:cs typeface="Calibri" pitchFamily="34" charset="-120"/>
+              </a:rPr>
+              <a:t>Forgetting to multiply: 3x when x=4 is 12, NOT 34</a:t>
+            </a:r>
+            <a:endParaRPr lang="en-US" sz="1600" dirty="0"/>
+          </a:p>
+          <a:p>
+            <a:pPr indent="0" marL="0">
+              <a:spcAft>
+                <a:spcPts val="400"/>
+              </a:spcAft>
+              <a:buNone/>
+            </a:pPr>
+            <a:r>
+              <a:rPr lang="en-US" sz="1300" dirty="0">
+                <a:solidFill>
+                  <a:srgbClr val="3D3A36"/>
+                </a:solidFill>
+                <a:latin typeface="Calibri" pitchFamily="34" charset="0"/>
+                <a:ea typeface="Calibri" pitchFamily="34" charset="-122"/>
+                <a:cs typeface="Calibri" pitchFamily="34" charset="-120"/>
+              </a:rPr>
+              <a:t>Not using BIDMAS: 2 + 3x when x=4 is 2 + 12 = 14, NOT 20</a:t>
+            </a:r>
+            <a:endParaRPr lang="en-US" sz="1600" dirty="0"/>
+          </a:p>
+          <a:p>
+            <a:pPr indent="0" marL="0">
+              <a:spcAft>
+                <a:spcPts val="400"/>
+              </a:spcAft>
+              <a:buNone/>
+            </a:pPr>
+            <a:r>
+              <a:rPr lang="en-US" sz="1300" dirty="0">
+                <a:solidFill>
+                  <a:srgbClr val="3D3A36"/>
+                </a:solidFill>
+                <a:latin typeface="Calibri" pitchFamily="34" charset="0"/>
+                <a:ea typeface="Calibri" pitchFamily="34" charset="-122"/>
+                <a:cs typeface="Calibri" pitchFamily="34" charset="-120"/>
+              </a:rPr>
+              <a:t>Squaring negatives: (−3)² = 9 (positive!), but −3² = −9</a:t>
+            </a:r>
+            <a:endParaRPr lang="en-US" sz="1600" dirty="0"/>
+          </a:p>
+          <a:p>
+            <a:pPr indent="0" marL="0">
+              <a:spcAft>
+                <a:spcPts val="400"/>
+              </a:spcAft>
+              <a:buNone/>
+            </a:pPr>
+            <a:r>
+              <a:rPr lang="en-US" sz="1300" dirty="0">
+                <a:solidFill>
+                  <a:srgbClr val="3D3A36"/>
+                </a:solidFill>
+                <a:latin typeface="Calibri" pitchFamily="34" charset="0"/>
+                <a:ea typeface="Calibri" pitchFamily="34" charset="-122"/>
+                <a:cs typeface="Calibri" pitchFamily="34" charset="-120"/>
+              </a:rPr>
+              <a:t>Not substituting every occurrence of the letter</a:t>
+            </a:r>
+            <a:endParaRPr lang="en-US" sz="1600" dirty="0"/>
+          </a:p>
+          <a:p>
+            <a:pPr indent="0" marL="0">
+              <a:spcAft>
+                <a:spcPts val="400"/>
+              </a:spcAft>
+              <a:buNone/>
+            </a:pPr>
+            <a:r>
+              <a:rPr lang="en-US" sz="1300" dirty="0">
+                <a:solidFill>
+                  <a:srgbClr val="3D3A36"/>
+                </a:solidFill>
+                <a:latin typeface="Calibri" pitchFamily="34" charset="0"/>
+                <a:ea typeface="Calibri" pitchFamily="34" charset="-122"/>
+                <a:cs typeface="Calibri" pitchFamily="34" charset="-120"/>
+              </a:rPr>
+              <a:t>Writing the letter instead of the number in the answer</a:t>
+            </a:r>
+            <a:endParaRPr lang="en-US" sz="1600" dirty="0"/>
           </a:p>
         </p:txBody>
       </p:sp>
@@ -1798,6 +2085,263 @@
 <file path=ppt/slides/slide4.xml><?xml version="1.0" encoding="utf-8"?>
 <p:sld xmlns:a="http://schemas.openxmlformats.org/drawingml/2006/main" xmlns:r="http://schemas.openxmlformats.org/officeDocument/2006/relationships" xmlns:p="http://schemas.openxmlformats.org/presentationml/2006/main">
   <p:cSld name="Slide 4">
+    <p:bg>
+      <p:bgPr>
+        <a:solidFill>
+          <a:srgbClr val="FAF8F5"/>
+        </a:solidFill>
+      </p:bgPr>
+    </p:bg>
+    <p:spTree>
+      <p:nvGrpSpPr>
+        <p:cNvPr id="1" name=""/>
+        <p:cNvGrpSpPr/>
+        <p:nvPr/>
+      </p:nvGrpSpPr>
+      <p:grpSpPr>
+        <a:xfrm>
+          <a:off x="0" y="0"/>
+          <a:ext cx="0" cy="0"/>
+          <a:chOff x="0" y="0"/>
+          <a:chExt cx="0" cy="0"/>
+        </a:xfrm>
+      </p:grpSpPr>
+      <p:sp>
+        <p:nvSpPr>
+          <p:cNvPr id="2" name="Shape 0"/>
+          <p:cNvSpPr/>
+          <p:nvPr/>
+        </p:nvSpPr>
+        <p:spPr>
+          <a:xfrm>
+            <a:off x="0" y="0"/>
+            <a:ext cx="9144000" cy="54864"/>
+          </a:xfrm>
+          <a:prstGeom prst="rect">
+            <a:avLst/>
+          </a:prstGeom>
+          <a:solidFill>
+            <a:srgbClr val="2A9D8F"/>
+          </a:solidFill>
+          <a:ln/>
+        </p:spPr>
+      </p:sp>
+      <p:sp>
+        <p:nvSpPr>
+          <p:cNvPr id="3" name="Text 1"/>
+          <p:cNvSpPr/>
+          <p:nvPr/>
+        </p:nvSpPr>
+        <p:spPr>
+          <a:xfrm>
+            <a:off x="7772400" y="4709160"/>
+            <a:ext cx="1097280" cy="320040"/>
+          </a:xfrm>
+          <a:prstGeom prst="rect">
+            <a:avLst/>
+          </a:prstGeom>
+          <a:noFill/>
+          <a:ln/>
+        </p:spPr>
+        <p:txBody>
+          <a:bodyPr wrap="square" rtlCol="0" anchor="ctr"/>
+          <a:lstStyle/>
+          <a:p>
+            <a:pPr algn="r" indent="0" marL="0">
+              <a:buNone/>
+            </a:pPr>
+            <a:r>
+              <a:rPr lang="en-US" sz="900" dirty="0">
+                <a:solidFill>
+                  <a:srgbClr val="6B6660"/>
+                </a:solidFill>
+                <a:latin typeface="Calibri" pitchFamily="34" charset="0"/>
+                <a:ea typeface="Calibri" pitchFamily="34" charset="-122"/>
+                <a:cs typeface="Calibri" pitchFamily="34" charset="-120"/>
+              </a:rPr>
+              <a:t>4 / 5</a:t>
+            </a:r>
+            <a:endParaRPr lang="en-US" sz="900" dirty="0"/>
+          </a:p>
+        </p:txBody>
+      </p:sp>
+      <p:sp>
+        <p:nvSpPr>
+          <p:cNvPr id="4" name="Text 2"/>
+          <p:cNvSpPr/>
+          <p:nvPr/>
+        </p:nvSpPr>
+        <p:spPr>
+          <a:xfrm>
+            <a:off x="457200" y="274320"/>
+            <a:ext cx="8229600" cy="640080"/>
+          </a:xfrm>
+          <a:prstGeom prst="rect">
+            <a:avLst/>
+          </a:prstGeom>
+          <a:noFill/>
+          <a:ln/>
+        </p:spPr>
+        <p:txBody>
+          <a:bodyPr wrap="square" rtlCol="0" anchor="ctr"/>
+          <a:lstStyle/>
+          <a:p>
+            <a:pPr indent="0" marL="0">
+              <a:buNone/>
+            </a:pPr>
+            <a:r>
+              <a:rPr lang="en-US" sz="2600" b="1" dirty="0">
+                <a:solidFill>
+                  <a:srgbClr val="1B2A4A"/>
+                </a:solidFill>
+                <a:latin typeface="Georgia" pitchFamily="34" charset="0"/>
+                <a:ea typeface="Georgia" pitchFamily="34" charset="-122"/>
+                <a:cs typeface="Georgia" pitchFamily="34" charset="-120"/>
+              </a:rPr>
+              <a:t>Practice</a:t>
+            </a:r>
+            <a:endParaRPr lang="en-US" sz="2600" dirty="0"/>
+          </a:p>
+        </p:txBody>
+      </p:sp>
+      <p:sp>
+        <p:nvSpPr>
+          <p:cNvPr id="5" name="Text 3"/>
+          <p:cNvSpPr/>
+          <p:nvPr/>
+        </p:nvSpPr>
+        <p:spPr>
+          <a:xfrm>
+            <a:off x="457200" y="1097280"/>
+            <a:ext cx="8229600" cy="3657600"/>
+          </a:xfrm>
+          <a:prstGeom prst="rect">
+            <a:avLst/>
+          </a:prstGeom>
+          <a:noFill/>
+          <a:ln/>
+        </p:spPr>
+        <p:txBody>
+          <a:bodyPr wrap="square" rtlCol="0" anchor="t"/>
+          <a:lstStyle/>
+          <a:p>
+            <a:pPr marL="342900" indent="-342900">
+              <a:spcAft>
+                <a:spcPts val="800"/>
+              </a:spcAft>
+              <a:buSzPct val="100000"/>
+              <a:buChar char="•"/>
+            </a:pPr>
+            <a:r>
+              <a:rPr lang="en-US" sz="1400" dirty="0">
+                <a:solidFill>
+                  <a:srgbClr val="3D3A36"/>
+                </a:solidFill>
+                <a:latin typeface="Calibri" pitchFamily="34" charset="0"/>
+                <a:ea typeface="Calibri" pitchFamily="34" charset="-122"/>
+                <a:cs typeface="Calibri" pitchFamily="34" charset="-120"/>
+              </a:rPr>
+              <a:t>If a = 3 and b = 7: a + b = 10, ab = 21, a² + b = 16</a:t>
+            </a:r>
+            <a:endParaRPr lang="en-US" sz="1400" dirty="0"/>
+          </a:p>
+          <a:p>
+            <a:pPr marL="342900" indent="-342900">
+              <a:spcAft>
+                <a:spcPts val="800"/>
+              </a:spcAft>
+              <a:buSzPct val="100000"/>
+              <a:buChar char="•"/>
+            </a:pPr>
+            <a:r>
+              <a:rPr lang="en-US" sz="1400" dirty="0">
+                <a:solidFill>
+                  <a:srgbClr val="3D3A36"/>
+                </a:solidFill>
+                <a:latin typeface="Calibri" pitchFamily="34" charset="0"/>
+                <a:ea typeface="Calibri" pitchFamily="34" charset="-122"/>
+                <a:cs typeface="Calibri" pitchFamily="34" charset="-120"/>
+              </a:rPr>
+              <a:t>If x = −4: 2x + 10 = 2(−4) + 10 = −8 + 10 = 2</a:t>
+            </a:r>
+            <a:endParaRPr lang="en-US" sz="1400" dirty="0"/>
+          </a:p>
+          <a:p>
+            <a:pPr marL="342900" indent="-342900">
+              <a:spcAft>
+                <a:spcPts val="800"/>
+              </a:spcAft>
+              <a:buSzPct val="100000"/>
+              <a:buChar char="•"/>
+            </a:pPr>
+            <a:r>
+              <a:rPr lang="en-US" sz="1400" dirty="0">
+                <a:solidFill>
+                  <a:srgbClr val="3D3A36"/>
+                </a:solidFill>
+                <a:latin typeface="Calibri" pitchFamily="34" charset="0"/>
+                <a:ea typeface="Calibri" pitchFamily="34" charset="-122"/>
+                <a:cs typeface="Calibri" pitchFamily="34" charset="-120"/>
+              </a:rPr>
+              <a:t>Formula: Area = ½bh. If b = 6, h = 8: A = ½ × 6 × 8 = 24</a:t>
+            </a:r>
+            <a:endParaRPr lang="en-US" sz="1400" dirty="0"/>
+          </a:p>
+          <a:p>
+            <a:pPr marL="342900" indent="-342900">
+              <a:spcAft>
+                <a:spcPts val="800"/>
+              </a:spcAft>
+              <a:buSzPct val="100000"/>
+              <a:buChar char="•"/>
+            </a:pPr>
+            <a:r>
+              <a:rPr lang="en-US" sz="1400" dirty="0">
+                <a:solidFill>
+                  <a:srgbClr val="3D3A36"/>
+                </a:solidFill>
+                <a:latin typeface="Calibri" pitchFamily="34" charset="0"/>
+                <a:ea typeface="Calibri" pitchFamily="34" charset="-122"/>
+                <a:cs typeface="Calibri" pitchFamily="34" charset="-120"/>
+              </a:rPr>
+              <a:t>Perimeter = 2(l + w). If l = 12, w = 5: P = 2(17) = 34</a:t>
+            </a:r>
+            <a:endParaRPr lang="en-US" sz="1400" dirty="0"/>
+          </a:p>
+          <a:p>
+            <a:pPr marL="342900" indent="-342900">
+              <a:spcAft>
+                <a:spcPts val="800"/>
+              </a:spcAft>
+              <a:buSzPct val="100000"/>
+              <a:buChar char="•"/>
+            </a:pPr>
+            <a:r>
+              <a:rPr lang="en-US" sz="1400" dirty="0">
+                <a:solidFill>
+                  <a:srgbClr val="3D3A36"/>
+                </a:solidFill>
+                <a:latin typeface="Calibri" pitchFamily="34" charset="0"/>
+                <a:ea typeface="Calibri" pitchFamily="34" charset="-122"/>
+                <a:cs typeface="Calibri" pitchFamily="34" charset="-120"/>
+              </a:rPr>
+              <a:t>Substitution is used in formulas throughout maths and science</a:t>
+            </a:r>
+            <a:endParaRPr lang="en-US" sz="1400" dirty="0"/>
+          </a:p>
+        </p:txBody>
+      </p:sp>
+    </p:spTree>
+  </p:cSld>
+  <p:clrMapOvr>
+    <a:masterClrMapping/>
+  </p:clrMapOvr>
+</p:sld>
+</file>
+
+<file path=ppt/slides/slide5.xml><?xml version="1.0" encoding="utf-8"?>
+<p:sld xmlns:a="http://schemas.openxmlformats.org/drawingml/2006/main" xmlns:r="http://schemas.openxmlformats.org/officeDocument/2006/relationships" xmlns:p="http://schemas.openxmlformats.org/presentationml/2006/main">
+  <p:cSld name="Slide 5">
     <p:bg>
       <p:bgPr>
         <a:solidFill>
@@ -1828,13 +2372,13 @@
         <p:spPr>
           <a:xfrm>
             <a:off x="0" y="0"/>
-            <a:ext cx="9144000" cy="54864"/>
-          </a:xfrm>
-          <a:prstGeom prst="rect">
-            <a:avLst/>
-          </a:prstGeom>
-          <a:solidFill>
-            <a:srgbClr val="2A9D8F"/>
+            <a:ext cx="109728" cy="5143500"/>
+          </a:xfrm>
+          <a:prstGeom prst="rect">
+            <a:avLst/>
+          </a:prstGeom>
+          <a:solidFill>
+            <a:srgbClr val="E9C46A"/>
           </a:solidFill>
           <a:ln/>
         </p:spPr>
@@ -1847,8 +2391,8 @@
         </p:nvSpPr>
         <p:spPr>
           <a:xfrm>
-            <a:off x="548640" y="457200"/>
-            <a:ext cx="8046720" cy="640080"/>
+            <a:off x="731520" y="457200"/>
+            <a:ext cx="7772400" cy="731520"/>
           </a:xfrm>
           <a:prstGeom prst="rect">
             <a:avLst/>
@@ -1864,7 +2408,7 @@
               <a:buNone/>
             </a:pPr>
             <a:r>
-              <a:rPr lang="en-US" sz="2800" b="1" dirty="0">
+              <a:rPr lang="en-US" sz="3200" b="1" dirty="0">
                 <a:solidFill>
                   <a:srgbClr val="FFFFFF"/>
                 </a:solidFill>
@@ -1874,7 +2418,7 @@
               </a:rPr>
               <a:t>Key Takeaways</a:t>
             </a:r>
-            <a:endParaRPr lang="en-US" sz="2800" dirty="0"/>
+            <a:endParaRPr lang="en-US" sz="3200" dirty="0"/>
           </a:p>
         </p:txBody>
       </p:sp>
@@ -1886,8 +2430,8 @@
         </p:nvSpPr>
         <p:spPr>
           <a:xfrm>
-            <a:off x="731520" y="1371600"/>
-            <a:ext cx="7680960" cy="3200400"/>
+            <a:off x="731520" y="1463040"/>
+            <a:ext cx="7772400" cy="3200400"/>
           </a:xfrm>
           <a:prstGeom prst="rect">
             <a:avLst/>
@@ -1907,7 +2451,7 @@
               <a:buChar char="•"/>
             </a:pPr>
             <a:r>
-              <a:rPr lang="en-US" sz="1600" dirty="0">
+              <a:rPr lang="en-US" sz="1500" dirty="0">
                 <a:solidFill>
                   <a:srgbClr val="CADCFC"/>
                 </a:solidFill>
@@ -1915,9 +2459,9 @@
                 <a:ea typeface="Calibri" pitchFamily="34" charset="-122"/>
                 <a:cs typeface="Calibri" pitchFamily="34" charset="-120"/>
               </a:rPr>
-              <a:t>Substitute = replace the letter with a number</a:t>
-            </a:r>
-            <a:endParaRPr lang="en-US" sz="1600" dirty="0"/>
+              <a:t>Substitution = replacing letters with numbers</a:t>
+            </a:r>
+            <a:endParaRPr lang="en-US" sz="1500" dirty="0"/>
           </a:p>
           <a:p>
             <a:pPr marL="342900" indent="-342900">
@@ -1928,7 +2472,7 @@
               <a:buChar char="•"/>
             </a:pPr>
             <a:r>
-              <a:rPr lang="en-US" sz="1600" dirty="0">
+              <a:rPr lang="en-US" sz="1500" dirty="0">
                 <a:solidFill>
                   <a:srgbClr val="CADCFC"/>
                 </a:solidFill>
@@ -1936,9 +2480,9 @@
                 <a:ea typeface="Calibri" pitchFamily="34" charset="-122"/>
                 <a:cs typeface="Calibri" pitchFamily="34" charset="-120"/>
               </a:rPr>
-              <a:t>Use BIDMAS order when calculating</a:t>
-            </a:r>
-            <a:endParaRPr lang="en-US" sz="1600" dirty="0"/>
+              <a:t>Follow BIDMAS when calculating</a:t>
+            </a:r>
+            <a:endParaRPr lang="en-US" sz="1500" dirty="0"/>
           </a:p>
           <a:p>
             <a:pPr marL="342900" indent="-342900">
@@ -1949,7 +2493,7 @@
               <a:buChar char="•"/>
             </a:pPr>
             <a:r>
-              <a:rPr lang="en-US" sz="1600" dirty="0">
+              <a:rPr lang="en-US" sz="1500" dirty="0">
                 <a:solidFill>
                   <a:srgbClr val="CADCFC"/>
                 </a:solidFill>
@@ -1957,9 +2501,9 @@
                 <a:ea typeface="Calibri" pitchFamily="34" charset="-122"/>
                 <a:cs typeface="Calibri" pitchFamily="34" charset="-120"/>
               </a:rPr>
-              <a:t>Show each step of your working</a:t>
-            </a:r>
-            <a:endParaRPr lang="en-US" sz="1600" dirty="0"/>
+              <a:t>3x means 3 × x (not 'thirty-x')</a:t>
+            </a:r>
+            <a:endParaRPr lang="en-US" sz="1500" dirty="0"/>
           </a:p>
           <a:p>
             <a:pPr marL="342900" indent="-342900">
@@ -1970,7 +2514,7 @@
               <a:buChar char="•"/>
             </a:pPr>
             <a:r>
-              <a:rPr lang="en-US" sz="1600" dirty="0">
+              <a:rPr lang="en-US" sz="1500" dirty="0">
                 <a:solidFill>
                   <a:srgbClr val="CADCFC"/>
                 </a:solidFill>
@@ -1978,9 +2522,30 @@
                 <a:ea typeface="Calibri" pitchFamily="34" charset="-122"/>
                 <a:cs typeface="Calibri" pitchFamily="34" charset="-120"/>
               </a:rPr>
-              <a:t>Check: does your answer make sense?</a:t>
-            </a:r>
-            <a:endParaRPr lang="en-US" sz="1600" dirty="0"/>
+              <a:t>(−3)² = 9 but −3² = −9 — brackets matter!</a:t>
+            </a:r>
+            <a:endParaRPr lang="en-US" sz="1500" dirty="0"/>
+          </a:p>
+          <a:p>
+            <a:pPr marL="342900" indent="-342900">
+              <a:spcAft>
+                <a:spcPts val="1000"/>
+              </a:spcAft>
+              <a:buSzPct val="100000"/>
+              <a:buChar char="•"/>
+            </a:pPr>
+            <a:r>
+              <a:rPr lang="en-US" sz="1500" dirty="0">
+                <a:solidFill>
+                  <a:srgbClr val="CADCFC"/>
+                </a:solidFill>
+                <a:latin typeface="Calibri" pitchFamily="34" charset="0"/>
+                <a:ea typeface="Calibri" pitchFamily="34" charset="-122"/>
+                <a:cs typeface="Calibri" pitchFamily="34" charset="-120"/>
+              </a:rPr>
+              <a:t>Used in formulas: area, perimeter, speed, etc.</a:t>
+            </a:r>
+            <a:endParaRPr lang="en-US" sz="1500" dirty="0"/>
           </a:p>
         </p:txBody>
       </p:sp>
@@ -1992,8 +2557,8 @@
         </p:nvSpPr>
         <p:spPr>
           <a:xfrm>
-            <a:off x="548640" y="4572000"/>
-            <a:ext cx="3657600" cy="274320"/>
+            <a:off x="731520" y="4572000"/>
+            <a:ext cx="7772400" cy="365760"/>
           </a:xfrm>
           <a:prstGeom prst="rect">
             <a:avLst/>
@@ -2009,14 +2574,17 @@
               <a:buNone/>
             </a:pPr>
             <a:r>
-              <a:rPr lang="en-US" sz="1000" dirty="0">
-                <a:solidFill>
-                  <a:srgbClr val="6B6660"/>
-                </a:solidFill>
+              <a:rPr lang="en-US" sz="1100" dirty="0">
+                <a:solidFill>
+                  <a:srgbClr val="E9C46A"/>
+                </a:solidFill>
+                <a:latin typeface="Calibri" pitchFamily="34" charset="0"/>
+                <a:ea typeface="Calibri" pitchFamily="34" charset="-122"/>
+                <a:cs typeface="Calibri" pitchFamily="34" charset="-120"/>
               </a:rPr>
               <a:t>mrzocchi.com</a:t>
             </a:r>
-            <a:endParaRPr lang="en-US" sz="1000" dirty="0"/>
+            <a:endParaRPr lang="en-US" sz="1100" dirty="0"/>
           </a:p>
         </p:txBody>
       </p:sp>

--- a/static/ppts/G6_Math_T4_Substitution.pptx
+++ b/static/ppts/G6_Math_T4_Substitution.pptx
@@ -10,9 +10,12 @@
     <p:sldId id="258" r:id="rId4"/>
     <p:sldId id="259" r:id="rId5"/>
     <p:sldId id="260" r:id="rId6"/>
+    <p:sldId id="261" r:id="rId7"/>
+    <p:sldId id="262" r:id="rId8"/>
+    <p:sldId id="263" r:id="rId9"/>
   </p:sldIdLst>
   <p:notesMasterIdLst>
-    <p:notesMasterId r:id="rId7"/>
+    <p:notesMasterId r:id="rId10"/>
   </p:notesMasterIdLst>
   <p:sldSz cx="9144000" cy="5143500"/>
   <p:notesSz cx="5143500" cy="9144000"/>
@@ -900,6 +903,270 @@
 </p:notes>
 </file>
 
+<file path=ppt/notesSlides/notesSlide6.xml><?xml version="1.0" encoding="utf-8"?>
+<p:notes xmlns:a="http://schemas.openxmlformats.org/drawingml/2006/main" xmlns:r="http://schemas.openxmlformats.org/officeDocument/2006/relationships" xmlns:p="http://schemas.openxmlformats.org/presentationml/2006/main">
+  <p:cSld>
+    <p:spTree>
+      <p:nvGrpSpPr>
+        <p:cNvPr id="1" name=""/>
+        <p:cNvGrpSpPr/>
+        <p:nvPr/>
+      </p:nvGrpSpPr>
+      <p:grpSpPr>
+        <a:xfrm>
+          <a:off x="0" y="0"/>
+          <a:ext cx="0" cy="0"/>
+          <a:chOff x="0" y="0"/>
+          <a:chExt cx="0" cy="0"/>
+        </a:xfrm>
+      </p:grpSpPr>
+      <p:sp>
+        <p:nvSpPr>
+          <p:cNvPr id="2" name="Slide Image Placeholder 1"/>
+          <p:cNvSpPr>
+            <a:spLocks noGrp="1" noRot="1" noChangeAspect="1"/>
+          </p:cNvSpPr>
+          <p:nvPr>
+            <p:ph type="sldImg"/>
+          </p:nvPr>
+        </p:nvSpPr>
+        <p:spPr/>
+      </p:sp>
+      <p:sp>
+        <p:nvSpPr>
+          <p:cNvPr id="3" name="Notes Placeholder 2"/>
+          <p:cNvSpPr>
+            <a:spLocks noGrp="1"/>
+          </p:cNvSpPr>
+          <p:nvPr>
+            <p:ph type="body" idx="1"/>
+          </p:nvPr>
+        </p:nvSpPr>
+        <p:spPr/>
+        <p:txBody>
+          <a:bodyPr/>
+          <a:lstStyle/>
+          <a:p>
+            <a:r>
+              <a:rPr lang="en-US" dirty="0"/>
+              <a:t/>
+            </a:r>
+            <a:endParaRPr lang="en-US" dirty="0"/>
+          </a:p>
+        </p:txBody>
+      </p:sp>
+      <p:sp>
+        <p:nvSpPr>
+          <p:cNvPr id="4" name="Slide Number Placeholder 3"/>
+          <p:cNvSpPr>
+            <a:spLocks noGrp="1"/>
+          </p:cNvSpPr>
+          <p:nvPr>
+            <p:ph type="sldNum" sz="quarter" idx="10"/>
+          </p:nvPr>
+        </p:nvSpPr>
+        <p:spPr/>
+        <p:txBody>
+          <a:bodyPr/>
+          <a:lstStyle/>
+          <a:p>
+            <a:fld id="{F7021451-1387-4CA6-816F-3879F97B5CBC}" type="slidenum">
+              <a:rPr lang="en-US"/>
+              <a:t>6</a:t>
+            </a:fld>
+            <a:endParaRPr lang="en-US"/>
+          </a:p>
+        </p:txBody>
+      </p:sp>
+    </p:spTree>
+    <p:extLst>
+      <p:ext uri="{BB962C8B-B14F-4D97-AF65-F5344CB8AC3E}">
+        <p14:creationId xmlns:p14="http://schemas.microsoft.com/office/powerpoint/2010/main" val="1024086991"/>
+      </p:ext>
+    </p:extLst>
+  </p:cSld>
+  <p:clrMapOvr>
+    <a:masterClrMapping/>
+  </p:clrMapOvr>
+</p:notes>
+</file>
+
+<file path=ppt/notesSlides/notesSlide7.xml><?xml version="1.0" encoding="utf-8"?>
+<p:notes xmlns:a="http://schemas.openxmlformats.org/drawingml/2006/main" xmlns:r="http://schemas.openxmlformats.org/officeDocument/2006/relationships" xmlns:p="http://schemas.openxmlformats.org/presentationml/2006/main">
+  <p:cSld>
+    <p:spTree>
+      <p:nvGrpSpPr>
+        <p:cNvPr id="1" name=""/>
+        <p:cNvGrpSpPr/>
+        <p:nvPr/>
+      </p:nvGrpSpPr>
+      <p:grpSpPr>
+        <a:xfrm>
+          <a:off x="0" y="0"/>
+          <a:ext cx="0" cy="0"/>
+          <a:chOff x="0" y="0"/>
+          <a:chExt cx="0" cy="0"/>
+        </a:xfrm>
+      </p:grpSpPr>
+      <p:sp>
+        <p:nvSpPr>
+          <p:cNvPr id="2" name="Slide Image Placeholder 1"/>
+          <p:cNvSpPr>
+            <a:spLocks noGrp="1" noRot="1" noChangeAspect="1"/>
+          </p:cNvSpPr>
+          <p:nvPr>
+            <p:ph type="sldImg"/>
+          </p:nvPr>
+        </p:nvSpPr>
+        <p:spPr/>
+      </p:sp>
+      <p:sp>
+        <p:nvSpPr>
+          <p:cNvPr id="3" name="Notes Placeholder 2"/>
+          <p:cNvSpPr>
+            <a:spLocks noGrp="1"/>
+          </p:cNvSpPr>
+          <p:nvPr>
+            <p:ph type="body" idx="1"/>
+          </p:nvPr>
+        </p:nvSpPr>
+        <p:spPr/>
+        <p:txBody>
+          <a:bodyPr/>
+          <a:lstStyle/>
+          <a:p>
+            <a:r>
+              <a:rPr lang="en-US" dirty="0"/>
+              <a:t/>
+            </a:r>
+            <a:endParaRPr lang="en-US" dirty="0"/>
+          </a:p>
+        </p:txBody>
+      </p:sp>
+      <p:sp>
+        <p:nvSpPr>
+          <p:cNvPr id="4" name="Slide Number Placeholder 3"/>
+          <p:cNvSpPr>
+            <a:spLocks noGrp="1"/>
+          </p:cNvSpPr>
+          <p:nvPr>
+            <p:ph type="sldNum" sz="quarter" idx="10"/>
+          </p:nvPr>
+        </p:nvSpPr>
+        <p:spPr/>
+        <p:txBody>
+          <a:bodyPr/>
+          <a:lstStyle/>
+          <a:p>
+            <a:fld id="{F7021451-1387-4CA6-816F-3879F97B5CBC}" type="slidenum">
+              <a:rPr lang="en-US"/>
+              <a:t>7</a:t>
+            </a:fld>
+            <a:endParaRPr lang="en-US"/>
+          </a:p>
+        </p:txBody>
+      </p:sp>
+    </p:spTree>
+    <p:extLst>
+      <p:ext uri="{BB962C8B-B14F-4D97-AF65-F5344CB8AC3E}">
+        <p14:creationId xmlns:p14="http://schemas.microsoft.com/office/powerpoint/2010/main" val="1024086991"/>
+      </p:ext>
+    </p:extLst>
+  </p:cSld>
+  <p:clrMapOvr>
+    <a:masterClrMapping/>
+  </p:clrMapOvr>
+</p:notes>
+</file>
+
+<file path=ppt/notesSlides/notesSlide8.xml><?xml version="1.0" encoding="utf-8"?>
+<p:notes xmlns:a="http://schemas.openxmlformats.org/drawingml/2006/main" xmlns:r="http://schemas.openxmlformats.org/officeDocument/2006/relationships" xmlns:p="http://schemas.openxmlformats.org/presentationml/2006/main">
+  <p:cSld>
+    <p:spTree>
+      <p:nvGrpSpPr>
+        <p:cNvPr id="1" name=""/>
+        <p:cNvGrpSpPr/>
+        <p:nvPr/>
+      </p:nvGrpSpPr>
+      <p:grpSpPr>
+        <a:xfrm>
+          <a:off x="0" y="0"/>
+          <a:ext cx="0" cy="0"/>
+          <a:chOff x="0" y="0"/>
+          <a:chExt cx="0" cy="0"/>
+        </a:xfrm>
+      </p:grpSpPr>
+      <p:sp>
+        <p:nvSpPr>
+          <p:cNvPr id="2" name="Slide Image Placeholder 1"/>
+          <p:cNvSpPr>
+            <a:spLocks noGrp="1" noRot="1" noChangeAspect="1"/>
+          </p:cNvSpPr>
+          <p:nvPr>
+            <p:ph type="sldImg"/>
+          </p:nvPr>
+        </p:nvSpPr>
+        <p:spPr/>
+      </p:sp>
+      <p:sp>
+        <p:nvSpPr>
+          <p:cNvPr id="3" name="Notes Placeholder 2"/>
+          <p:cNvSpPr>
+            <a:spLocks noGrp="1"/>
+          </p:cNvSpPr>
+          <p:nvPr>
+            <p:ph type="body" idx="1"/>
+          </p:nvPr>
+        </p:nvSpPr>
+        <p:spPr/>
+        <p:txBody>
+          <a:bodyPr/>
+          <a:lstStyle/>
+          <a:p>
+            <a:r>
+              <a:rPr lang="en-US" dirty="0"/>
+              <a:t/>
+            </a:r>
+            <a:endParaRPr lang="en-US" dirty="0"/>
+          </a:p>
+        </p:txBody>
+      </p:sp>
+      <p:sp>
+        <p:nvSpPr>
+          <p:cNvPr id="4" name="Slide Number Placeholder 3"/>
+          <p:cNvSpPr>
+            <a:spLocks noGrp="1"/>
+          </p:cNvSpPr>
+          <p:nvPr>
+            <p:ph type="sldNum" sz="quarter" idx="10"/>
+          </p:nvPr>
+        </p:nvSpPr>
+        <p:spPr/>
+        <p:txBody>
+          <a:bodyPr/>
+          <a:lstStyle/>
+          <a:p>
+            <a:fld id="{F7021451-1387-4CA6-816F-3879F97B5CBC}" type="slidenum">
+              <a:rPr lang="en-US"/>
+              <a:t>8</a:t>
+            </a:fld>
+            <a:endParaRPr lang="en-US"/>
+          </a:p>
+        </p:txBody>
+      </p:sp>
+    </p:spTree>
+    <p:extLst>
+      <p:ext uri="{BB962C8B-B14F-4D97-AF65-F5344CB8AC3E}">
+        <p14:creationId xmlns:p14="http://schemas.microsoft.com/office/powerpoint/2010/main" val="1024086991"/>
+      </p:ext>
+    </p:extLst>
+  </p:cSld>
+  <p:clrMapOvr>
+    <a:masterClrMapping/>
+  </p:clrMapOvr>
+</p:notes>
+</file>
+
 <file path=ppt/slideLayouts/slideLayout1.xml><?xml version="1.0" encoding="utf-8"?>
 <p:sldLayout xmlns:a="http://schemas.openxmlformats.org/drawingml/2006/main" xmlns:r="http://schemas.openxmlformats.org/officeDocument/2006/relationships" xmlns:p="http://schemas.openxmlformats.org/presentationml/2006/main" preserve="1">
   <p:cSld name="DEFAULT">
@@ -1210,13 +1477,6 @@
 <file path=ppt/slides/slide1.xml><?xml version="1.0" encoding="utf-8"?>
 <p:sld xmlns:a="http://schemas.openxmlformats.org/drawingml/2006/main" xmlns:r="http://schemas.openxmlformats.org/officeDocument/2006/relationships" xmlns:p="http://schemas.openxmlformats.org/presentationml/2006/main">
   <p:cSld name="Slide 1">
-    <p:bg>
-      <p:bgPr>
-        <a:solidFill>
-          <a:srgbClr val="1B2A4A"/>
-        </a:solidFill>
-      </p:bgPr>
-    </p:bg>
     <p:spTree>
       <p:nvGrpSpPr>
         <p:cNvPr id="1" name=""/>
@@ -1240,7 +1500,27 @@
         <p:spPr>
           <a:xfrm>
             <a:off x="0" y="0"/>
-            <a:ext cx="109728" cy="5143500"/>
+            <a:ext cx="9144000" cy="5143500"/>
+          </a:xfrm>
+          <a:prstGeom prst="rect">
+            <a:avLst/>
+          </a:prstGeom>
+          <a:solidFill>
+            <a:srgbClr val="1B2A4A"/>
+          </a:solidFill>
+          <a:ln/>
+        </p:spPr>
+      </p:sp>
+      <p:sp>
+        <p:nvSpPr>
+          <p:cNvPr id="3" name="Shape 1"/>
+          <p:cNvSpPr/>
+          <p:nvPr/>
+        </p:nvSpPr>
+        <p:spPr>
+          <a:xfrm>
+            <a:off x="0" y="4777740"/>
+            <a:ext cx="9144000" cy="365760"/>
           </a:xfrm>
           <a:prstGeom prst="rect">
             <a:avLst/>
@@ -1253,14 +1533,14 @@
       </p:sp>
       <p:sp>
         <p:nvSpPr>
-          <p:cNvPr id="3" name="Text 1"/>
+          <p:cNvPr id="4" name="Text 2"/>
           <p:cNvSpPr/>
           <p:nvPr/>
         </p:nvSpPr>
         <p:spPr>
           <a:xfrm>
             <a:off x="731520" y="1097280"/>
-            <a:ext cx="7772400" cy="1371600"/>
+            <a:ext cx="7680960" cy="457200"/>
           </a:xfrm>
           <a:prstGeom prst="rect">
             <a:avLst/>
@@ -1270,6 +1550,45 @@
         </p:spPr>
         <p:txBody>
           <a:bodyPr wrap="square" rtlCol="0" anchor="ctr"/>
+          <a:lstStyle/>
+          <a:p>
+            <a:pPr indent="0" marL="0">
+              <a:buNone/>
+            </a:pPr>
+            <a:r>
+              <a:rPr lang="en-US" sz="1400" b="1" spc="400" kern="0" dirty="0">
+                <a:solidFill>
+                  <a:srgbClr val="2A9D8F"/>
+                </a:solidFill>
+                <a:latin typeface="Calibri" pitchFamily="34" charset="0"/>
+                <a:ea typeface="Calibri" pitchFamily="34" charset="-122"/>
+                <a:cs typeface="Calibri" pitchFamily="34" charset="-120"/>
+              </a:rPr>
+              <a:t>GRADE 6 MATHEMATICS</a:t>
+            </a:r>
+            <a:endParaRPr lang="en-US" sz="1400" dirty="0"/>
+          </a:p>
+        </p:txBody>
+      </p:sp>
+      <p:sp>
+        <p:nvSpPr>
+          <p:cNvPr id="5" name="Text 3"/>
+          <p:cNvSpPr/>
+          <p:nvPr/>
+        </p:nvSpPr>
+        <p:spPr>
+          <a:xfrm>
+            <a:off x="731520" y="1645920"/>
+            <a:ext cx="7680960" cy="1463040"/>
+          </a:xfrm>
+          <a:prstGeom prst="rect">
+            <a:avLst/>
+          </a:prstGeom>
+          <a:noFill/>
+          <a:ln/>
+        </p:spPr>
+        <p:txBody>
+          <a:bodyPr wrap="square" rtlCol="0" anchor="t"/>
           <a:lstStyle/>
           <a:p>
             <a:pPr indent="0" marL="0">
@@ -1292,14 +1611,14 @@
       </p:sp>
       <p:sp>
         <p:nvSpPr>
-          <p:cNvPr id="4" name="Text 2"/>
-          <p:cNvSpPr/>
-          <p:nvPr/>
-        </p:nvSpPr>
-        <p:spPr>
-          <a:xfrm>
-            <a:off x="731520" y="2560320"/>
-            <a:ext cx="7772400" cy="548640"/>
+          <p:cNvPr id="6" name="Text 4"/>
+          <p:cNvSpPr/>
+          <p:nvPr/>
+        </p:nvSpPr>
+        <p:spPr>
+          <a:xfrm>
+            <a:off x="731520" y="3200400"/>
+            <a:ext cx="7680960" cy="548640"/>
           </a:xfrm>
           <a:prstGeom prst="rect">
             <a:avLst/>
@@ -1315,15 +1634,15 @@
               <a:buNone/>
             </a:pPr>
             <a:r>
-              <a:rPr lang="en-US" sz="1600" dirty="0">
-                <a:solidFill>
-                  <a:srgbClr val="E9C46A"/>
+              <a:rPr lang="en-US" sz="1600" i="1" dirty="0">
+                <a:solidFill>
+                  <a:srgbClr val="9B9690"/>
                 </a:solidFill>
                 <a:latin typeface="Calibri" pitchFamily="34" charset="0"/>
                 <a:ea typeface="Calibri" pitchFamily="34" charset="-122"/>
                 <a:cs typeface="Calibri" pitchFamily="34" charset="-120"/>
               </a:rPr>
-              <a:t>Grade 6 Mathematics · Mr Zocchi</a:t>
+              <a:t>Replacing letters with numbers</a:t>
             </a:r>
             <a:endParaRPr lang="en-US" sz="1600" dirty="0"/>
           </a:p>
@@ -1331,36 +1650,14 @@
       </p:sp>
       <p:sp>
         <p:nvSpPr>
-          <p:cNvPr id="5" name="Shape 3"/>
-          <p:cNvSpPr/>
-          <p:nvPr/>
-        </p:nvSpPr>
-        <p:spPr>
-          <a:xfrm>
-            <a:off x="731520" y="3474720"/>
-            <a:ext cx="2011680" cy="411480"/>
-          </a:xfrm>
-          <a:prstGeom prst="roundRect">
-            <a:avLst>
-              <a:gd name="adj" fmla="val 17778"/>
-            </a:avLst>
-          </a:prstGeom>
-          <a:solidFill>
-            <a:srgbClr val="2A9D8F"/>
-          </a:solidFill>
-          <a:ln/>
-        </p:spPr>
-      </p:sp>
-      <p:sp>
-        <p:nvSpPr>
-          <p:cNvPr id="6" name="Text 4"/>
-          <p:cNvSpPr/>
-          <p:nvPr/>
-        </p:nvSpPr>
-        <p:spPr>
-          <a:xfrm>
-            <a:off x="731520" y="3474720"/>
-            <a:ext cx="2011680" cy="411480"/>
+          <p:cNvPr id="7" name="Text 5"/>
+          <p:cNvSpPr/>
+          <p:nvPr/>
+        </p:nvSpPr>
+        <p:spPr>
+          <a:xfrm>
+            <a:off x="731520" y="4206240"/>
+            <a:ext cx="3657600" cy="365760"/>
           </a:xfrm>
           <a:prstGeom prst="rect">
             <a:avLst/>
@@ -1372,19 +1669,19 @@
           <a:bodyPr wrap="square" rtlCol="0" anchor="ctr"/>
           <a:lstStyle/>
           <a:p>
-            <a:pPr algn="ctr" indent="0" marL="0">
+            <a:pPr indent="0" marL="0">
               <a:buNone/>
             </a:pPr>
             <a:r>
-              <a:rPr lang="en-US" sz="1200" b="1" dirty="0">
-                <a:solidFill>
-                  <a:srgbClr val="FFFFFF"/>
+              <a:rPr lang="en-US" sz="1200" dirty="0">
+                <a:solidFill>
+                  <a:srgbClr val="6B6660"/>
                 </a:solidFill>
                 <a:latin typeface="Calibri" pitchFamily="34" charset="0"/>
                 <a:ea typeface="Calibri" pitchFamily="34" charset="-122"/>
                 <a:cs typeface="Calibri" pitchFamily="34" charset="-120"/>
               </a:rPr>
-              <a:t>Term 4 · Algebra</a:t>
+              <a:t>Mr Zocchi</a:t>
             </a:r>
             <a:endParaRPr lang="en-US" sz="1200" dirty="0"/>
           </a:p>
@@ -1401,13 +1698,6 @@
 <file path=ppt/slides/slide2.xml><?xml version="1.0" encoding="utf-8"?>
 <p:sld xmlns:a="http://schemas.openxmlformats.org/drawingml/2006/main" xmlns:r="http://schemas.openxmlformats.org/officeDocument/2006/relationships" xmlns:p="http://schemas.openxmlformats.org/presentationml/2006/main">
   <p:cSld name="Slide 2">
-    <p:bg>
-      <p:bgPr>
-        <a:solidFill>
-          <a:srgbClr val="FAF8F5"/>
-        </a:solidFill>
-      </p:bgPr>
-    </p:bg>
     <p:spTree>
       <p:nvGrpSpPr>
         <p:cNvPr id="1" name=""/>
@@ -1431,13 +1721,13 @@
         <p:spPr>
           <a:xfrm>
             <a:off x="0" y="0"/>
-            <a:ext cx="9144000" cy="54864"/>
-          </a:xfrm>
-          <a:prstGeom prst="rect">
-            <a:avLst/>
-          </a:prstGeom>
-          <a:solidFill>
-            <a:srgbClr val="2A9D8F"/>
+            <a:ext cx="9144000" cy="5143500"/>
+          </a:xfrm>
+          <a:prstGeom prst="rect">
+            <a:avLst/>
+          </a:prstGeom>
+          <a:solidFill>
+            <a:srgbClr val="111D35"/>
           </a:solidFill>
           <a:ln/>
         </p:spPr>
@@ -1450,8 +1740,8 @@
         </p:nvSpPr>
         <p:spPr>
           <a:xfrm>
-            <a:off x="7772400" y="4709160"/>
-            <a:ext cx="1097280" cy="320040"/>
+            <a:off x="6858000" y="182880"/>
+            <a:ext cx="2286000" cy="2743200"/>
           </a:xfrm>
           <a:prstGeom prst="rect">
             <a:avLst/>
@@ -1463,86 +1753,75 @@
           <a:bodyPr wrap="square" rtlCol="0" anchor="ctr"/>
           <a:lstStyle/>
           <a:p>
-            <a:pPr algn="r" indent="0" marL="0">
+            <a:pPr algn="ctr" indent="0" marL="0">
               <a:buNone/>
             </a:pPr>
             <a:r>
-              <a:rPr lang="en-US" sz="900" dirty="0">
-                <a:solidFill>
-                  <a:srgbClr val="6B6660"/>
+              <a:rPr lang="en-US" sz="16000" b="1" dirty="0">
+                <a:solidFill>
+                  <a:srgbClr val="2A9D8F">
+                    <a:alpha val="80000"/>
+                  </a:srgbClr>
+                </a:solidFill>
+                <a:latin typeface="Georgia" pitchFamily="34" charset="0"/>
+                <a:ea typeface="Georgia" pitchFamily="34" charset="-122"/>
+                <a:cs typeface="Georgia" pitchFamily="34" charset="-120"/>
+              </a:rPr>
+              <a:t>?</a:t>
+            </a:r>
+            <a:endParaRPr lang="en-US" sz="16000" dirty="0"/>
+          </a:p>
+        </p:txBody>
+      </p:sp>
+      <p:sp>
+        <p:nvSpPr>
+          <p:cNvPr id="4" name="Text 2"/>
+          <p:cNvSpPr/>
+          <p:nvPr/>
+        </p:nvSpPr>
+        <p:spPr>
+          <a:xfrm>
+            <a:off x="731520" y="548640"/>
+            <a:ext cx="2743200" cy="365760"/>
+          </a:xfrm>
+          <a:prstGeom prst="rect">
+            <a:avLst/>
+          </a:prstGeom>
+          <a:noFill/>
+          <a:ln/>
+        </p:spPr>
+        <p:txBody>
+          <a:bodyPr wrap="square" rtlCol="0" anchor="ctr"/>
+          <a:lstStyle/>
+          <a:p>
+            <a:pPr indent="0" marL="0">
+              <a:buNone/>
+            </a:pPr>
+            <a:r>
+              <a:rPr lang="en-US" sz="1200" b="1" spc="400" kern="0" dirty="0">
+                <a:solidFill>
+                  <a:srgbClr val="2A9D8F"/>
                 </a:solidFill>
                 <a:latin typeface="Calibri" pitchFamily="34" charset="0"/>
                 <a:ea typeface="Calibri" pitchFamily="34" charset="-122"/>
                 <a:cs typeface="Calibri" pitchFamily="34" charset="-120"/>
               </a:rPr>
-              <a:t>2 / 5</a:t>
-            </a:r>
-            <a:endParaRPr lang="en-US" sz="900" dirty="0"/>
-          </a:p>
-        </p:txBody>
-      </p:sp>
-      <p:sp>
-        <p:nvSpPr>
-          <p:cNvPr id="4" name="Shape 2"/>
-          <p:cNvSpPr/>
-          <p:nvPr/>
-        </p:nvSpPr>
-        <p:spPr>
-          <a:xfrm>
-            <a:off x="1371600" y="914400"/>
-            <a:ext cx="6400800" cy="3200400"/>
-          </a:xfrm>
-          <a:prstGeom prst="rect">
-            <a:avLst/>
-          </a:prstGeom>
-          <a:solidFill>
-            <a:srgbClr val="FFFFFF"/>
-          </a:solidFill>
-          <a:ln w="12700">
-            <a:solidFill>
-              <a:srgbClr val="E5E2DC"/>
-            </a:solidFill>
-            <a:prstDash val="solid"/>
-          </a:ln>
-          <a:effectLst>
-            <a:outerShdw sx="100000" sy="100000" kx="0" ky="0" algn="bl" rotWithShape="0" blurRad="50800" dist="25400" dir="8100000">
-              <a:srgbClr val="000000">
-                <a:alpha val="10000"/>
-              </a:srgbClr>
-            </a:outerShdw>
-          </a:effectLst>
-        </p:spPr>
-      </p:sp>
-      <p:sp>
-        <p:nvSpPr>
-          <p:cNvPr id="5" name="Shape 3"/>
-          <p:cNvSpPr/>
-          <p:nvPr/>
-        </p:nvSpPr>
-        <p:spPr>
-          <a:xfrm>
-            <a:off x="1371600" y="914400"/>
-            <a:ext cx="91440" cy="3200400"/>
-          </a:xfrm>
-          <a:prstGeom prst="rect">
-            <a:avLst/>
-          </a:prstGeom>
-          <a:solidFill>
-            <a:srgbClr val="2A9D8F"/>
-          </a:solidFill>
-          <a:ln/>
-        </p:spPr>
-      </p:sp>
-      <p:sp>
-        <p:nvSpPr>
-          <p:cNvPr id="6" name="Text 4"/>
-          <p:cNvSpPr/>
-          <p:nvPr/>
-        </p:nvSpPr>
-        <p:spPr>
-          <a:xfrm>
-            <a:off x="1828800" y="1097280"/>
-            <a:ext cx="5669280" cy="640080"/>
+              <a:t>INQUIRY</a:t>
+            </a:r>
+            <a:endParaRPr lang="en-US" sz="1200" dirty="0"/>
+          </a:p>
+        </p:txBody>
+      </p:sp>
+      <p:sp>
+        <p:nvSpPr>
+          <p:cNvPr id="5" name="Text 3"/>
+          <p:cNvSpPr/>
+          <p:nvPr/>
+        </p:nvSpPr>
+        <p:spPr>
+          <a:xfrm>
+            <a:off x="731520" y="1005840"/>
+            <a:ext cx="6858000" cy="1463040"/>
           </a:xfrm>
           <a:prstGeom prst="rect">
             <a:avLst/>
@@ -1551,37 +1830,37 @@
           <a:ln/>
         </p:spPr>
         <p:txBody>
-          <a:bodyPr wrap="square" rtlCol="0" anchor="ctr"/>
+          <a:bodyPr wrap="square" rtlCol="0" anchor="t"/>
           <a:lstStyle/>
           <a:p>
             <a:pPr indent="0" marL="0">
               <a:buNone/>
             </a:pPr>
             <a:r>
-              <a:rPr lang="en-US" sz="2400" b="1" dirty="0">
-                <a:solidFill>
-                  <a:srgbClr val="1B2A4A"/>
+              <a:rPr lang="en-US" sz="2800" b="1" dirty="0">
+                <a:solidFill>
+                  <a:srgbClr val="FFFFFF"/>
                 </a:solidFill>
                 <a:latin typeface="Georgia" pitchFamily="34" charset="0"/>
                 <a:ea typeface="Georgia" pitchFamily="34" charset="-122"/>
                 <a:cs typeface="Georgia" pitchFamily="34" charset="-120"/>
               </a:rPr>
-              <a:t>Replacing Letters with Numbers</a:t>
-            </a:r>
-            <a:endParaRPr lang="en-US" sz="2400" dirty="0"/>
-          </a:p>
-        </p:txBody>
-      </p:sp>
-      <p:sp>
-        <p:nvSpPr>
-          <p:cNvPr id="7" name="Text 5"/>
-          <p:cNvSpPr/>
-          <p:nvPr/>
-        </p:nvSpPr>
-        <p:spPr>
-          <a:xfrm>
-            <a:off x="1828800" y="1828800"/>
-            <a:ext cx="5669280" cy="2011680"/>
+              <a:t>The formula to convert Celsius to Fahrenheit is F = 1.8C + 32. It's 28°C in Nanjing today. What's that in Fahrenheit?</a:t>
+            </a:r>
+            <a:endParaRPr lang="en-US" sz="2800" dirty="0"/>
+          </a:p>
+        </p:txBody>
+      </p:sp>
+      <p:sp>
+        <p:nvSpPr>
+          <p:cNvPr id="6" name="Text 4"/>
+          <p:cNvSpPr/>
+          <p:nvPr/>
+        </p:nvSpPr>
+        <p:spPr>
+          <a:xfrm>
+            <a:off x="731520" y="2560320"/>
+            <a:ext cx="6858000" cy="548640"/>
           </a:xfrm>
           <a:prstGeom prst="rect">
             <a:avLst/>
@@ -1590,27 +1869,168 @@
           <a:ln/>
         </p:spPr>
         <p:txBody>
-          <a:bodyPr wrap="square" rtlCol="0" anchor="t"/>
+          <a:bodyPr wrap="square" rtlCol="0" anchor="ctr"/>
           <a:lstStyle/>
           <a:p>
             <a:pPr indent="0" marL="0">
-              <a:lnSpc>
-                <a:spcPct val="130000"/>
-              </a:lnSpc>
               <a:buNone/>
             </a:pPr>
             <a:r>
-              <a:rPr lang="en-US" sz="1500" dirty="0">
-                <a:solidFill>
-                  <a:srgbClr val="3D3A36"/>
+              <a:rPr lang="en-US" sz="1400" i="1" dirty="0">
+                <a:solidFill>
+                  <a:srgbClr val="9B9690"/>
                 </a:solidFill>
                 <a:latin typeface="Calibri" pitchFamily="34" charset="0"/>
                 <a:ea typeface="Calibri" pitchFamily="34" charset="-122"/>
                 <a:cs typeface="Calibri" pitchFamily="34" charset="-120"/>
               </a:rPr>
-              <a:t>Substitution means replacing a letter with a specific number to calculate the value of an expression. If x = 4, then 3x + 2 = 3(4) + 2 = 12 + 2 = 14. Follow BIDMAS rules when calculating.</a:t>
-            </a:r>
-            <a:endParaRPr lang="en-US" sz="1500" dirty="0"/>
+              <a:t>Substitution means replacing a variable with a given number, then calculating.</a:t>
+            </a:r>
+            <a:endParaRPr lang="en-US" sz="1400" dirty="0"/>
+          </a:p>
+        </p:txBody>
+      </p:sp>
+      <p:sp>
+        <p:nvSpPr>
+          <p:cNvPr id="7" name="Shape 5"/>
+          <p:cNvSpPr/>
+          <p:nvPr/>
+        </p:nvSpPr>
+        <p:spPr>
+          <a:xfrm>
+            <a:off x="548640" y="3200400"/>
+            <a:ext cx="7315200" cy="1645920"/>
+          </a:xfrm>
+          <a:prstGeom prst="rect">
+            <a:avLst/>
+          </a:prstGeom>
+          <a:solidFill>
+            <a:srgbClr val="243660"/>
+          </a:solidFill>
+          <a:ln/>
+        </p:spPr>
+      </p:sp>
+      <p:sp>
+        <p:nvSpPr>
+          <p:cNvPr id="8" name="Text 6"/>
+          <p:cNvSpPr/>
+          <p:nvPr/>
+        </p:nvSpPr>
+        <p:spPr>
+          <a:xfrm>
+            <a:off x="731520" y="3246120"/>
+            <a:ext cx="3657600" cy="320040"/>
+          </a:xfrm>
+          <a:prstGeom prst="rect">
+            <a:avLst/>
+          </a:prstGeom>
+          <a:noFill/>
+          <a:ln/>
+        </p:spPr>
+        <p:txBody>
+          <a:bodyPr wrap="square" rtlCol="0" anchor="ctr"/>
+          <a:lstStyle/>
+          <a:p>
+            <a:pPr indent="0" marL="0">
+              <a:buNone/>
+            </a:pPr>
+            <a:r>
+              <a:rPr lang="en-US" sz="1100" b="1" spc="200" kern="0" dirty="0">
+                <a:solidFill>
+                  <a:srgbClr val="2A9D8F"/>
+                </a:solidFill>
+                <a:latin typeface="Calibri" pitchFamily="34" charset="0"/>
+                <a:ea typeface="Calibri" pitchFamily="34" charset="-122"/>
+                <a:cs typeface="Calibri" pitchFamily="34" charset="-120"/>
+              </a:rPr>
+              <a:t>Think — Pair — Share</a:t>
+            </a:r>
+            <a:endParaRPr lang="en-US" sz="1100" dirty="0"/>
+          </a:p>
+        </p:txBody>
+      </p:sp>
+      <p:sp>
+        <p:nvSpPr>
+          <p:cNvPr id="9" name="Text 7"/>
+          <p:cNvSpPr/>
+          <p:nvPr/>
+        </p:nvSpPr>
+        <p:spPr>
+          <a:xfrm>
+            <a:off x="731520" y="3566160"/>
+            <a:ext cx="6949440" cy="1188720"/>
+          </a:xfrm>
+          <a:prstGeom prst="rect">
+            <a:avLst/>
+          </a:prstGeom>
+          <a:noFill/>
+          <a:ln/>
+        </p:spPr>
+        <p:txBody>
+          <a:bodyPr wrap="square" rtlCol="0" anchor="ctr"/>
+          <a:lstStyle/>
+          <a:p>
+            <a:pPr marL="342900" indent="-342900">
+              <a:spcAft>
+                <a:spcPts val="600"/>
+              </a:spcAft>
+              <a:buSzPct val="100000"/>
+              <a:buChar char="•"/>
+            </a:pPr>
+            <a:r>
+              <a:rPr lang="en-US" sz="1400" dirty="0">
+                <a:solidFill>
+                  <a:srgbClr val="E5E2DC"/>
+                </a:solidFill>
+                <a:latin typeface="Calibri" pitchFamily="34" charset="0"/>
+                <a:ea typeface="Calibri" pitchFamily="34" charset="-122"/>
+                <a:cs typeface="Calibri" pitchFamily="34" charset="-120"/>
+              </a:rPr>
+              <a:t>What would you replace C with?</a:t>
+            </a:r>
+            <a:endParaRPr lang="en-US" sz="1400" dirty="0"/>
+          </a:p>
+          <a:p>
+            <a:pPr marL="342900" indent="-342900">
+              <a:spcAft>
+                <a:spcPts val="600"/>
+              </a:spcAft>
+              <a:buSzPct val="100000"/>
+              <a:buChar char="•"/>
+            </a:pPr>
+            <a:r>
+              <a:rPr lang="en-US" sz="1400" dirty="0">
+                <a:solidFill>
+                  <a:srgbClr val="E5E2DC"/>
+                </a:solidFill>
+                <a:latin typeface="Calibri" pitchFamily="34" charset="0"/>
+                <a:ea typeface="Calibri" pitchFamily="34" charset="-122"/>
+                <a:cs typeface="Calibri" pitchFamily="34" charset="-120"/>
+              </a:rPr>
+              <a:t>What order do you do the operations?</a:t>
+            </a:r>
+            <a:endParaRPr lang="en-US" sz="1400" dirty="0"/>
+          </a:p>
+          <a:p>
+            <a:pPr marL="342900" indent="-342900">
+              <a:spcAft>
+                <a:spcPts val="600"/>
+              </a:spcAft>
+              <a:buSzPct val="100000"/>
+              <a:buChar char="•"/>
+            </a:pPr>
+            <a:r>
+              <a:rPr lang="en-US" sz="1400" dirty="0">
+                <a:solidFill>
+                  <a:srgbClr val="E5E2DC"/>
+                </a:solidFill>
+                <a:latin typeface="Calibri" pitchFamily="34" charset="0"/>
+                <a:ea typeface="Calibri" pitchFamily="34" charset="-122"/>
+                <a:cs typeface="Calibri" pitchFamily="34" charset="-120"/>
+              </a:rPr>
+              <a:t>What if it's −5°C in Nanjing winter?</a:t>
+            </a:r>
+            <a:endParaRPr lang="en-US" sz="1400" dirty="0"/>
           </a:p>
         </p:txBody>
       </p:sp>
@@ -1655,7 +2075,27 @@
         <p:spPr>
           <a:xfrm>
             <a:off x="0" y="0"/>
-            <a:ext cx="9144000" cy="54864"/>
+            <a:ext cx="9144000" cy="822960"/>
+          </a:xfrm>
+          <a:prstGeom prst="rect">
+            <a:avLst/>
+          </a:prstGeom>
+          <a:solidFill>
+            <a:srgbClr val="FFFFFF"/>
+          </a:solidFill>
+          <a:ln/>
+        </p:spPr>
+      </p:sp>
+      <p:sp>
+        <p:nvSpPr>
+          <p:cNvPr id="3" name="Shape 1"/>
+          <p:cNvSpPr/>
+          <p:nvPr/>
+        </p:nvSpPr>
+        <p:spPr>
+          <a:xfrm>
+            <a:off x="0" y="795528"/>
+            <a:ext cx="9144000" cy="27432"/>
           </a:xfrm>
           <a:prstGeom prst="rect">
             <a:avLst/>
@@ -1668,14 +2108,14 @@
       </p:sp>
       <p:sp>
         <p:nvSpPr>
-          <p:cNvPr id="3" name="Text 1"/>
-          <p:cNvSpPr/>
-          <p:nvPr/>
-        </p:nvSpPr>
-        <p:spPr>
-          <a:xfrm>
-            <a:off x="7772400" y="4709160"/>
-            <a:ext cx="1097280" cy="320040"/>
+          <p:cNvPr id="4" name="Text 2"/>
+          <p:cNvSpPr/>
+          <p:nvPr/>
+        </p:nvSpPr>
+        <p:spPr>
+          <a:xfrm>
+            <a:off x="640080" y="91440"/>
+            <a:ext cx="7863840" cy="640080"/>
           </a:xfrm>
           <a:prstGeom prst="rect">
             <a:avLst/>
@@ -1684,96 +2124,78 @@
           <a:ln/>
         </p:spPr>
         <p:txBody>
+          <a:bodyPr wrap="square" lIns="0" tIns="0" rIns="0" bIns="0" rtlCol="0" anchor="ctr"/>
+          <a:lstStyle/>
+          <a:p>
+            <a:pPr indent="0" marL="0">
+              <a:buNone/>
+            </a:pPr>
+            <a:r>
+              <a:rPr lang="en-US" sz="2200" b="1" dirty="0">
+                <a:solidFill>
+                  <a:srgbClr val="1B2A4A"/>
+                </a:solidFill>
+                <a:latin typeface="Georgia" pitchFamily="34" charset="0"/>
+                <a:ea typeface="Georgia" pitchFamily="34" charset="-122"/>
+                <a:cs typeface="Georgia" pitchFamily="34" charset="-120"/>
+              </a:rPr>
+              <a:t>What Is Substitution?</a:t>
+            </a:r>
+            <a:endParaRPr lang="en-US" sz="2200" dirty="0"/>
+          </a:p>
+        </p:txBody>
+      </p:sp>
+      <p:sp>
+        <p:nvSpPr>
+          <p:cNvPr id="5" name="Text 3"/>
+          <p:cNvSpPr/>
+          <p:nvPr/>
+        </p:nvSpPr>
+        <p:spPr>
+          <a:xfrm>
+            <a:off x="640080" y="1005840"/>
+            <a:ext cx="7863840" cy="2926080"/>
+          </a:xfrm>
+          <a:prstGeom prst="rect">
+            <a:avLst/>
+          </a:prstGeom>
+          <a:noFill/>
+          <a:ln/>
+        </p:spPr>
+        <p:txBody>
           <a:bodyPr wrap="square" rtlCol="0" anchor="ctr"/>
           <a:lstStyle/>
           <a:p>
-            <a:pPr algn="r" indent="0" marL="0">
-              <a:buNone/>
-            </a:pPr>
-            <a:r>
-              <a:rPr lang="en-US" sz="900" dirty="0">
-                <a:solidFill>
-                  <a:srgbClr val="6B6660"/>
+            <a:pPr marL="342900" indent="-342900">
+              <a:spcAft>
+                <a:spcPts val="800"/>
+              </a:spcAft>
+              <a:buSzPct val="100000"/>
+              <a:buChar char="•"/>
+            </a:pPr>
+            <a:r>
+              <a:rPr lang="en-US" sz="1600" dirty="0">
+                <a:solidFill>
+                  <a:srgbClr val="3D3A36"/>
                 </a:solidFill>
                 <a:latin typeface="Calibri" pitchFamily="34" charset="0"/>
                 <a:ea typeface="Calibri" pitchFamily="34" charset="-122"/>
                 <a:cs typeface="Calibri" pitchFamily="34" charset="-120"/>
               </a:rPr>
-              <a:t>3 / 5</a:t>
-            </a:r>
-            <a:endParaRPr lang="en-US" sz="900" dirty="0"/>
-          </a:p>
-        </p:txBody>
-      </p:sp>
-      <p:sp>
-        <p:nvSpPr>
-          <p:cNvPr id="4" name="Text 2"/>
-          <p:cNvSpPr/>
-          <p:nvPr/>
-        </p:nvSpPr>
-        <p:spPr>
-          <a:xfrm>
-            <a:off x="457200" y="274320"/>
-            <a:ext cx="8229600" cy="640080"/>
-          </a:xfrm>
-          <a:prstGeom prst="rect">
-            <a:avLst/>
-          </a:prstGeom>
-          <a:noFill/>
-          <a:ln/>
-        </p:spPr>
-        <p:txBody>
-          <a:bodyPr wrap="square" rtlCol="0" anchor="ctr"/>
-          <a:lstStyle/>
-          <a:p>
-            <a:pPr indent="0" marL="0">
-              <a:buNone/>
-            </a:pPr>
-            <a:r>
-              <a:rPr lang="en-US" sz="2600" b="1" dirty="0">
-                <a:solidFill>
-                  <a:srgbClr val="1B2A4A"/>
-                </a:solidFill>
-                <a:latin typeface="Georgia" pitchFamily="34" charset="0"/>
-                <a:ea typeface="Georgia" pitchFamily="34" charset="-122"/>
-                <a:cs typeface="Georgia" pitchFamily="34" charset="-120"/>
-              </a:rPr>
-              <a:t>Examples</a:t>
-            </a:r>
-            <a:endParaRPr lang="en-US" sz="2600" dirty="0"/>
-          </a:p>
-        </p:txBody>
-      </p:sp>
-      <p:sp>
-        <p:nvSpPr>
-          <p:cNvPr id="5" name="Text 3"/>
-          <p:cNvSpPr/>
-          <p:nvPr/>
-        </p:nvSpPr>
-        <p:spPr>
-          <a:xfrm>
-            <a:off x="457200" y="1188720"/>
-            <a:ext cx="3840480" cy="3474720"/>
-          </a:xfrm>
-          <a:prstGeom prst="rect">
-            <a:avLst/>
-          </a:prstGeom>
-          <a:noFill/>
-          <a:ln/>
-        </p:spPr>
-        <p:txBody>
-          <a:bodyPr wrap="square" rtlCol="0" anchor="t"/>
-          <a:lstStyle/>
+              <a:t>Replace a variable with a given number.</a:t>
+            </a:r>
+            <a:endParaRPr lang="en-US" sz="1600" dirty="0"/>
+          </a:p>
           <a:p>
             <a:pPr marL="342900" indent="-342900">
               <a:spcAft>
-                <a:spcPts val="600"/>
+                <a:spcPts val="800"/>
               </a:spcAft>
               <a:buSzPct val="100000"/>
               <a:buChar char="•"/>
             </a:pPr>
             <a:r>
-              <a:rPr lang="en-US" sz="1400" dirty="0">
+              <a:rPr lang="en-US" sz="1600" dirty="0">
                 <a:solidFill>
                   <a:srgbClr val="3D3A36"/>
                 </a:solidFill>
@@ -1781,20 +2203,20 @@
                 <a:ea typeface="Calibri" pitchFamily="34" charset="-122"/>
                 <a:cs typeface="Calibri" pitchFamily="34" charset="-120"/>
               </a:rPr>
-              <a:t>If a = 5: 2a + 3 = 2(5) + 3 = 10 + 3 = 13</a:t>
-            </a:r>
-            <a:endParaRPr lang="en-US" sz="1400" dirty="0"/>
+              <a:t>If x = 3, then 2x + 1 = 2(3) + 1 = 7.</a:t>
+            </a:r>
+            <a:endParaRPr lang="en-US" sz="1600" dirty="0"/>
           </a:p>
           <a:p>
             <a:pPr marL="342900" indent="-342900">
               <a:spcAft>
-                <a:spcPts val="600"/>
+                <a:spcPts val="800"/>
               </a:spcAft>
               <a:buSzPct val="100000"/>
               <a:buChar char="•"/>
             </a:pPr>
             <a:r>
-              <a:rPr lang="en-US" sz="1400" dirty="0">
+              <a:rPr lang="en-US" sz="1600" dirty="0">
                 <a:solidFill>
                   <a:srgbClr val="3D3A36"/>
                 </a:solidFill>
@@ -1802,20 +2224,20 @@
                 <a:ea typeface="Calibri" pitchFamily="34" charset="-122"/>
                 <a:cs typeface="Calibri" pitchFamily="34" charset="-120"/>
               </a:rPr>
-              <a:t>If n = 3: n² + 1 = 3² + 1 = 9 + 1 = 10</a:t>
-            </a:r>
-            <a:endParaRPr lang="en-US" sz="1400" dirty="0"/>
+              <a:t>Always use BRACKETS when substituting.</a:t>
+            </a:r>
+            <a:endParaRPr lang="en-US" sz="1600" dirty="0"/>
           </a:p>
           <a:p>
             <a:pPr marL="342900" indent="-342900">
               <a:spcAft>
-                <a:spcPts val="600"/>
+                <a:spcPts val="800"/>
               </a:spcAft>
               <a:buSzPct val="100000"/>
               <a:buChar char="•"/>
             </a:pPr>
             <a:r>
-              <a:rPr lang="en-US" sz="1400" dirty="0">
+              <a:rPr lang="en-US" sz="1600" dirty="0">
                 <a:solidFill>
                   <a:srgbClr val="3D3A36"/>
                 </a:solidFill>
@@ -1823,20 +2245,85 @@
                 <a:ea typeface="Calibri" pitchFamily="34" charset="-122"/>
                 <a:cs typeface="Calibri" pitchFamily="34" charset="-120"/>
               </a:rPr>
-              <a:t>If x = 4, y = 2: 3x − y = 3(4) − 2 = 12 − 2 = 10</a:t>
-            </a:r>
-            <a:endParaRPr lang="en-US" sz="1400" dirty="0"/>
-          </a:p>
-          <a:p>
-            <a:pPr marL="342900" indent="-342900">
-              <a:spcAft>
-                <a:spcPts val="600"/>
-              </a:spcAft>
-              <a:buSzPct val="100000"/>
-              <a:buChar char="•"/>
-            </a:pPr>
-            <a:r>
-              <a:rPr lang="en-US" sz="1400" dirty="0">
+              <a:t>Follow BIDMAS after substituting.</a:t>
+            </a:r>
+            <a:endParaRPr lang="en-US" sz="1600" dirty="0"/>
+          </a:p>
+        </p:txBody>
+      </p:sp>
+      <p:sp>
+        <p:nvSpPr>
+          <p:cNvPr id="6" name="Shape 4"/>
+          <p:cNvSpPr/>
+          <p:nvPr/>
+        </p:nvSpPr>
+        <p:spPr>
+          <a:xfrm>
+            <a:off x="640080" y="4114800"/>
+            <a:ext cx="7863840" cy="731520"/>
+          </a:xfrm>
+          <a:prstGeom prst="rect">
+            <a:avLst/>
+          </a:prstGeom>
+          <a:solidFill>
+            <a:srgbClr val="E8F5F3"/>
+          </a:solidFill>
+          <a:ln/>
+          <a:effectLst>
+            <a:outerShdw sx="100000" sy="100000" kx="0" ky="0" algn="bl" rotWithShape="0" blurRad="76200" dist="25400" dir="8100000">
+              <a:srgbClr val="000000">
+                <a:alpha val="12000"/>
+              </a:srgbClr>
+            </a:outerShdw>
+          </a:effectLst>
+        </p:spPr>
+      </p:sp>
+      <p:sp>
+        <p:nvSpPr>
+          <p:cNvPr id="7" name="Shape 5"/>
+          <p:cNvSpPr/>
+          <p:nvPr/>
+        </p:nvSpPr>
+        <p:spPr>
+          <a:xfrm>
+            <a:off x="640080" y="4114800"/>
+            <a:ext cx="64008" cy="731520"/>
+          </a:xfrm>
+          <a:prstGeom prst="rect">
+            <a:avLst/>
+          </a:prstGeom>
+          <a:solidFill>
+            <a:srgbClr val="2A9D8F"/>
+          </a:solidFill>
+          <a:ln/>
+        </p:spPr>
+      </p:sp>
+      <p:sp>
+        <p:nvSpPr>
+          <p:cNvPr id="8" name="Text 6"/>
+          <p:cNvSpPr/>
+          <p:nvPr/>
+        </p:nvSpPr>
+        <p:spPr>
+          <a:xfrm>
+            <a:off x="914400" y="4160520"/>
+            <a:ext cx="7406640" cy="640080"/>
+          </a:xfrm>
+          <a:prstGeom prst="rect">
+            <a:avLst/>
+          </a:prstGeom>
+          <a:noFill/>
+          <a:ln/>
+        </p:spPr>
+        <p:txBody>
+          <a:bodyPr wrap="square" rtlCol="0" anchor="ctr"/>
+          <a:lstStyle/>
+          <a:p>
+            <a:pPr indent="0" marL="0">
+              <a:buNone/>
+            </a:pPr>
+            <a:r>
+              <a:rPr lang="en-US" sz="1300" i="1" dirty="0">
                 <a:solidFill>
                   <a:srgbClr val="3D3A36"/>
                 </a:solidFill>
@@ -1844,233 +2331,9 @@
                 <a:ea typeface="Calibri" pitchFamily="34" charset="-122"/>
                 <a:cs typeface="Calibri" pitchFamily="34" charset="-120"/>
               </a:rPr>
-              <a:t>If p = −2: 5p + 1 = 5(−2) + 1 = −10 + 1 = −9</a:t>
-            </a:r>
-            <a:endParaRPr lang="en-US" sz="1400" dirty="0"/>
-          </a:p>
-          <a:p>
-            <a:pPr marL="342900" indent="-342900">
-              <a:spcAft>
-                <a:spcPts val="600"/>
-              </a:spcAft>
-              <a:buSzPct val="100000"/>
-              <a:buChar char="•"/>
-            </a:pPr>
-            <a:r>
-              <a:rPr lang="en-US" sz="1400" dirty="0">
-                <a:solidFill>
-                  <a:srgbClr val="3D3A36"/>
-                </a:solidFill>
-                <a:latin typeface="Calibri" pitchFamily="34" charset="0"/>
-                <a:ea typeface="Calibri" pitchFamily="34" charset="-122"/>
-                <a:cs typeface="Calibri" pitchFamily="34" charset="-120"/>
-              </a:rPr>
-              <a:t>If t = 6: t/2 + 4 = 6/2 + 4 = 3 + 4 = 7</a:t>
-            </a:r>
-            <a:endParaRPr lang="en-US" sz="1400" dirty="0"/>
-          </a:p>
-        </p:txBody>
-      </p:sp>
-      <p:sp>
-        <p:nvSpPr>
-          <p:cNvPr id="6" name="Shape 4"/>
-          <p:cNvSpPr/>
-          <p:nvPr/>
-        </p:nvSpPr>
-        <p:spPr>
-          <a:xfrm>
-            <a:off x="4846320" y="1188720"/>
-            <a:ext cx="3840480" cy="3474720"/>
-          </a:xfrm>
-          <a:prstGeom prst="rect">
-            <a:avLst/>
-          </a:prstGeom>
-          <a:solidFill>
-            <a:srgbClr val="FFFFFF"/>
-          </a:solidFill>
-          <a:ln w="12700">
-            <a:solidFill>
-              <a:srgbClr val="E5E2DC"/>
-            </a:solidFill>
-            <a:prstDash val="solid"/>
-          </a:ln>
-          <a:effectLst>
-            <a:outerShdw sx="100000" sy="100000" kx="0" ky="0" algn="bl" rotWithShape="0" blurRad="50800" dist="25400" dir="8100000">
-              <a:srgbClr val="000000">
-                <a:alpha val="10000"/>
-              </a:srgbClr>
-            </a:outerShdw>
-          </a:effectLst>
-        </p:spPr>
-      </p:sp>
-      <p:sp>
-        <p:nvSpPr>
-          <p:cNvPr id="7" name="Shape 5"/>
-          <p:cNvSpPr/>
-          <p:nvPr/>
-        </p:nvSpPr>
-        <p:spPr>
-          <a:xfrm>
-            <a:off x="4846320" y="1188720"/>
-            <a:ext cx="3840480" cy="54864"/>
-          </a:xfrm>
-          <a:prstGeom prst="rect">
-            <a:avLst/>
-          </a:prstGeom>
-          <a:solidFill>
-            <a:srgbClr val="2A9D8F"/>
-          </a:solidFill>
-          <a:ln/>
-        </p:spPr>
-      </p:sp>
-      <p:sp>
-        <p:nvSpPr>
-          <p:cNvPr id="8" name="Text 6"/>
-          <p:cNvSpPr/>
-          <p:nvPr/>
-        </p:nvSpPr>
-        <p:spPr>
-          <a:xfrm>
-            <a:off x="5120640" y="1371600"/>
-            <a:ext cx="3291840" cy="3108960"/>
-          </a:xfrm>
-          <a:prstGeom prst="rect">
-            <a:avLst/>
-          </a:prstGeom>
-          <a:noFill/>
-          <a:ln/>
-        </p:spPr>
-        <p:txBody>
-          <a:bodyPr wrap="square" rtlCol="0" anchor="t"/>
-          <a:lstStyle/>
-          <a:p>
-            <a:pPr indent="0" marL="0">
-              <a:spcAft>
-                <a:spcPts val="400"/>
-              </a:spcAft>
-              <a:buNone/>
-            </a:pPr>
-            <a:r>
-              <a:rPr lang="en-US" sz="1600" b="1" dirty="0">
-                <a:solidFill>
-                  <a:srgbClr val="1B2A4A"/>
-                </a:solidFill>
-                <a:latin typeface="Calibri" pitchFamily="34" charset="0"/>
-                <a:ea typeface="Calibri" pitchFamily="34" charset="-122"/>
-                <a:cs typeface="Calibri" pitchFamily="34" charset="-120"/>
-              </a:rPr>
-              <a:t>Common Mistakes</a:t>
-            </a:r>
-            <a:endParaRPr lang="en-US" sz="1600" dirty="0"/>
-          </a:p>
-          <a:p>
-            <a:pPr indent="0" marL="0">
-              <a:spcAft>
-                <a:spcPts val="400"/>
-              </a:spcAft>
-              <a:buNone/>
-            </a:pPr>
-            <a:endParaRPr lang="en-US" sz="1600" dirty="0"/>
-          </a:p>
-          <a:p>
-            <a:pPr indent="0" marL="0">
-              <a:spcAft>
-                <a:spcPts val="400"/>
-              </a:spcAft>
-              <a:buNone/>
-            </a:pPr>
-            <a:r>
-              <a:rPr lang="en-US" sz="1300" dirty="0">
-                <a:solidFill>
-                  <a:srgbClr val="3D3A36"/>
-                </a:solidFill>
-                <a:latin typeface="Calibri" pitchFamily="34" charset="0"/>
-                <a:ea typeface="Calibri" pitchFamily="34" charset="-122"/>
-                <a:cs typeface="Calibri" pitchFamily="34" charset="-120"/>
-              </a:rPr>
-              <a:t>Forgetting to multiply: 3x when x=4 is 12, NOT 34</a:t>
-            </a:r>
-            <a:endParaRPr lang="en-US" sz="1600" dirty="0"/>
-          </a:p>
-          <a:p>
-            <a:pPr indent="0" marL="0">
-              <a:spcAft>
-                <a:spcPts val="400"/>
-              </a:spcAft>
-              <a:buNone/>
-            </a:pPr>
-            <a:r>
-              <a:rPr lang="en-US" sz="1300" dirty="0">
-                <a:solidFill>
-                  <a:srgbClr val="3D3A36"/>
-                </a:solidFill>
-                <a:latin typeface="Calibri" pitchFamily="34" charset="0"/>
-                <a:ea typeface="Calibri" pitchFamily="34" charset="-122"/>
-                <a:cs typeface="Calibri" pitchFamily="34" charset="-120"/>
-              </a:rPr>
-              <a:t>Not using BIDMAS: 2 + 3x when x=4 is 2 + 12 = 14, NOT 20</a:t>
-            </a:r>
-            <a:endParaRPr lang="en-US" sz="1600" dirty="0"/>
-          </a:p>
-          <a:p>
-            <a:pPr indent="0" marL="0">
-              <a:spcAft>
-                <a:spcPts val="400"/>
-              </a:spcAft>
-              <a:buNone/>
-            </a:pPr>
-            <a:r>
-              <a:rPr lang="en-US" sz="1300" dirty="0">
-                <a:solidFill>
-                  <a:srgbClr val="3D3A36"/>
-                </a:solidFill>
-                <a:latin typeface="Calibri" pitchFamily="34" charset="0"/>
-                <a:ea typeface="Calibri" pitchFamily="34" charset="-122"/>
-                <a:cs typeface="Calibri" pitchFamily="34" charset="-120"/>
-              </a:rPr>
-              <a:t>Squaring negatives: (−3)² = 9 (positive!), but −3² = −9</a:t>
-            </a:r>
-            <a:endParaRPr lang="en-US" sz="1600" dirty="0"/>
-          </a:p>
-          <a:p>
-            <a:pPr indent="0" marL="0">
-              <a:spcAft>
-                <a:spcPts val="400"/>
-              </a:spcAft>
-              <a:buNone/>
-            </a:pPr>
-            <a:r>
-              <a:rPr lang="en-US" sz="1300" dirty="0">
-                <a:solidFill>
-                  <a:srgbClr val="3D3A36"/>
-                </a:solidFill>
-                <a:latin typeface="Calibri" pitchFamily="34" charset="0"/>
-                <a:ea typeface="Calibri" pitchFamily="34" charset="-122"/>
-                <a:cs typeface="Calibri" pitchFamily="34" charset="-120"/>
-              </a:rPr>
-              <a:t>Not substituting every occurrence of the letter</a:t>
-            </a:r>
-            <a:endParaRPr lang="en-US" sz="1600" dirty="0"/>
-          </a:p>
-          <a:p>
-            <a:pPr indent="0" marL="0">
-              <a:spcAft>
-                <a:spcPts val="400"/>
-              </a:spcAft>
-              <a:buNone/>
-            </a:pPr>
-            <a:r>
-              <a:rPr lang="en-US" sz="1300" dirty="0">
-                <a:solidFill>
-                  <a:srgbClr val="3D3A36"/>
-                </a:solidFill>
-                <a:latin typeface="Calibri" pitchFamily="34" charset="0"/>
-                <a:ea typeface="Calibri" pitchFamily="34" charset="-122"/>
-                <a:cs typeface="Calibri" pitchFamily="34" charset="-120"/>
-              </a:rPr>
-              <a:t>Writing the letter instead of the number in the answer</a:t>
-            </a:r>
-            <a:endParaRPr lang="en-US" sz="1600" dirty="0"/>
+              <a:t>Common mistake: 2x with x=3 means 2×3=6, NOT '23'.</a:t>
+            </a:r>
+            <a:endParaRPr lang="en-US" sz="1300" dirty="0"/>
           </a:p>
         </p:txBody>
       </p:sp>
@@ -2115,7 +2378,27 @@
         <p:spPr>
           <a:xfrm>
             <a:off x="0" y="0"/>
-            <a:ext cx="9144000" cy="54864"/>
+            <a:ext cx="9144000" cy="822960"/>
+          </a:xfrm>
+          <a:prstGeom prst="rect">
+            <a:avLst/>
+          </a:prstGeom>
+          <a:solidFill>
+            <a:srgbClr val="FFFFFF"/>
+          </a:solidFill>
+          <a:ln/>
+        </p:spPr>
+      </p:sp>
+      <p:sp>
+        <p:nvSpPr>
+          <p:cNvPr id="3" name="Shape 1"/>
+          <p:cNvSpPr/>
+          <p:nvPr/>
+        </p:nvSpPr>
+        <p:spPr>
+          <a:xfrm>
+            <a:off x="0" y="795528"/>
+            <a:ext cx="9144000" cy="27432"/>
           </a:xfrm>
           <a:prstGeom prst="rect">
             <a:avLst/>
@@ -2128,14 +2411,14 @@
       </p:sp>
       <p:sp>
         <p:nvSpPr>
-          <p:cNvPr id="3" name="Text 1"/>
-          <p:cNvSpPr/>
-          <p:nvPr/>
-        </p:nvSpPr>
-        <p:spPr>
-          <a:xfrm>
-            <a:off x="7772400" y="4709160"/>
-            <a:ext cx="1097280" cy="320040"/>
+          <p:cNvPr id="4" name="Text 2"/>
+          <p:cNvSpPr/>
+          <p:nvPr/>
+        </p:nvSpPr>
+        <p:spPr>
+          <a:xfrm>
+            <a:off x="640080" y="91440"/>
+            <a:ext cx="7863840" cy="640080"/>
           </a:xfrm>
           <a:prstGeom prst="rect">
             <a:avLst/>
@@ -2144,53 +2427,14 @@
           <a:ln/>
         </p:spPr>
         <p:txBody>
-          <a:bodyPr wrap="square" rtlCol="0" anchor="ctr"/>
-          <a:lstStyle/>
-          <a:p>
-            <a:pPr algn="r" indent="0" marL="0">
-              <a:buNone/>
-            </a:pPr>
-            <a:r>
-              <a:rPr lang="en-US" sz="900" dirty="0">
-                <a:solidFill>
-                  <a:srgbClr val="6B6660"/>
-                </a:solidFill>
-                <a:latin typeface="Calibri" pitchFamily="34" charset="0"/>
-                <a:ea typeface="Calibri" pitchFamily="34" charset="-122"/>
-                <a:cs typeface="Calibri" pitchFamily="34" charset="-120"/>
-              </a:rPr>
-              <a:t>4 / 5</a:t>
-            </a:r>
-            <a:endParaRPr lang="en-US" sz="900" dirty="0"/>
-          </a:p>
-        </p:txBody>
-      </p:sp>
-      <p:sp>
-        <p:nvSpPr>
-          <p:cNvPr id="4" name="Text 2"/>
-          <p:cNvSpPr/>
-          <p:nvPr/>
-        </p:nvSpPr>
-        <p:spPr>
-          <a:xfrm>
-            <a:off x="457200" y="274320"/>
-            <a:ext cx="8229600" cy="640080"/>
-          </a:xfrm>
-          <a:prstGeom prst="rect">
-            <a:avLst/>
-          </a:prstGeom>
-          <a:noFill/>
-          <a:ln/>
-        </p:spPr>
-        <p:txBody>
-          <a:bodyPr wrap="square" rtlCol="0" anchor="ctr"/>
+          <a:bodyPr wrap="square" lIns="0" tIns="0" rIns="0" bIns="0" rtlCol="0" anchor="ctr"/>
           <a:lstStyle/>
           <a:p>
             <a:pPr indent="0" marL="0">
               <a:buNone/>
             </a:pPr>
             <a:r>
-              <a:rPr lang="en-US" sz="2600" b="1" dirty="0">
+              <a:rPr lang="en-US" sz="2200" b="1" dirty="0">
                 <a:solidFill>
                   <a:srgbClr val="1B2A4A"/>
                 </a:solidFill>
@@ -2198,9 +2442,9 @@
                 <a:ea typeface="Georgia" pitchFamily="34" charset="-122"/>
                 <a:cs typeface="Georgia" pitchFamily="34" charset="-120"/>
               </a:rPr>
-              <a:t>Practice</a:t>
-            </a:r>
-            <a:endParaRPr lang="en-US" sz="2600" dirty="0"/>
+              <a:t>Step-by-Step Example</a:t>
+            </a:r>
+            <a:endParaRPr lang="en-US" sz="2200" dirty="0"/>
           </a:p>
         </p:txBody>
       </p:sp>
@@ -2212,8 +2456,8 @@
         </p:nvSpPr>
         <p:spPr>
           <a:xfrm>
-            <a:off x="457200" y="1097280"/>
-            <a:ext cx="8229600" cy="3657600"/>
+            <a:off x="640080" y="1005840"/>
+            <a:ext cx="7863840" cy="2926080"/>
           </a:xfrm>
           <a:prstGeom prst="rect">
             <a:avLst/>
@@ -2222,7 +2466,7 @@
           <a:ln/>
         </p:spPr>
         <p:txBody>
-          <a:bodyPr wrap="square" rtlCol="0" anchor="t"/>
+          <a:bodyPr wrap="square" rtlCol="0" anchor="ctr"/>
           <a:lstStyle/>
           <a:p>
             <a:pPr marL="342900" indent="-342900">
@@ -2233,7 +2477,7 @@
               <a:buChar char="•"/>
             </a:pPr>
             <a:r>
-              <a:rPr lang="en-US" sz="1400" dirty="0">
+              <a:rPr lang="en-US" sz="1600" dirty="0">
                 <a:solidFill>
                   <a:srgbClr val="3D3A36"/>
                 </a:solidFill>
@@ -2241,9 +2485,9 @@
                 <a:ea typeface="Calibri" pitchFamily="34" charset="-122"/>
                 <a:cs typeface="Calibri" pitchFamily="34" charset="-120"/>
               </a:rPr>
-              <a:t>If a = 3 and b = 7: a + b = 10, ab = 21, a² + b = 16</a:t>
-            </a:r>
-            <a:endParaRPr lang="en-US" sz="1400" dirty="0"/>
+              <a:t>Expression: 3x² + 2x − 1, where x = 4</a:t>
+            </a:r>
+            <a:endParaRPr lang="en-US" sz="1600" dirty="0"/>
           </a:p>
           <a:p>
             <a:pPr marL="342900" indent="-342900">
@@ -2254,7 +2498,7 @@
               <a:buChar char="•"/>
             </a:pPr>
             <a:r>
-              <a:rPr lang="en-US" sz="1400" dirty="0">
+              <a:rPr lang="en-US" sz="1600" dirty="0">
                 <a:solidFill>
                   <a:srgbClr val="3D3A36"/>
                 </a:solidFill>
@@ -2262,9 +2506,9 @@
                 <a:ea typeface="Calibri" pitchFamily="34" charset="-122"/>
                 <a:cs typeface="Calibri" pitchFamily="34" charset="-120"/>
               </a:rPr>
-              <a:t>If x = −4: 2x + 10 = 2(−4) + 10 = −8 + 10 = 2</a:t>
-            </a:r>
-            <a:endParaRPr lang="en-US" sz="1400" dirty="0"/>
+              <a:t>Step 1: Replace x → 3(4)² + 2(4) − 1</a:t>
+            </a:r>
+            <a:endParaRPr lang="en-US" sz="1600" dirty="0"/>
           </a:p>
           <a:p>
             <a:pPr marL="342900" indent="-342900">
@@ -2275,7 +2519,7 @@
               <a:buChar char="•"/>
             </a:pPr>
             <a:r>
-              <a:rPr lang="en-US" sz="1400" dirty="0">
+              <a:rPr lang="en-US" sz="1600" dirty="0">
                 <a:solidFill>
                   <a:srgbClr val="3D3A36"/>
                 </a:solidFill>
@@ -2283,9 +2527,9 @@
                 <a:ea typeface="Calibri" pitchFamily="34" charset="-122"/>
                 <a:cs typeface="Calibri" pitchFamily="34" charset="-120"/>
               </a:rPr>
-              <a:t>Formula: Area = ½bh. If b = 6, h = 8: A = ½ × 6 × 8 = 24</a:t>
-            </a:r>
-            <a:endParaRPr lang="en-US" sz="1400" dirty="0"/>
+              <a:t>Step 2: Powers first → 3(16) + 2(4) − 1</a:t>
+            </a:r>
+            <a:endParaRPr lang="en-US" sz="1600" dirty="0"/>
           </a:p>
           <a:p>
             <a:pPr marL="342900" indent="-342900">
@@ -2296,7 +2540,7 @@
               <a:buChar char="•"/>
             </a:pPr>
             <a:r>
-              <a:rPr lang="en-US" sz="1400" dirty="0">
+              <a:rPr lang="en-US" sz="1600" dirty="0">
                 <a:solidFill>
                   <a:srgbClr val="3D3A36"/>
                 </a:solidFill>
@@ -2304,9 +2548,9 @@
                 <a:ea typeface="Calibri" pitchFamily="34" charset="-122"/>
                 <a:cs typeface="Calibri" pitchFamily="34" charset="-120"/>
               </a:rPr>
-              <a:t>Perimeter = 2(l + w). If l = 12, w = 5: P = 2(17) = 34</a:t>
-            </a:r>
-            <a:endParaRPr lang="en-US" sz="1400" dirty="0"/>
+              <a:t>Step 3: Multiply → 48 + 8 − 1</a:t>
+            </a:r>
+            <a:endParaRPr lang="en-US" sz="1600" dirty="0"/>
           </a:p>
           <a:p>
             <a:pPr marL="342900" indent="-342900">
@@ -2317,7 +2561,7 @@
               <a:buChar char="•"/>
             </a:pPr>
             <a:r>
-              <a:rPr lang="en-US" sz="1400" dirty="0">
+              <a:rPr lang="en-US" sz="1600" dirty="0">
                 <a:solidFill>
                   <a:srgbClr val="3D3A36"/>
                 </a:solidFill>
@@ -2325,9 +2569,95 @@
                 <a:ea typeface="Calibri" pitchFamily="34" charset="-122"/>
                 <a:cs typeface="Calibri" pitchFamily="34" charset="-120"/>
               </a:rPr>
-              <a:t>Substitution is used in formulas throughout maths and science</a:t>
-            </a:r>
-            <a:endParaRPr lang="en-US" sz="1400" dirty="0"/>
+              <a:t>Step 4: Add/Subtract → 55</a:t>
+            </a:r>
+            <a:endParaRPr lang="en-US" sz="1600" dirty="0"/>
+          </a:p>
+        </p:txBody>
+      </p:sp>
+      <p:sp>
+        <p:nvSpPr>
+          <p:cNvPr id="6" name="Shape 4"/>
+          <p:cNvSpPr/>
+          <p:nvPr/>
+        </p:nvSpPr>
+        <p:spPr>
+          <a:xfrm>
+            <a:off x="640080" y="4114800"/>
+            <a:ext cx="7863840" cy="731520"/>
+          </a:xfrm>
+          <a:prstGeom prst="rect">
+            <a:avLst/>
+          </a:prstGeom>
+          <a:solidFill>
+            <a:srgbClr val="E8F5F3"/>
+          </a:solidFill>
+          <a:ln/>
+          <a:effectLst>
+            <a:outerShdw sx="100000" sy="100000" kx="0" ky="0" algn="bl" rotWithShape="0" blurRad="76200" dist="25400" dir="8100000">
+              <a:srgbClr val="000000">
+                <a:alpha val="12000"/>
+              </a:srgbClr>
+            </a:outerShdw>
+          </a:effectLst>
+        </p:spPr>
+      </p:sp>
+      <p:sp>
+        <p:nvSpPr>
+          <p:cNvPr id="7" name="Shape 5"/>
+          <p:cNvSpPr/>
+          <p:nvPr/>
+        </p:nvSpPr>
+        <p:spPr>
+          <a:xfrm>
+            <a:off x="640080" y="4114800"/>
+            <a:ext cx="64008" cy="731520"/>
+          </a:xfrm>
+          <a:prstGeom prst="rect">
+            <a:avLst/>
+          </a:prstGeom>
+          <a:solidFill>
+            <a:srgbClr val="2A9D8F"/>
+          </a:solidFill>
+          <a:ln/>
+        </p:spPr>
+      </p:sp>
+      <p:sp>
+        <p:nvSpPr>
+          <p:cNvPr id="8" name="Text 6"/>
+          <p:cNvSpPr/>
+          <p:nvPr/>
+        </p:nvSpPr>
+        <p:spPr>
+          <a:xfrm>
+            <a:off x="914400" y="4160520"/>
+            <a:ext cx="7406640" cy="640080"/>
+          </a:xfrm>
+          <a:prstGeom prst="rect">
+            <a:avLst/>
+          </a:prstGeom>
+          <a:noFill/>
+          <a:ln/>
+        </p:spPr>
+        <p:txBody>
+          <a:bodyPr wrap="square" rtlCol="0" anchor="ctr"/>
+          <a:lstStyle/>
+          <a:p>
+            <a:pPr indent="0" marL="0">
+              <a:buNone/>
+            </a:pPr>
+            <a:r>
+              <a:rPr lang="en-US" sz="1300" i="1" dirty="0">
+                <a:solidFill>
+                  <a:srgbClr val="3D3A36"/>
+                </a:solidFill>
+                <a:latin typeface="Calibri" pitchFamily="34" charset="0"/>
+                <a:ea typeface="Calibri" pitchFamily="34" charset="-122"/>
+                <a:cs typeface="Calibri" pitchFamily="34" charset="-120"/>
+              </a:rPr>
+              <a:t>Formula → Substitution → BIDMAS → Answer</a:t>
+            </a:r>
+            <a:endParaRPr lang="en-US" sz="1300" dirty="0"/>
           </a:p>
         </p:txBody>
       </p:sp>
@@ -2345,7 +2675,7 @@
     <p:bg>
       <p:bgPr>
         <a:solidFill>
-          <a:srgbClr val="1B2A4A"/>
+          <a:srgbClr val="FAF8F5"/>
         </a:solidFill>
       </p:bgPr>
     </p:bg>
@@ -2372,27 +2702,47 @@
         <p:spPr>
           <a:xfrm>
             <a:off x="0" y="0"/>
-            <a:ext cx="109728" cy="5143500"/>
-          </a:xfrm>
-          <a:prstGeom prst="rect">
-            <a:avLst/>
-          </a:prstGeom>
-          <a:solidFill>
-            <a:srgbClr val="E9C46A"/>
-          </a:solidFill>
-          <a:ln/>
-        </p:spPr>
-      </p:sp>
-      <p:sp>
-        <p:nvSpPr>
-          <p:cNvPr id="3" name="Text 1"/>
-          <p:cNvSpPr/>
-          <p:nvPr/>
-        </p:nvSpPr>
-        <p:spPr>
-          <a:xfrm>
-            <a:off x="731520" y="457200"/>
-            <a:ext cx="7772400" cy="731520"/>
+            <a:ext cx="9144000" cy="822960"/>
+          </a:xfrm>
+          <a:prstGeom prst="rect">
+            <a:avLst/>
+          </a:prstGeom>
+          <a:solidFill>
+            <a:srgbClr val="FFFFFF"/>
+          </a:solidFill>
+          <a:ln/>
+        </p:spPr>
+      </p:sp>
+      <p:sp>
+        <p:nvSpPr>
+          <p:cNvPr id="3" name="Shape 1"/>
+          <p:cNvSpPr/>
+          <p:nvPr/>
+        </p:nvSpPr>
+        <p:spPr>
+          <a:xfrm>
+            <a:off x="0" y="795528"/>
+            <a:ext cx="9144000" cy="27432"/>
+          </a:xfrm>
+          <a:prstGeom prst="rect">
+            <a:avLst/>
+          </a:prstGeom>
+          <a:solidFill>
+            <a:srgbClr val="2A9D8F"/>
+          </a:solidFill>
+          <a:ln/>
+        </p:spPr>
+      </p:sp>
+      <p:sp>
+        <p:nvSpPr>
+          <p:cNvPr id="4" name="Text 2"/>
+          <p:cNvSpPr/>
+          <p:nvPr/>
+        </p:nvSpPr>
+        <p:spPr>
+          <a:xfrm>
+            <a:off x="640080" y="91440"/>
+            <a:ext cx="7863840" cy="640080"/>
           </a:xfrm>
           <a:prstGeom prst="rect">
             <a:avLst/>
@@ -2401,37 +2751,84 @@
           <a:ln/>
         </p:spPr>
         <p:txBody>
-          <a:bodyPr wrap="square" rtlCol="0" anchor="ctr"/>
+          <a:bodyPr wrap="square" lIns="0" tIns="0" rIns="0" bIns="0" rtlCol="0" anchor="ctr"/>
           <a:lstStyle/>
           <a:p>
             <a:pPr indent="0" marL="0">
               <a:buNone/>
             </a:pPr>
             <a:r>
-              <a:rPr lang="en-US" sz="3200" b="1" dirty="0">
-                <a:solidFill>
-                  <a:srgbClr val="FFFFFF"/>
+              <a:rPr lang="en-US" sz="2200" b="1" dirty="0">
+                <a:solidFill>
+                  <a:srgbClr val="1B2A4A"/>
                 </a:solidFill>
                 <a:latin typeface="Georgia" pitchFamily="34" charset="0"/>
                 <a:ea typeface="Georgia" pitchFamily="34" charset="-122"/>
                 <a:cs typeface="Georgia" pitchFamily="34" charset="-120"/>
               </a:rPr>
-              <a:t>Key Takeaways</a:t>
-            </a:r>
-            <a:endParaRPr lang="en-US" sz="3200" dirty="0"/>
-          </a:p>
-        </p:txBody>
-      </p:sp>
-      <p:sp>
-        <p:nvSpPr>
-          <p:cNvPr id="4" name="Text 2"/>
-          <p:cNvSpPr/>
-          <p:nvPr/>
-        </p:nvSpPr>
-        <p:spPr>
-          <a:xfrm>
-            <a:off x="731520" y="1463040"/>
-            <a:ext cx="7772400" cy="3200400"/>
+              <a:t>Watch Out: Negatives!</a:t>
+            </a:r>
+            <a:endParaRPr lang="en-US" sz="2200" dirty="0"/>
+          </a:p>
+        </p:txBody>
+      </p:sp>
+      <p:sp>
+        <p:nvSpPr>
+          <p:cNvPr id="5" name="Shape 3"/>
+          <p:cNvSpPr/>
+          <p:nvPr/>
+        </p:nvSpPr>
+        <p:spPr>
+          <a:xfrm>
+            <a:off x="457200" y="1005840"/>
+            <a:ext cx="3931920" cy="3657600"/>
+          </a:xfrm>
+          <a:prstGeom prst="rect">
+            <a:avLst/>
+          </a:prstGeom>
+          <a:solidFill>
+            <a:srgbClr val="FFFFFF"/>
+          </a:solidFill>
+          <a:ln/>
+          <a:effectLst>
+            <a:outerShdw sx="100000" sy="100000" kx="0" ky="0" algn="bl" rotWithShape="0" blurRad="76200" dist="25400" dir="8100000">
+              <a:srgbClr val="000000">
+                <a:alpha val="12000"/>
+              </a:srgbClr>
+            </a:outerShdw>
+          </a:effectLst>
+        </p:spPr>
+      </p:sp>
+      <p:sp>
+        <p:nvSpPr>
+          <p:cNvPr id="6" name="Shape 4"/>
+          <p:cNvSpPr/>
+          <p:nvPr/>
+        </p:nvSpPr>
+        <p:spPr>
+          <a:xfrm>
+            <a:off x="457200" y="1005840"/>
+            <a:ext cx="3931920" cy="64008"/>
+          </a:xfrm>
+          <a:prstGeom prst="rect">
+            <a:avLst/>
+          </a:prstGeom>
+          <a:solidFill>
+            <a:srgbClr val="2A9D8F"/>
+          </a:solidFill>
+          <a:ln/>
+        </p:spPr>
+      </p:sp>
+      <p:sp>
+        <p:nvSpPr>
+          <p:cNvPr id="7" name="Text 5"/>
+          <p:cNvSpPr/>
+          <p:nvPr/>
+        </p:nvSpPr>
+        <p:spPr>
+          <a:xfrm>
+            <a:off x="640080" y="1188720"/>
+            <a:ext cx="3566160" cy="457200"/>
           </a:xfrm>
           <a:prstGeom prst="rect">
             <a:avLst/>
@@ -2440,151 +2837,1282 @@
           <a:ln/>
         </p:spPr>
         <p:txBody>
-          <a:bodyPr wrap="square" rtlCol="0" anchor="t"/>
+          <a:bodyPr wrap="square" rtlCol="0" anchor="ctr"/>
+          <a:lstStyle/>
+          <a:p>
+            <a:pPr indent="0" marL="0">
+              <a:buNone/>
+            </a:pPr>
+            <a:r>
+              <a:rPr lang="en-US" sz="1600" b="1" dirty="0">
+                <a:solidFill>
+                  <a:srgbClr val="2A9D8F"/>
+                </a:solidFill>
+                <a:latin typeface="Calibri" pitchFamily="34" charset="0"/>
+                <a:ea typeface="Calibri" pitchFamily="34" charset="-122"/>
+                <a:cs typeface="Calibri" pitchFamily="34" charset="-120"/>
+              </a:rPr>
+              <a:t>Common Traps</a:t>
+            </a:r>
+            <a:endParaRPr lang="en-US" sz="1600" dirty="0"/>
+          </a:p>
+        </p:txBody>
+      </p:sp>
+      <p:sp>
+        <p:nvSpPr>
+          <p:cNvPr id="8" name="Text 6"/>
+          <p:cNvSpPr/>
+          <p:nvPr/>
+        </p:nvSpPr>
+        <p:spPr>
+          <a:xfrm>
+            <a:off x="640080" y="1691640"/>
+            <a:ext cx="3566160" cy="2743200"/>
+          </a:xfrm>
+          <a:prstGeom prst="rect">
+            <a:avLst/>
+          </a:prstGeom>
+          <a:noFill/>
+          <a:ln/>
+        </p:spPr>
+        <p:txBody>
+          <a:bodyPr wrap="square" rtlCol="0" anchor="ctr"/>
           <a:lstStyle/>
           <a:p>
             <a:pPr marL="342900" indent="-342900">
               <a:spcAft>
-                <a:spcPts val="1000"/>
+                <a:spcPts val="600"/>
               </a:spcAft>
               <a:buSzPct val="100000"/>
               <a:buChar char="•"/>
             </a:pPr>
             <a:r>
-              <a:rPr lang="en-US" sz="1500" dirty="0">
-                <a:solidFill>
-                  <a:srgbClr val="CADCFC"/>
+              <a:rPr lang="en-US" sz="1400" dirty="0">
+                <a:solidFill>
+                  <a:srgbClr val="3D3A36"/>
                 </a:solidFill>
                 <a:latin typeface="Calibri" pitchFamily="34" charset="0"/>
                 <a:ea typeface="Calibri" pitchFamily="34" charset="-122"/>
                 <a:cs typeface="Calibri" pitchFamily="34" charset="-120"/>
               </a:rPr>
-              <a:t>Substitution = replacing letters with numbers</a:t>
-            </a:r>
-            <a:endParaRPr lang="en-US" sz="1500" dirty="0"/>
+              <a:t>(−3)² = 9, not −9</a:t>
+            </a:r>
+            <a:endParaRPr lang="en-US" sz="1400" dirty="0"/>
           </a:p>
           <a:p>
             <a:pPr marL="342900" indent="-342900">
               <a:spcAft>
-                <a:spcPts val="1000"/>
+                <a:spcPts val="600"/>
               </a:spcAft>
               <a:buSzPct val="100000"/>
               <a:buChar char="•"/>
             </a:pPr>
             <a:r>
-              <a:rPr lang="en-US" sz="1500" dirty="0">
-                <a:solidFill>
-                  <a:srgbClr val="CADCFC"/>
+              <a:rPr lang="en-US" sz="1400" dirty="0">
+                <a:solidFill>
+                  <a:srgbClr val="3D3A36"/>
                 </a:solidFill>
                 <a:latin typeface="Calibri" pitchFamily="34" charset="0"/>
                 <a:ea typeface="Calibri" pitchFamily="34" charset="-122"/>
                 <a:cs typeface="Calibri" pitchFamily="34" charset="-120"/>
               </a:rPr>
-              <a:t>Follow BIDMAS when calculating</a:t>
-            </a:r>
-            <a:endParaRPr lang="en-US" sz="1500" dirty="0"/>
+              <a:t>2 × (−4) = −8</a:t>
+            </a:r>
+            <a:endParaRPr lang="en-US" sz="1400" dirty="0"/>
           </a:p>
           <a:p>
             <a:pPr marL="342900" indent="-342900">
               <a:spcAft>
-                <a:spcPts val="1000"/>
+                <a:spcPts val="600"/>
               </a:spcAft>
               <a:buSzPct val="100000"/>
               <a:buChar char="•"/>
             </a:pPr>
             <a:r>
-              <a:rPr lang="en-US" sz="1500" dirty="0">
-                <a:solidFill>
-                  <a:srgbClr val="CADCFC"/>
+              <a:rPr lang="en-US" sz="1400" dirty="0">
+                <a:solidFill>
+                  <a:srgbClr val="3D3A36"/>
                 </a:solidFill>
                 <a:latin typeface="Calibri" pitchFamily="34" charset="0"/>
                 <a:ea typeface="Calibri" pitchFamily="34" charset="-122"/>
                 <a:cs typeface="Calibri" pitchFamily="34" charset="-120"/>
               </a:rPr>
-              <a:t>3x means 3 × x (not 'thirty-x')</a:t>
-            </a:r>
-            <a:endParaRPr lang="en-US" sz="1500" dirty="0"/>
-          </a:p>
+              <a:t>5 − (−3) = 5 + 3 = 8</a:t>
+            </a:r>
+            <a:endParaRPr lang="en-US" sz="1400" dirty="0"/>
+          </a:p>
+        </p:txBody>
+      </p:sp>
+      <p:sp>
+        <p:nvSpPr>
+          <p:cNvPr id="9" name="Shape 7"/>
+          <p:cNvSpPr/>
+          <p:nvPr/>
+        </p:nvSpPr>
+        <p:spPr>
+          <a:xfrm>
+            <a:off x="4754880" y="1005840"/>
+            <a:ext cx="3931920" cy="3657600"/>
+          </a:xfrm>
+          <a:prstGeom prst="rect">
+            <a:avLst/>
+          </a:prstGeom>
+          <a:solidFill>
+            <a:srgbClr val="FFFFFF"/>
+          </a:solidFill>
+          <a:ln/>
+          <a:effectLst>
+            <a:outerShdw sx="100000" sy="100000" kx="0" ky="0" algn="bl" rotWithShape="0" blurRad="76200" dist="25400" dir="8100000">
+              <a:srgbClr val="000000">
+                <a:alpha val="12000"/>
+              </a:srgbClr>
+            </a:outerShdw>
+          </a:effectLst>
+        </p:spPr>
+      </p:sp>
+      <p:sp>
+        <p:nvSpPr>
+          <p:cNvPr id="10" name="Shape 8"/>
+          <p:cNvSpPr/>
+          <p:nvPr/>
+        </p:nvSpPr>
+        <p:spPr>
+          <a:xfrm>
+            <a:off x="4754880" y="1005840"/>
+            <a:ext cx="3931920" cy="64008"/>
+          </a:xfrm>
+          <a:prstGeom prst="rect">
+            <a:avLst/>
+          </a:prstGeom>
+          <a:solidFill>
+            <a:srgbClr val="E9C46A"/>
+          </a:solidFill>
+          <a:ln/>
+        </p:spPr>
+      </p:sp>
+      <p:sp>
+        <p:nvSpPr>
+          <p:cNvPr id="11" name="Text 9"/>
+          <p:cNvSpPr/>
+          <p:nvPr/>
+        </p:nvSpPr>
+        <p:spPr>
+          <a:xfrm>
+            <a:off x="4937760" y="1188720"/>
+            <a:ext cx="3566160" cy="457200"/>
+          </a:xfrm>
+          <a:prstGeom prst="rect">
+            <a:avLst/>
+          </a:prstGeom>
+          <a:noFill/>
+          <a:ln/>
+        </p:spPr>
+        <p:txBody>
+          <a:bodyPr wrap="square" rtlCol="0" anchor="ctr"/>
+          <a:lstStyle/>
+          <a:p>
+            <a:pPr indent="0" marL="0">
+              <a:buNone/>
+            </a:pPr>
+            <a:r>
+              <a:rPr lang="en-US" sz="1600" b="1" dirty="0">
+                <a:solidFill>
+                  <a:srgbClr val="E9C46A"/>
+                </a:solidFill>
+                <a:latin typeface="Calibri" pitchFamily="34" charset="0"/>
+                <a:ea typeface="Calibri" pitchFamily="34" charset="-122"/>
+                <a:cs typeface="Calibri" pitchFamily="34" charset="-120"/>
+              </a:rPr>
+              <a:t>Real Formulas</a:t>
+            </a:r>
+            <a:endParaRPr lang="en-US" sz="1600" dirty="0"/>
+          </a:p>
+        </p:txBody>
+      </p:sp>
+      <p:sp>
+        <p:nvSpPr>
+          <p:cNvPr id="12" name="Text 10"/>
+          <p:cNvSpPr/>
+          <p:nvPr/>
+        </p:nvSpPr>
+        <p:spPr>
+          <a:xfrm>
+            <a:off x="4937760" y="1691640"/>
+            <a:ext cx="3566160" cy="2743200"/>
+          </a:xfrm>
+          <a:prstGeom prst="rect">
+            <a:avLst/>
+          </a:prstGeom>
+          <a:noFill/>
+          <a:ln/>
+        </p:spPr>
+        <p:txBody>
+          <a:bodyPr wrap="square" rtlCol="0" anchor="ctr"/>
+          <a:lstStyle/>
           <a:p>
             <a:pPr marL="342900" indent="-342900">
               <a:spcAft>
-                <a:spcPts val="1000"/>
+                <a:spcPts val="600"/>
               </a:spcAft>
               <a:buSzPct val="100000"/>
               <a:buChar char="•"/>
             </a:pPr>
             <a:r>
-              <a:rPr lang="en-US" sz="1500" dirty="0">
-                <a:solidFill>
-                  <a:srgbClr val="CADCFC"/>
+              <a:rPr lang="en-US" sz="1400" dirty="0">
+                <a:solidFill>
+                  <a:srgbClr val="3D3A36"/>
                 </a:solidFill>
                 <a:latin typeface="Calibri" pitchFamily="34" charset="0"/>
                 <a:ea typeface="Calibri" pitchFamily="34" charset="-122"/>
                 <a:cs typeface="Calibri" pitchFamily="34" charset="-120"/>
               </a:rPr>
-              <a:t>(−3)² = 9 but −3² = −9 — brackets matter!</a:t>
-            </a:r>
-            <a:endParaRPr lang="en-US" sz="1500" dirty="0"/>
+              <a:t>Nanjing summer: F = 1.8(28)+32 = 82.4°F</a:t>
+            </a:r>
+            <a:endParaRPr lang="en-US" sz="1400" dirty="0"/>
           </a:p>
           <a:p>
             <a:pPr marL="342900" indent="-342900">
               <a:spcAft>
-                <a:spcPts val="1000"/>
+                <a:spcPts val="600"/>
               </a:spcAft>
               <a:buSzPct val="100000"/>
               <a:buChar char="•"/>
             </a:pPr>
             <a:r>
-              <a:rPr lang="en-US" sz="1500" dirty="0">
-                <a:solidFill>
-                  <a:srgbClr val="CADCFC"/>
+              <a:rPr lang="en-US" sz="1400" dirty="0">
+                <a:solidFill>
+                  <a:srgbClr val="3D3A36"/>
                 </a:solidFill>
                 <a:latin typeface="Calibri" pitchFamily="34" charset="0"/>
                 <a:ea typeface="Calibri" pitchFamily="34" charset="-122"/>
                 <a:cs typeface="Calibri" pitchFamily="34" charset="-120"/>
               </a:rPr>
-              <a:t>Used in formulas: area, perimeter, speed, etc.</a:t>
-            </a:r>
-            <a:endParaRPr lang="en-US" sz="1500" dirty="0"/>
-          </a:p>
-        </p:txBody>
-      </p:sp>
-      <p:sp>
-        <p:nvSpPr>
-          <p:cNvPr id="5" name="Text 3"/>
-          <p:cNvSpPr/>
-          <p:nvPr/>
-        </p:nvSpPr>
-        <p:spPr>
-          <a:xfrm>
-            <a:off x="731520" y="4572000"/>
-            <a:ext cx="7772400" cy="365760"/>
-          </a:xfrm>
-          <a:prstGeom prst="rect">
-            <a:avLst/>
-          </a:prstGeom>
-          <a:noFill/>
-          <a:ln/>
-        </p:spPr>
-        <p:txBody>
-          <a:bodyPr wrap="square" rtlCol="0" anchor="ctr"/>
-          <a:lstStyle/>
-          <a:p>
-            <a:pPr indent="0" marL="0">
-              <a:buNone/>
-            </a:pPr>
-            <a:r>
-              <a:rPr lang="en-US" sz="1100" dirty="0">
-                <a:solidFill>
-                  <a:srgbClr val="E9C46A"/>
+              <a:t>Nanjing winter: F = 1.8(−5)+32 = 23°F</a:t>
+            </a:r>
+            <a:endParaRPr lang="en-US" sz="1400" dirty="0"/>
+          </a:p>
+          <a:p>
+            <a:pPr marL="342900" indent="-342900">
+              <a:spcAft>
+                <a:spcPts val="600"/>
+              </a:spcAft>
+              <a:buSzPct val="100000"/>
+              <a:buChar char="•"/>
+            </a:pPr>
+            <a:r>
+              <a:rPr lang="en-US" sz="1400" dirty="0">
+                <a:solidFill>
+                  <a:srgbClr val="3D3A36"/>
                 </a:solidFill>
                 <a:latin typeface="Calibri" pitchFamily="34" charset="0"/>
                 <a:ea typeface="Calibri" pitchFamily="34" charset="-122"/>
                 <a:cs typeface="Calibri" pitchFamily="34" charset="-120"/>
               </a:rPr>
+              <a:t>Seoul summer: F = 1.8(35)+32 = 95°F</a:t>
+            </a:r>
+            <a:endParaRPr lang="en-US" sz="1400" dirty="0"/>
+          </a:p>
+        </p:txBody>
+      </p:sp>
+    </p:spTree>
+  </p:cSld>
+  <p:clrMapOvr>
+    <a:masterClrMapping/>
+  </p:clrMapOvr>
+</p:sld>
+</file>
+
+<file path=ppt/slides/slide6.xml><?xml version="1.0" encoding="utf-8"?>
+<p:sld xmlns:a="http://schemas.openxmlformats.org/drawingml/2006/main" xmlns:r="http://schemas.openxmlformats.org/officeDocument/2006/relationships" xmlns:p="http://schemas.openxmlformats.org/presentationml/2006/main">
+  <p:cSld name="Slide 6">
+    <p:bg>
+      <p:bgPr>
+        <a:solidFill>
+          <a:srgbClr val="FAF8F5"/>
+        </a:solidFill>
+      </p:bgPr>
+    </p:bg>
+    <p:spTree>
+      <p:nvGrpSpPr>
+        <p:cNvPr id="1" name=""/>
+        <p:cNvGrpSpPr/>
+        <p:nvPr/>
+      </p:nvGrpSpPr>
+      <p:grpSpPr>
+        <a:xfrm>
+          <a:off x="0" y="0"/>
+          <a:ext cx="0" cy="0"/>
+          <a:chOff x="0" y="0"/>
+          <a:chExt cx="0" cy="0"/>
+        </a:xfrm>
+      </p:grpSpPr>
+      <p:sp>
+        <p:nvSpPr>
+          <p:cNvPr id="2" name="Shape 0"/>
+          <p:cNvSpPr/>
+          <p:nvPr/>
+        </p:nvSpPr>
+        <p:spPr>
+          <a:xfrm>
+            <a:off x="0" y="0"/>
+            <a:ext cx="9144000" cy="822960"/>
+          </a:xfrm>
+          <a:prstGeom prst="rect">
+            <a:avLst/>
+          </a:prstGeom>
+          <a:solidFill>
+            <a:srgbClr val="FFFFFF"/>
+          </a:solidFill>
+          <a:ln/>
+        </p:spPr>
+      </p:sp>
+      <p:sp>
+        <p:nvSpPr>
+          <p:cNvPr id="3" name="Shape 1"/>
+          <p:cNvSpPr/>
+          <p:nvPr/>
+        </p:nvSpPr>
+        <p:spPr>
+          <a:xfrm>
+            <a:off x="0" y="795528"/>
+            <a:ext cx="9144000" cy="27432"/>
+          </a:xfrm>
+          <a:prstGeom prst="rect">
+            <a:avLst/>
+          </a:prstGeom>
+          <a:solidFill>
+            <a:srgbClr val="2A9D8F"/>
+          </a:solidFill>
+          <a:ln/>
+        </p:spPr>
+      </p:sp>
+      <p:sp>
+        <p:nvSpPr>
+          <p:cNvPr id="4" name="Text 2"/>
+          <p:cNvSpPr/>
+          <p:nvPr/>
+        </p:nvSpPr>
+        <p:spPr>
+          <a:xfrm>
+            <a:off x="640080" y="91440"/>
+            <a:ext cx="7863840" cy="640080"/>
+          </a:xfrm>
+          <a:prstGeom prst="rect">
+            <a:avLst/>
+          </a:prstGeom>
+          <a:noFill/>
+          <a:ln/>
+        </p:spPr>
+        <p:txBody>
+          <a:bodyPr wrap="square" lIns="0" tIns="0" rIns="0" bIns="0" rtlCol="0" anchor="ctr"/>
+          <a:lstStyle/>
+          <a:p>
+            <a:pPr indent="0" marL="0">
+              <a:buNone/>
+            </a:pPr>
+            <a:r>
+              <a:rPr lang="en-US" sz="2200" b="1" dirty="0">
+                <a:solidFill>
+                  <a:srgbClr val="1B2A4A"/>
+                </a:solidFill>
+                <a:latin typeface="Georgia" pitchFamily="34" charset="0"/>
+                <a:ea typeface="Georgia" pitchFamily="34" charset="-122"/>
+                <a:cs typeface="Georgia" pitchFamily="34" charset="-120"/>
+              </a:rPr>
+              <a:t>Substituting into Formulas</a:t>
+            </a:r>
+            <a:endParaRPr lang="en-US" sz="2200" dirty="0"/>
+          </a:p>
+        </p:txBody>
+      </p:sp>
+      <p:sp>
+        <p:nvSpPr>
+          <p:cNvPr id="5" name="Text 3"/>
+          <p:cNvSpPr/>
+          <p:nvPr/>
+        </p:nvSpPr>
+        <p:spPr>
+          <a:xfrm>
+            <a:off x="640080" y="1005840"/>
+            <a:ext cx="7863840" cy="2926080"/>
+          </a:xfrm>
+          <a:prstGeom prst="rect">
+            <a:avLst/>
+          </a:prstGeom>
+          <a:noFill/>
+          <a:ln/>
+        </p:spPr>
+        <p:txBody>
+          <a:bodyPr wrap="square" rtlCol="0" anchor="ctr"/>
+          <a:lstStyle/>
+          <a:p>
+            <a:pPr marL="342900" indent="-342900">
+              <a:spcAft>
+                <a:spcPts val="800"/>
+              </a:spcAft>
+              <a:buSzPct val="100000"/>
+              <a:buChar char="•"/>
+            </a:pPr>
+            <a:r>
+              <a:rPr lang="en-US" sz="1600" dirty="0">
+                <a:solidFill>
+                  <a:srgbClr val="3D3A36"/>
+                </a:solidFill>
+                <a:latin typeface="Calibri" pitchFamily="34" charset="0"/>
+                <a:ea typeface="Calibri" pitchFamily="34" charset="-122"/>
+                <a:cs typeface="Calibri" pitchFamily="34" charset="-120"/>
+              </a:rPr>
+              <a:t>Area of triangle: A = ½bh. If b=6, h=4 → A=12</a:t>
+            </a:r>
+            <a:endParaRPr lang="en-US" sz="1600" dirty="0"/>
+          </a:p>
+          <a:p>
+            <a:pPr marL="342900" indent="-342900">
+              <a:spcAft>
+                <a:spcPts val="800"/>
+              </a:spcAft>
+              <a:buSzPct val="100000"/>
+              <a:buChar char="•"/>
+            </a:pPr>
+            <a:r>
+              <a:rPr lang="en-US" sz="1600" dirty="0">
+                <a:solidFill>
+                  <a:srgbClr val="3D3A36"/>
+                </a:solidFill>
+                <a:latin typeface="Calibri" pitchFamily="34" charset="0"/>
+                <a:ea typeface="Calibri" pitchFamily="34" charset="-122"/>
+                <a:cs typeface="Calibri" pitchFamily="34" charset="-120"/>
+              </a:rPr>
+              <a:t>Speed: s = d÷t. Nanjing–Shanghai: 300÷1.5 = 200 km/h</a:t>
+            </a:r>
+            <a:endParaRPr lang="en-US" sz="1600" dirty="0"/>
+          </a:p>
+          <a:p>
+            <a:pPr marL="342900" indent="-342900">
+              <a:spcAft>
+                <a:spcPts val="800"/>
+              </a:spcAft>
+              <a:buSzPct val="100000"/>
+              <a:buChar char="•"/>
+            </a:pPr>
+            <a:r>
+              <a:rPr lang="en-US" sz="1600" dirty="0">
+                <a:solidFill>
+                  <a:srgbClr val="3D3A36"/>
+                </a:solidFill>
+                <a:latin typeface="Calibri" pitchFamily="34" charset="0"/>
+                <a:ea typeface="Calibri" pitchFamily="34" charset="-122"/>
+                <a:cs typeface="Calibri" pitchFamily="34" charset="-120"/>
+              </a:rPr>
+              <a:t>Perimeter of rectangle: P = 2(l+w). NIS field: 2(100+64) = 328 m</a:t>
+            </a:r>
+            <a:endParaRPr lang="en-US" sz="1600" dirty="0"/>
+          </a:p>
+          <a:p>
+            <a:pPr marL="342900" indent="-342900">
+              <a:spcAft>
+                <a:spcPts val="800"/>
+              </a:spcAft>
+              <a:buSzPct val="100000"/>
+              <a:buChar char="•"/>
+            </a:pPr>
+            <a:r>
+              <a:rPr lang="en-US" sz="1600" dirty="0">
+                <a:solidFill>
+                  <a:srgbClr val="3D3A36"/>
+                </a:solidFill>
+                <a:latin typeface="Calibri" pitchFamily="34" charset="0"/>
+                <a:ea typeface="Calibri" pitchFamily="34" charset="-122"/>
+                <a:cs typeface="Calibri" pitchFamily="34" charset="-120"/>
+              </a:rPr>
+              <a:t>Always show working: Formula → Sub → Answer</a:t>
+            </a:r>
+            <a:endParaRPr lang="en-US" sz="1600" dirty="0"/>
+          </a:p>
+        </p:txBody>
+      </p:sp>
+    </p:spTree>
+  </p:cSld>
+  <p:clrMapOvr>
+    <a:masterClrMapping/>
+  </p:clrMapOvr>
+</p:sld>
+</file>
+
+<file path=ppt/slides/slide7.xml><?xml version="1.0" encoding="utf-8"?>
+<p:sld xmlns:a="http://schemas.openxmlformats.org/drawingml/2006/main" xmlns:r="http://schemas.openxmlformats.org/officeDocument/2006/relationships" xmlns:p="http://schemas.openxmlformats.org/presentationml/2006/main">
+  <p:cSld name="Slide 7">
+    <p:bg>
+      <p:bgPr>
+        <a:solidFill>
+          <a:srgbClr val="FAF8F5"/>
+        </a:solidFill>
+      </p:bgPr>
+    </p:bg>
+    <p:spTree>
+      <p:nvGrpSpPr>
+        <p:cNvPr id="1" name=""/>
+        <p:cNvGrpSpPr/>
+        <p:nvPr/>
+      </p:nvGrpSpPr>
+      <p:grpSpPr>
+        <a:xfrm>
+          <a:off x="0" y="0"/>
+          <a:ext cx="0" cy="0"/>
+          <a:chOff x="0" y="0"/>
+          <a:chExt cx="0" cy="0"/>
+        </a:xfrm>
+      </p:grpSpPr>
+      <p:sp>
+        <p:nvSpPr>
+          <p:cNvPr id="2" name="Shape 0"/>
+          <p:cNvSpPr/>
+          <p:nvPr/>
+        </p:nvSpPr>
+        <p:spPr>
+          <a:xfrm>
+            <a:off x="0" y="0"/>
+            <a:ext cx="9144000" cy="822960"/>
+          </a:xfrm>
+          <a:prstGeom prst="rect">
+            <a:avLst/>
+          </a:prstGeom>
+          <a:solidFill>
+            <a:srgbClr val="FFFFFF"/>
+          </a:solidFill>
+          <a:ln/>
+        </p:spPr>
+      </p:sp>
+      <p:sp>
+        <p:nvSpPr>
+          <p:cNvPr id="3" name="Shape 1"/>
+          <p:cNvSpPr/>
+          <p:nvPr/>
+        </p:nvSpPr>
+        <p:spPr>
+          <a:xfrm>
+            <a:off x="0" y="795528"/>
+            <a:ext cx="9144000" cy="27432"/>
+          </a:xfrm>
+          <a:prstGeom prst="rect">
+            <a:avLst/>
+          </a:prstGeom>
+          <a:solidFill>
+            <a:srgbClr val="2A9D8F"/>
+          </a:solidFill>
+          <a:ln/>
+        </p:spPr>
+      </p:sp>
+      <p:sp>
+        <p:nvSpPr>
+          <p:cNvPr id="4" name="Text 2"/>
+          <p:cNvSpPr/>
+          <p:nvPr/>
+        </p:nvSpPr>
+        <p:spPr>
+          <a:xfrm>
+            <a:off x="640080" y="91440"/>
+            <a:ext cx="7863840" cy="640080"/>
+          </a:xfrm>
+          <a:prstGeom prst="rect">
+            <a:avLst/>
+          </a:prstGeom>
+          <a:noFill/>
+          <a:ln/>
+        </p:spPr>
+        <p:txBody>
+          <a:bodyPr wrap="square" lIns="0" tIns="0" rIns="0" bIns="0" rtlCol="0" anchor="ctr"/>
+          <a:lstStyle/>
+          <a:p>
+            <a:pPr indent="0" marL="0">
+              <a:buNone/>
+            </a:pPr>
+            <a:r>
+              <a:rPr lang="en-US" sz="2200" b="1" dirty="0">
+                <a:solidFill>
+                  <a:srgbClr val="1B2A4A"/>
+                </a:solidFill>
+                <a:latin typeface="Georgia" pitchFamily="34" charset="0"/>
+                <a:ea typeface="Georgia" pitchFamily="34" charset="-122"/>
+                <a:cs typeface="Georgia" pitchFamily="34" charset="-120"/>
+              </a:rPr>
+              <a:t>Recommended Videos</a:t>
+            </a:r>
+            <a:endParaRPr lang="en-US" sz="2200" dirty="0"/>
+          </a:p>
+        </p:txBody>
+      </p:sp>
+      <p:sp>
+        <p:nvSpPr>
+          <p:cNvPr id="5" name="Text 3"/>
+          <p:cNvSpPr/>
+          <p:nvPr/>
+        </p:nvSpPr>
+        <p:spPr>
+          <a:xfrm>
+            <a:off x="640080" y="868680"/>
+            <a:ext cx="7863840" cy="274320"/>
+          </a:xfrm>
+          <a:prstGeom prst="rect">
+            <a:avLst/>
+          </a:prstGeom>
+          <a:noFill/>
+          <a:ln/>
+        </p:spPr>
+        <p:txBody>
+          <a:bodyPr wrap="square" rtlCol="0" anchor="ctr"/>
+          <a:lstStyle/>
+          <a:p>
+            <a:pPr indent="0" marL="0">
+              <a:buNone/>
+            </a:pPr>
+            <a:r>
+              <a:rPr lang="en-US" sz="1200" i="1" dirty="0">
+                <a:solidFill>
+                  <a:srgbClr val="6B6660"/>
+                </a:solidFill>
+                <a:latin typeface="Calibri" pitchFamily="34" charset="0"/>
+                <a:ea typeface="Calibri" pitchFamily="34" charset="-122"/>
+                <a:cs typeface="Calibri" pitchFamily="34" charset="-120"/>
+              </a:rPr>
+              <a:t>Search these on YouTube to learn more.</a:t>
+            </a:r>
+            <a:endParaRPr lang="en-US" sz="1200" dirty="0"/>
+          </a:p>
+        </p:txBody>
+      </p:sp>
+      <p:sp>
+        <p:nvSpPr>
+          <p:cNvPr id="6" name="Shape 4"/>
+          <p:cNvSpPr/>
+          <p:nvPr/>
+        </p:nvSpPr>
+        <p:spPr>
+          <a:xfrm>
+            <a:off x="457200" y="1234440"/>
+            <a:ext cx="8229600" cy="1051560"/>
+          </a:xfrm>
+          <a:prstGeom prst="rect">
+            <a:avLst/>
+          </a:prstGeom>
+          <a:solidFill>
+            <a:srgbClr val="FFFFFF"/>
+          </a:solidFill>
+          <a:ln/>
+          <a:effectLst>
+            <a:outerShdw sx="100000" sy="100000" kx="0" ky="0" algn="bl" rotWithShape="0" blurRad="76200" dist="25400" dir="8100000">
+              <a:srgbClr val="000000">
+                <a:alpha val="12000"/>
+              </a:srgbClr>
+            </a:outerShdw>
+          </a:effectLst>
+        </p:spPr>
+      </p:sp>
+      <p:sp>
+        <p:nvSpPr>
+          <p:cNvPr id="7" name="Shape 5"/>
+          <p:cNvSpPr/>
+          <p:nvPr/>
+        </p:nvSpPr>
+        <p:spPr>
+          <a:xfrm>
+            <a:off x="457200" y="1234440"/>
+            <a:ext cx="64008" cy="1051560"/>
+          </a:xfrm>
+          <a:prstGeom prst="rect">
+            <a:avLst/>
+          </a:prstGeom>
+          <a:solidFill>
+            <a:srgbClr val="2A9D8F"/>
+          </a:solidFill>
+          <a:ln/>
+        </p:spPr>
+      </p:sp>
+      <p:sp>
+        <p:nvSpPr>
+          <p:cNvPr id="8" name="Text 6"/>
+          <p:cNvSpPr/>
+          <p:nvPr/>
+        </p:nvSpPr>
+        <p:spPr>
+          <a:xfrm>
+            <a:off x="640080" y="1325880"/>
+            <a:ext cx="457200" cy="457200"/>
+          </a:xfrm>
+          <a:prstGeom prst="rect">
+            <a:avLst/>
+          </a:prstGeom>
+          <a:noFill/>
+          <a:ln/>
+        </p:spPr>
+        <p:txBody>
+          <a:bodyPr wrap="square" rtlCol="0" anchor="ctr"/>
+          <a:lstStyle/>
+          <a:p>
+            <a:pPr algn="ctr" indent="0" marL="0">
+              <a:buNone/>
+            </a:pPr>
+            <a:r>
+              <a:rPr lang="en-US" sz="2000" dirty="0">
+                <a:solidFill>
+                  <a:srgbClr val="2A9D8F"/>
+                </a:solidFill>
+                <a:latin typeface="Calibri" pitchFamily="34" charset="0"/>
+                <a:ea typeface="Calibri" pitchFamily="34" charset="-122"/>
+                <a:cs typeface="Calibri" pitchFamily="34" charset="-120"/>
+              </a:rPr>
+              <a:t>▶</a:t>
+            </a:r>
+            <a:endParaRPr lang="en-US" sz="2000" dirty="0"/>
+          </a:p>
+        </p:txBody>
+      </p:sp>
+      <p:sp>
+        <p:nvSpPr>
+          <p:cNvPr id="9" name="Text 7"/>
+          <p:cNvSpPr/>
+          <p:nvPr/>
+        </p:nvSpPr>
+        <p:spPr>
+          <a:xfrm>
+            <a:off x="1188720" y="1307592"/>
+            <a:ext cx="7132320" cy="411480"/>
+          </a:xfrm>
+          <a:prstGeom prst="rect">
+            <a:avLst/>
+          </a:prstGeom>
+          <a:noFill/>
+          <a:ln/>
+        </p:spPr>
+        <p:txBody>
+          <a:bodyPr wrap="square" rtlCol="0" anchor="ctr"/>
+          <a:lstStyle/>
+          <a:p>
+            <a:pPr indent="0" marL="0">
+              <a:buNone/>
+            </a:pPr>
+            <a:r>
+              <a:rPr lang="en-US" sz="1400" b="1" dirty="0">
+                <a:solidFill>
+                  <a:srgbClr val="1B2A4A"/>
+                </a:solidFill>
+                <a:latin typeface="Calibri" pitchFamily="34" charset="0"/>
+                <a:ea typeface="Calibri" pitchFamily="34" charset="-122"/>
+                <a:cs typeface="Calibri" pitchFamily="34" charset="-120"/>
+              </a:rPr>
+              <a:t>Substitution into Expressions</a:t>
+            </a:r>
+            <a:endParaRPr lang="en-US" sz="1400" dirty="0"/>
+          </a:p>
+        </p:txBody>
+      </p:sp>
+      <p:sp>
+        <p:nvSpPr>
+          <p:cNvPr id="10" name="Text 8"/>
+          <p:cNvSpPr/>
+          <p:nvPr/>
+        </p:nvSpPr>
+        <p:spPr>
+          <a:xfrm>
+            <a:off x="1188720" y="1691640"/>
+            <a:ext cx="7132320" cy="320040"/>
+          </a:xfrm>
+          <a:prstGeom prst="rect">
+            <a:avLst/>
+          </a:prstGeom>
+          <a:noFill/>
+          <a:ln/>
+        </p:spPr>
+        <p:txBody>
+          <a:bodyPr wrap="square" rtlCol="0" anchor="ctr"/>
+          <a:lstStyle/>
+          <a:p>
+            <a:pPr indent="0" marL="0">
+              <a:buNone/>
+            </a:pPr>
+            <a:r>
+              <a:rPr lang="en-US" sz="1100" dirty="0">
+                <a:solidFill>
+                  <a:srgbClr val="6B6660"/>
+                </a:solidFill>
+                <a:latin typeface="Calibri" pitchFamily="34" charset="0"/>
+                <a:ea typeface="Calibri" pitchFamily="34" charset="-122"/>
+                <a:cs typeface="Calibri" pitchFamily="34" charset="-120"/>
+              </a:rPr>
+              <a:t>Corbettmaths  •  5 min</a:t>
+            </a:r>
+            <a:endParaRPr lang="en-US" sz="1100" dirty="0"/>
+          </a:p>
+        </p:txBody>
+      </p:sp>
+      <p:sp>
+        <p:nvSpPr>
+          <p:cNvPr id="11" name="Shape 9"/>
+          <p:cNvSpPr/>
+          <p:nvPr/>
+        </p:nvSpPr>
+        <p:spPr>
+          <a:xfrm>
+            <a:off x="457200" y="2423160"/>
+            <a:ext cx="8229600" cy="1051560"/>
+          </a:xfrm>
+          <a:prstGeom prst="rect">
+            <a:avLst/>
+          </a:prstGeom>
+          <a:solidFill>
+            <a:srgbClr val="FFFFFF"/>
+          </a:solidFill>
+          <a:ln/>
+          <a:effectLst>
+            <a:outerShdw sx="100000" sy="100000" kx="0" ky="0" algn="bl" rotWithShape="0" blurRad="76200" dist="25400" dir="8100000">
+              <a:srgbClr val="000000">
+                <a:alpha val="12000"/>
+              </a:srgbClr>
+            </a:outerShdw>
+          </a:effectLst>
+        </p:spPr>
+      </p:sp>
+      <p:sp>
+        <p:nvSpPr>
+          <p:cNvPr id="12" name="Shape 10"/>
+          <p:cNvSpPr/>
+          <p:nvPr/>
+        </p:nvSpPr>
+        <p:spPr>
+          <a:xfrm>
+            <a:off x="457200" y="2423160"/>
+            <a:ext cx="64008" cy="1051560"/>
+          </a:xfrm>
+          <a:prstGeom prst="rect">
+            <a:avLst/>
+          </a:prstGeom>
+          <a:solidFill>
+            <a:srgbClr val="2A9D8F"/>
+          </a:solidFill>
+          <a:ln/>
+        </p:spPr>
+      </p:sp>
+      <p:sp>
+        <p:nvSpPr>
+          <p:cNvPr id="13" name="Text 11"/>
+          <p:cNvSpPr/>
+          <p:nvPr/>
+        </p:nvSpPr>
+        <p:spPr>
+          <a:xfrm>
+            <a:off x="640080" y="2514600"/>
+            <a:ext cx="457200" cy="457200"/>
+          </a:xfrm>
+          <a:prstGeom prst="rect">
+            <a:avLst/>
+          </a:prstGeom>
+          <a:noFill/>
+          <a:ln/>
+        </p:spPr>
+        <p:txBody>
+          <a:bodyPr wrap="square" rtlCol="0" anchor="ctr"/>
+          <a:lstStyle/>
+          <a:p>
+            <a:pPr algn="ctr" indent="0" marL="0">
+              <a:buNone/>
+            </a:pPr>
+            <a:r>
+              <a:rPr lang="en-US" sz="2000" dirty="0">
+                <a:solidFill>
+                  <a:srgbClr val="2A9D8F"/>
+                </a:solidFill>
+                <a:latin typeface="Calibri" pitchFamily="34" charset="0"/>
+                <a:ea typeface="Calibri" pitchFamily="34" charset="-122"/>
+                <a:cs typeface="Calibri" pitchFamily="34" charset="-120"/>
+              </a:rPr>
+              <a:t>▶</a:t>
+            </a:r>
+            <a:endParaRPr lang="en-US" sz="2000" dirty="0"/>
+          </a:p>
+        </p:txBody>
+      </p:sp>
+      <p:sp>
+        <p:nvSpPr>
+          <p:cNvPr id="14" name="Text 12"/>
+          <p:cNvSpPr/>
+          <p:nvPr/>
+        </p:nvSpPr>
+        <p:spPr>
+          <a:xfrm>
+            <a:off x="1188720" y="2496312"/>
+            <a:ext cx="7132320" cy="411480"/>
+          </a:xfrm>
+          <a:prstGeom prst="rect">
+            <a:avLst/>
+          </a:prstGeom>
+          <a:noFill/>
+          <a:ln/>
+        </p:spPr>
+        <p:txBody>
+          <a:bodyPr wrap="square" rtlCol="0" anchor="ctr"/>
+          <a:lstStyle/>
+          <a:p>
+            <a:pPr indent="0" marL="0">
+              <a:buNone/>
+            </a:pPr>
+            <a:r>
+              <a:rPr lang="en-US" sz="1400" b="1" dirty="0">
+                <a:solidFill>
+                  <a:srgbClr val="1B2A4A"/>
+                </a:solidFill>
+                <a:latin typeface="Calibri" pitchFamily="34" charset="0"/>
+                <a:ea typeface="Calibri" pitchFamily="34" charset="-122"/>
+                <a:cs typeface="Calibri" pitchFamily="34" charset="-120"/>
+              </a:rPr>
+              <a:t>Substitution — The Basics</a:t>
+            </a:r>
+            <a:endParaRPr lang="en-US" sz="1400" dirty="0"/>
+          </a:p>
+        </p:txBody>
+      </p:sp>
+      <p:sp>
+        <p:nvSpPr>
+          <p:cNvPr id="15" name="Text 13"/>
+          <p:cNvSpPr/>
+          <p:nvPr/>
+        </p:nvSpPr>
+        <p:spPr>
+          <a:xfrm>
+            <a:off x="1188720" y="2880360"/>
+            <a:ext cx="7132320" cy="320040"/>
+          </a:xfrm>
+          <a:prstGeom prst="rect">
+            <a:avLst/>
+          </a:prstGeom>
+          <a:noFill/>
+          <a:ln/>
+        </p:spPr>
+        <p:txBody>
+          <a:bodyPr wrap="square" rtlCol="0" anchor="ctr"/>
+          <a:lstStyle/>
+          <a:p>
+            <a:pPr indent="0" marL="0">
+              <a:buNone/>
+            </a:pPr>
+            <a:r>
+              <a:rPr lang="en-US" sz="1100" dirty="0">
+                <a:solidFill>
+                  <a:srgbClr val="6B6660"/>
+                </a:solidFill>
+                <a:latin typeface="Calibri" pitchFamily="34" charset="0"/>
+                <a:ea typeface="Calibri" pitchFamily="34" charset="-122"/>
+                <a:cs typeface="Calibri" pitchFamily="34" charset="-120"/>
+              </a:rPr>
+              <a:t>Cognito  •  4 min</a:t>
+            </a:r>
+            <a:endParaRPr lang="en-US" sz="1100" dirty="0"/>
+          </a:p>
+        </p:txBody>
+      </p:sp>
+      <p:sp>
+        <p:nvSpPr>
+          <p:cNvPr id="16" name="Shape 14"/>
+          <p:cNvSpPr/>
+          <p:nvPr/>
+        </p:nvSpPr>
+        <p:spPr>
+          <a:xfrm>
+            <a:off x="457200" y="3611880"/>
+            <a:ext cx="8229600" cy="1051560"/>
+          </a:xfrm>
+          <a:prstGeom prst="rect">
+            <a:avLst/>
+          </a:prstGeom>
+          <a:solidFill>
+            <a:srgbClr val="FFFFFF"/>
+          </a:solidFill>
+          <a:ln/>
+          <a:effectLst>
+            <a:outerShdw sx="100000" sy="100000" kx="0" ky="0" algn="bl" rotWithShape="0" blurRad="76200" dist="25400" dir="8100000">
+              <a:srgbClr val="000000">
+                <a:alpha val="12000"/>
+              </a:srgbClr>
+            </a:outerShdw>
+          </a:effectLst>
+        </p:spPr>
+      </p:sp>
+      <p:sp>
+        <p:nvSpPr>
+          <p:cNvPr id="17" name="Shape 15"/>
+          <p:cNvSpPr/>
+          <p:nvPr/>
+        </p:nvSpPr>
+        <p:spPr>
+          <a:xfrm>
+            <a:off x="457200" y="3611880"/>
+            <a:ext cx="64008" cy="1051560"/>
+          </a:xfrm>
+          <a:prstGeom prst="rect">
+            <a:avLst/>
+          </a:prstGeom>
+          <a:solidFill>
+            <a:srgbClr val="2A9D8F"/>
+          </a:solidFill>
+          <a:ln/>
+        </p:spPr>
+      </p:sp>
+      <p:sp>
+        <p:nvSpPr>
+          <p:cNvPr id="18" name="Text 16"/>
+          <p:cNvSpPr/>
+          <p:nvPr/>
+        </p:nvSpPr>
+        <p:spPr>
+          <a:xfrm>
+            <a:off x="640080" y="3703320"/>
+            <a:ext cx="457200" cy="457200"/>
+          </a:xfrm>
+          <a:prstGeom prst="rect">
+            <a:avLst/>
+          </a:prstGeom>
+          <a:noFill/>
+          <a:ln/>
+        </p:spPr>
+        <p:txBody>
+          <a:bodyPr wrap="square" rtlCol="0" anchor="ctr"/>
+          <a:lstStyle/>
+          <a:p>
+            <a:pPr algn="ctr" indent="0" marL="0">
+              <a:buNone/>
+            </a:pPr>
+            <a:r>
+              <a:rPr lang="en-US" sz="2000" dirty="0">
+                <a:solidFill>
+                  <a:srgbClr val="2A9D8F"/>
+                </a:solidFill>
+                <a:latin typeface="Calibri" pitchFamily="34" charset="0"/>
+                <a:ea typeface="Calibri" pitchFamily="34" charset="-122"/>
+                <a:cs typeface="Calibri" pitchFamily="34" charset="-120"/>
+              </a:rPr>
+              <a:t>▶</a:t>
+            </a:r>
+            <a:endParaRPr lang="en-US" sz="2000" dirty="0"/>
+          </a:p>
+        </p:txBody>
+      </p:sp>
+      <p:sp>
+        <p:nvSpPr>
+          <p:cNvPr id="19" name="Text 17"/>
+          <p:cNvSpPr/>
+          <p:nvPr/>
+        </p:nvSpPr>
+        <p:spPr>
+          <a:xfrm>
+            <a:off x="1188720" y="3685032"/>
+            <a:ext cx="7132320" cy="411480"/>
+          </a:xfrm>
+          <a:prstGeom prst="rect">
+            <a:avLst/>
+          </a:prstGeom>
+          <a:noFill/>
+          <a:ln/>
+        </p:spPr>
+        <p:txBody>
+          <a:bodyPr wrap="square" rtlCol="0" anchor="ctr"/>
+          <a:lstStyle/>
+          <a:p>
+            <a:pPr indent="0" marL="0">
+              <a:buNone/>
+            </a:pPr>
+            <a:r>
+              <a:rPr lang="en-US" sz="1400" b="1" dirty="0">
+                <a:solidFill>
+                  <a:srgbClr val="1B2A4A"/>
+                </a:solidFill>
+                <a:latin typeface="Calibri" pitchFamily="34" charset="0"/>
+                <a:ea typeface="Calibri" pitchFamily="34" charset="-122"/>
+                <a:cs typeface="Calibri" pitchFamily="34" charset="-120"/>
+              </a:rPr>
+              <a:t>Evaluating Expressions</a:t>
+            </a:r>
+            <a:endParaRPr lang="en-US" sz="1400" dirty="0"/>
+          </a:p>
+        </p:txBody>
+      </p:sp>
+      <p:sp>
+        <p:nvSpPr>
+          <p:cNvPr id="20" name="Text 18"/>
+          <p:cNvSpPr/>
+          <p:nvPr/>
+        </p:nvSpPr>
+        <p:spPr>
+          <a:xfrm>
+            <a:off x="1188720" y="4069080"/>
+            <a:ext cx="7132320" cy="320040"/>
+          </a:xfrm>
+          <a:prstGeom prst="rect">
+            <a:avLst/>
+          </a:prstGeom>
+          <a:noFill/>
+          <a:ln/>
+        </p:spPr>
+        <p:txBody>
+          <a:bodyPr wrap="square" rtlCol="0" anchor="ctr"/>
+          <a:lstStyle/>
+          <a:p>
+            <a:pPr indent="0" marL="0">
+              <a:buNone/>
+            </a:pPr>
+            <a:r>
+              <a:rPr lang="en-US" sz="1100" dirty="0">
+                <a:solidFill>
+                  <a:srgbClr val="6B6660"/>
+                </a:solidFill>
+                <a:latin typeface="Calibri" pitchFamily="34" charset="0"/>
+                <a:ea typeface="Calibri" pitchFamily="34" charset="-122"/>
+                <a:cs typeface="Calibri" pitchFamily="34" charset="-120"/>
+              </a:rPr>
+              <a:t>Math Antics  •  7 min</a:t>
+            </a:r>
+            <a:endParaRPr lang="en-US" sz="1100" dirty="0"/>
+          </a:p>
+        </p:txBody>
+      </p:sp>
+    </p:spTree>
+  </p:cSld>
+  <p:clrMapOvr>
+    <a:masterClrMapping/>
+  </p:clrMapOvr>
+</p:sld>
+</file>
+
+<file path=ppt/slides/slide8.xml><?xml version="1.0" encoding="utf-8"?>
+<p:sld xmlns:a="http://schemas.openxmlformats.org/drawingml/2006/main" xmlns:r="http://schemas.openxmlformats.org/officeDocument/2006/relationships" xmlns:p="http://schemas.openxmlformats.org/presentationml/2006/main">
+  <p:cSld name="Slide 8">
+    <p:spTree>
+      <p:nvGrpSpPr>
+        <p:cNvPr id="1" name=""/>
+        <p:cNvGrpSpPr/>
+        <p:nvPr/>
+      </p:nvGrpSpPr>
+      <p:grpSpPr>
+        <a:xfrm>
+          <a:off x="0" y="0"/>
+          <a:ext cx="0" cy="0"/>
+          <a:chOff x="0" y="0"/>
+          <a:chExt cx="0" cy="0"/>
+        </a:xfrm>
+      </p:grpSpPr>
+      <p:sp>
+        <p:nvSpPr>
+          <p:cNvPr id="2" name="Shape 0"/>
+          <p:cNvSpPr/>
+          <p:nvPr/>
+        </p:nvSpPr>
+        <p:spPr>
+          <a:xfrm>
+            <a:off x="0" y="0"/>
+            <a:ext cx="9144000" cy="5143500"/>
+          </a:xfrm>
+          <a:prstGeom prst="rect">
+            <a:avLst/>
+          </a:prstGeom>
+          <a:solidFill>
+            <a:srgbClr val="1B2A4A"/>
+          </a:solidFill>
+          <a:ln/>
+        </p:spPr>
+      </p:sp>
+      <p:sp>
+        <p:nvSpPr>
+          <p:cNvPr id="3" name="Shape 1"/>
+          <p:cNvSpPr/>
+          <p:nvPr/>
+        </p:nvSpPr>
+        <p:spPr>
+          <a:xfrm>
+            <a:off x="0" y="4777740"/>
+            <a:ext cx="9144000" cy="365760"/>
+          </a:xfrm>
+          <a:prstGeom prst="rect">
+            <a:avLst/>
+          </a:prstGeom>
+          <a:solidFill>
+            <a:srgbClr val="2A9D8F"/>
+          </a:solidFill>
+          <a:ln/>
+        </p:spPr>
+      </p:sp>
+      <p:sp>
+        <p:nvSpPr>
+          <p:cNvPr id="4" name="Text 2"/>
+          <p:cNvSpPr/>
+          <p:nvPr/>
+        </p:nvSpPr>
+        <p:spPr>
+          <a:xfrm>
+            <a:off x="731520" y="1371600"/>
+            <a:ext cx="7680960" cy="914400"/>
+          </a:xfrm>
+          <a:prstGeom prst="rect">
+            <a:avLst/>
+          </a:prstGeom>
+          <a:noFill/>
+          <a:ln/>
+        </p:spPr>
+        <p:txBody>
+          <a:bodyPr wrap="square" rtlCol="0" anchor="ctr"/>
+          <a:lstStyle/>
+          <a:p>
+            <a:pPr algn="ctr" indent="0" marL="0">
+              <a:buNone/>
+            </a:pPr>
+            <a:r>
+              <a:rPr lang="en-US" sz="3600" b="1" dirty="0">
+                <a:solidFill>
+                  <a:srgbClr val="FFFFFF"/>
+                </a:solidFill>
+                <a:latin typeface="Georgia" pitchFamily="34" charset="0"/>
+                <a:ea typeface="Georgia" pitchFamily="34" charset="-122"/>
+                <a:cs typeface="Georgia" pitchFamily="34" charset="-120"/>
+              </a:rPr>
+              <a:t>Review &amp; Practise</a:t>
+            </a:r>
+            <a:endParaRPr lang="en-US" sz="3600" dirty="0"/>
+          </a:p>
+        </p:txBody>
+      </p:sp>
+      <p:sp>
+        <p:nvSpPr>
+          <p:cNvPr id="5" name="Text 3"/>
+          <p:cNvSpPr/>
+          <p:nvPr/>
+        </p:nvSpPr>
+        <p:spPr>
+          <a:xfrm>
+            <a:off x="731520" y="2560320"/>
+            <a:ext cx="7680960" cy="548640"/>
+          </a:xfrm>
+          <a:prstGeom prst="rect">
+            <a:avLst/>
+          </a:prstGeom>
+          <a:noFill/>
+          <a:ln/>
+        </p:spPr>
+        <p:txBody>
+          <a:bodyPr wrap="square" rtlCol="0" anchor="ctr"/>
+          <a:lstStyle/>
+          <a:p>
+            <a:pPr algn="ctr" indent="0" marL="0">
+              <a:buNone/>
+            </a:pPr>
+            <a:r>
+              <a:rPr lang="en-US" sz="2000" dirty="0">
+                <a:solidFill>
+                  <a:srgbClr val="2A9D8F"/>
+                </a:solidFill>
+                <a:latin typeface="Calibri" pitchFamily="34" charset="0"/>
+                <a:ea typeface="Calibri" pitchFamily="34" charset="-122"/>
+                <a:cs typeface="Calibri" pitchFamily="34" charset="-120"/>
+              </a:rPr>
               <a:t>mrzocchi.com</a:t>
             </a:r>
-            <a:endParaRPr lang="en-US" sz="1100" dirty="0"/>
+            <a:endParaRPr lang="en-US" sz="2000" dirty="0"/>
           </a:p>
         </p:txBody>
       </p:sp>

--- a/static/ppts/G6_Math_T4_Substitution.pptx
+++ b/static/ppts/G6_Math_T4_Substitution.pptx
@@ -12,13 +12,12 @@
     <p:sldId id="260" r:id="rId6"/>
     <p:sldId id="261" r:id="rId7"/>
     <p:sldId id="262" r:id="rId8"/>
-    <p:sldId id="263" r:id="rId9"/>
   </p:sldIdLst>
   <p:notesMasterIdLst>
-    <p:notesMasterId r:id="rId10"/>
+    <p:notesMasterId r:id="rId9"/>
   </p:notesMasterIdLst>
-  <p:sldSz cx="9144000" cy="5143500"/>
-  <p:notesSz cx="5143500" cy="9144000"/>
+  <p:sldSz cx="12192000" cy="6858000"/>
+  <p:notesSz cx="6858000" cy="12192000"/>
   <p:defaultTextStyle>
     <a:lvl1pPr marL="0" algn="l" defTabSz="914400" rtl="0" eaLnBrk="1" latinLnBrk="0" hangingPunct="1">
       <a:defRPr sz="1800" kern="1200">
@@ -1061,94 +1060,6 @@
             <a:fld id="{F7021451-1387-4CA6-816F-3879F97B5CBC}" type="slidenum">
               <a:rPr lang="en-US"/>
               <a:t>7</a:t>
-            </a:fld>
-            <a:endParaRPr lang="en-US"/>
-          </a:p>
-        </p:txBody>
-      </p:sp>
-    </p:spTree>
-    <p:extLst>
-      <p:ext uri="{BB962C8B-B14F-4D97-AF65-F5344CB8AC3E}">
-        <p14:creationId xmlns:p14="http://schemas.microsoft.com/office/powerpoint/2010/main" val="1024086991"/>
-      </p:ext>
-    </p:extLst>
-  </p:cSld>
-  <p:clrMapOvr>
-    <a:masterClrMapping/>
-  </p:clrMapOvr>
-</p:notes>
-</file>
-
-<file path=ppt/notesSlides/notesSlide8.xml><?xml version="1.0" encoding="utf-8"?>
-<p:notes xmlns:a="http://schemas.openxmlformats.org/drawingml/2006/main" xmlns:r="http://schemas.openxmlformats.org/officeDocument/2006/relationships" xmlns:p="http://schemas.openxmlformats.org/presentationml/2006/main">
-  <p:cSld>
-    <p:spTree>
-      <p:nvGrpSpPr>
-        <p:cNvPr id="1" name=""/>
-        <p:cNvGrpSpPr/>
-        <p:nvPr/>
-      </p:nvGrpSpPr>
-      <p:grpSpPr>
-        <a:xfrm>
-          <a:off x="0" y="0"/>
-          <a:ext cx="0" cy="0"/>
-          <a:chOff x="0" y="0"/>
-          <a:chExt cx="0" cy="0"/>
-        </a:xfrm>
-      </p:grpSpPr>
-      <p:sp>
-        <p:nvSpPr>
-          <p:cNvPr id="2" name="Slide Image Placeholder 1"/>
-          <p:cNvSpPr>
-            <a:spLocks noGrp="1" noRot="1" noChangeAspect="1"/>
-          </p:cNvSpPr>
-          <p:nvPr>
-            <p:ph type="sldImg"/>
-          </p:nvPr>
-        </p:nvSpPr>
-        <p:spPr/>
-      </p:sp>
-      <p:sp>
-        <p:nvSpPr>
-          <p:cNvPr id="3" name="Notes Placeholder 2"/>
-          <p:cNvSpPr>
-            <a:spLocks noGrp="1"/>
-          </p:cNvSpPr>
-          <p:nvPr>
-            <p:ph type="body" idx="1"/>
-          </p:nvPr>
-        </p:nvSpPr>
-        <p:spPr/>
-        <p:txBody>
-          <a:bodyPr/>
-          <a:lstStyle/>
-          <a:p>
-            <a:r>
-              <a:rPr lang="en-US" dirty="0"/>
-              <a:t/>
-            </a:r>
-            <a:endParaRPr lang="en-US" dirty="0"/>
-          </a:p>
-        </p:txBody>
-      </p:sp>
-      <p:sp>
-        <p:nvSpPr>
-          <p:cNvPr id="4" name="Slide Number Placeholder 3"/>
-          <p:cNvSpPr>
-            <a:spLocks noGrp="1"/>
-          </p:cNvSpPr>
-          <p:nvPr>
-            <p:ph type="sldNum" sz="quarter" idx="10"/>
-          </p:nvPr>
-        </p:nvSpPr>
-        <p:spPr/>
-        <p:txBody>
-          <a:bodyPr/>
-          <a:lstStyle/>
-          <a:p>
-            <a:fld id="{F7021451-1387-4CA6-816F-3879F97B5CBC}" type="slidenum">
-              <a:rPr lang="en-US"/>
-              <a:t>8</a:t>
             </a:fld>
             <a:endParaRPr lang="en-US"/>
           </a:p>
@@ -1477,6 +1388,13 @@
 <file path=ppt/slides/slide1.xml><?xml version="1.0" encoding="utf-8"?>
 <p:sld xmlns:a="http://schemas.openxmlformats.org/drawingml/2006/main" xmlns:r="http://schemas.openxmlformats.org/officeDocument/2006/relationships" xmlns:p="http://schemas.openxmlformats.org/presentationml/2006/main">
   <p:cSld name="Slide 1">
+    <p:bg>
+      <p:bgPr>
+        <a:solidFill>
+          <a:srgbClr val="2A9D8F"/>
+        </a:solidFill>
+      </p:bgPr>
+    </p:bg>
     <p:spTree>
       <p:nvGrpSpPr>
         <p:cNvPr id="1" name=""/>
@@ -1499,48 +1417,30 @@
         </p:nvSpPr>
         <p:spPr>
           <a:xfrm>
-            <a:off x="0" y="0"/>
-            <a:ext cx="9144000" cy="5143500"/>
-          </a:xfrm>
-          <a:prstGeom prst="rect">
+            <a:off x="7772400" y="-914400"/>
+            <a:ext cx="3657600" cy="3657600"/>
+          </a:xfrm>
+          <a:prstGeom prst="ellipse">
             <a:avLst/>
           </a:prstGeom>
           <a:solidFill>
-            <a:srgbClr val="1B2A4A"/>
+            <a:srgbClr val="FFFFFF">
+              <a:alpha val="8000"/>
+            </a:srgbClr>
           </a:solidFill>
           <a:ln/>
         </p:spPr>
       </p:sp>
       <p:sp>
         <p:nvSpPr>
-          <p:cNvPr id="3" name="Shape 1"/>
-          <p:cNvSpPr/>
-          <p:nvPr/>
-        </p:nvSpPr>
-        <p:spPr>
-          <a:xfrm>
-            <a:off x="0" y="4777740"/>
-            <a:ext cx="9144000" cy="365760"/>
-          </a:xfrm>
-          <a:prstGeom prst="rect">
-            <a:avLst/>
-          </a:prstGeom>
-          <a:solidFill>
-            <a:srgbClr val="2A9D8F"/>
-          </a:solidFill>
-          <a:ln/>
-        </p:spPr>
-      </p:sp>
-      <p:sp>
-        <p:nvSpPr>
-          <p:cNvPr id="4" name="Text 2"/>
-          <p:cNvSpPr/>
-          <p:nvPr/>
-        </p:nvSpPr>
-        <p:spPr>
-          <a:xfrm>
-            <a:off x="731520" y="1097280"/>
-            <a:ext cx="7680960" cy="457200"/>
+          <p:cNvPr id="3" name="Text 1"/>
+          <p:cNvSpPr/>
+          <p:nvPr/>
+        </p:nvSpPr>
+        <p:spPr>
+          <a:xfrm>
+            <a:off x="731520" y="548640"/>
+            <a:ext cx="7315200" cy="365760"/>
           </a:xfrm>
           <a:prstGeom prst="rect">
             <a:avLst/>
@@ -1556,46 +1456,49 @@
               <a:buNone/>
             </a:pPr>
             <a:r>
-              <a:rPr lang="en-US" sz="1400" b="1" spc="400" kern="0" dirty="0">
-                <a:solidFill>
-                  <a:srgbClr val="2A9D8F"/>
-                </a:solidFill>
-                <a:latin typeface="Calibri" pitchFamily="34" charset="0"/>
-                <a:ea typeface="Calibri" pitchFamily="34" charset="-122"/>
-                <a:cs typeface="Calibri" pitchFamily="34" charset="-120"/>
+              <a:rPr lang="en-US" sz="1100" b="1" dirty="0">
+                <a:solidFill>
+                  <a:srgbClr val="F2D68A"/>
+                </a:solidFill>
+                <a:latin typeface="Arial" pitchFamily="34" charset="0"/>
+                <a:ea typeface="Arial" pitchFamily="34" charset="-122"/>
+                <a:cs typeface="Arial" pitchFamily="34" charset="-120"/>
               </a:rPr>
               <a:t>GRADE 6 MATHEMATICS</a:t>
             </a:r>
-            <a:endParaRPr lang="en-US" sz="1400" dirty="0"/>
-          </a:p>
-        </p:txBody>
-      </p:sp>
-      <p:sp>
-        <p:nvSpPr>
-          <p:cNvPr id="5" name="Text 3"/>
-          <p:cNvSpPr/>
-          <p:nvPr/>
-        </p:nvSpPr>
-        <p:spPr>
-          <a:xfrm>
-            <a:off x="731520" y="1645920"/>
-            <a:ext cx="7680960" cy="1463040"/>
-          </a:xfrm>
-          <a:prstGeom prst="rect">
-            <a:avLst/>
-          </a:prstGeom>
-          <a:noFill/>
-          <a:ln/>
-        </p:spPr>
-        <p:txBody>
-          <a:bodyPr wrap="square" rtlCol="0" anchor="t"/>
+            <a:endParaRPr lang="en-US" sz="1100" dirty="0"/>
+          </a:p>
+        </p:txBody>
+      </p:sp>
+      <p:sp>
+        <p:nvSpPr>
+          <p:cNvPr id="4" name="Text 2"/>
+          <p:cNvSpPr/>
+          <p:nvPr/>
+        </p:nvSpPr>
+        <p:spPr>
+          <a:xfrm>
+            <a:off x="731520" y="1371600"/>
+            <a:ext cx="9144000" cy="1645920"/>
+          </a:xfrm>
+          <a:prstGeom prst="rect">
+            <a:avLst/>
+          </a:prstGeom>
+          <a:noFill/>
+          <a:ln/>
+        </p:spPr>
+        <p:txBody>
+          <a:bodyPr wrap="square" rtlCol="0" anchor="ctr"/>
           <a:lstStyle/>
           <a:p>
             <a:pPr indent="0" marL="0">
+              <a:lnSpc>
+                <a:spcPct val="110000"/>
+              </a:lnSpc>
               <a:buNone/>
             </a:pPr>
             <a:r>
-              <a:rPr lang="en-US" sz="4000" b="1" dirty="0">
+              <a:rPr lang="en-US" sz="3600" b="1" dirty="0">
                 <a:solidFill>
                   <a:srgbClr val="FFFFFF"/>
                 </a:solidFill>
@@ -1605,20 +1508,20 @@
               </a:rPr>
               <a:t>Substitution</a:t>
             </a:r>
-            <a:endParaRPr lang="en-US" sz="4000" dirty="0"/>
-          </a:p>
-        </p:txBody>
-      </p:sp>
-      <p:sp>
-        <p:nvSpPr>
-          <p:cNvPr id="6" name="Text 4"/>
+            <a:endParaRPr lang="en-US" sz="3600" dirty="0"/>
+          </a:p>
+        </p:txBody>
+      </p:sp>
+      <p:sp>
+        <p:nvSpPr>
+          <p:cNvPr id="5" name="Text 3"/>
           <p:cNvSpPr/>
           <p:nvPr/>
         </p:nvSpPr>
         <p:spPr>
           <a:xfrm>
             <a:off x="731520" y="3200400"/>
-            <a:ext cx="7680960" cy="548640"/>
+            <a:ext cx="7315200" cy="548640"/>
           </a:xfrm>
           <a:prstGeom prst="rect">
             <a:avLst/>
@@ -1634,13 +1537,15 @@
               <a:buNone/>
             </a:pPr>
             <a:r>
-              <a:rPr lang="en-US" sz="1600" i="1" dirty="0">
-                <a:solidFill>
-                  <a:srgbClr val="9B9690"/>
-                </a:solidFill>
-                <a:latin typeface="Calibri" pitchFamily="34" charset="0"/>
-                <a:ea typeface="Calibri" pitchFamily="34" charset="-122"/>
-                <a:cs typeface="Calibri" pitchFamily="34" charset="-120"/>
+              <a:rPr lang="en-US" sz="1600" dirty="0">
+                <a:solidFill>
+                  <a:srgbClr val="FFFFFF">
+                    <a:alpha val="65000"/>
+                  </a:srgbClr>
+                </a:solidFill>
+                <a:latin typeface="Arial" pitchFamily="34" charset="0"/>
+                <a:ea typeface="Arial" pitchFamily="34" charset="-122"/>
+                <a:cs typeface="Arial" pitchFamily="34" charset="-120"/>
               </a:rPr>
               <a:t>Replacing letters with numbers</a:t>
             </a:r>
@@ -1650,14 +1555,14 @@
       </p:sp>
       <p:sp>
         <p:nvSpPr>
-          <p:cNvPr id="7" name="Text 5"/>
-          <p:cNvSpPr/>
-          <p:nvPr/>
-        </p:nvSpPr>
-        <p:spPr>
-          <a:xfrm>
-            <a:off x="731520" y="4206240"/>
-            <a:ext cx="3657600" cy="365760"/>
+          <p:cNvPr id="6" name="Text 4"/>
+          <p:cNvSpPr/>
+          <p:nvPr/>
+        </p:nvSpPr>
+        <p:spPr>
+          <a:xfrm>
+            <a:off x="731520" y="4389120"/>
+            <a:ext cx="2743200" cy="320040"/>
           </a:xfrm>
           <a:prstGeom prst="rect">
             <a:avLst/>
@@ -1673,17 +1578,19 @@
               <a:buNone/>
             </a:pPr>
             <a:r>
-              <a:rPr lang="en-US" sz="1200" dirty="0">
-                <a:solidFill>
-                  <a:srgbClr val="6B6660"/>
-                </a:solidFill>
-                <a:latin typeface="Calibri" pitchFamily="34" charset="0"/>
-                <a:ea typeface="Calibri" pitchFamily="34" charset="-122"/>
-                <a:cs typeface="Calibri" pitchFamily="34" charset="-120"/>
-              </a:rPr>
-              <a:t>Mr Zocchi</a:t>
-            </a:r>
-            <a:endParaRPr lang="en-US" sz="1200" dirty="0"/>
+              <a:rPr lang="en-US" sz="1000" dirty="0">
+                <a:solidFill>
+                  <a:srgbClr val="FFFFFF">
+                    <a:alpha val="40000"/>
+                  </a:srgbClr>
+                </a:solidFill>
+                <a:latin typeface="Arial" pitchFamily="34" charset="0"/>
+                <a:ea typeface="Arial" pitchFamily="34" charset="-122"/>
+                <a:cs typeface="Arial" pitchFamily="34" charset="-120"/>
+              </a:rPr>
+              <a:t>mrzocchi.com</a:t>
+            </a:r>
+            <a:endParaRPr lang="en-US" sz="1000" dirty="0"/>
           </a:p>
         </p:txBody>
       </p:sp>
@@ -1698,6 +1605,13 @@
 <file path=ppt/slides/slide2.xml><?xml version="1.0" encoding="utf-8"?>
 <p:sld xmlns:a="http://schemas.openxmlformats.org/drawingml/2006/main" xmlns:r="http://schemas.openxmlformats.org/officeDocument/2006/relationships" xmlns:p="http://schemas.openxmlformats.org/presentationml/2006/main">
   <p:cSld name="Slide 2">
+    <p:bg>
+      <p:bgPr>
+        <a:solidFill>
+          <a:srgbClr val="FAF8F5"/>
+        </a:solidFill>
+      </p:bgPr>
+    </p:bg>
     <p:spTree>
       <p:nvGrpSpPr>
         <p:cNvPr id="1" name=""/>
@@ -1721,13 +1635,13 @@
         <p:spPr>
           <a:xfrm>
             <a:off x="0" y="0"/>
-            <a:ext cx="9144000" cy="5143500"/>
+            <a:ext cx="73152" cy="5148072"/>
           </a:xfrm>
           <a:prstGeom prst="rect">
             <a:avLst/>
           </a:prstGeom>
           <a:solidFill>
-            <a:srgbClr val="111D35"/>
+            <a:srgbClr val="2A9D8F"/>
           </a:solidFill>
           <a:ln/>
         </p:spPr>
@@ -1740,8 +1654,8 @@
         </p:nvSpPr>
         <p:spPr>
           <a:xfrm>
-            <a:off x="6858000" y="182880"/>
-            <a:ext cx="2286000" cy="2743200"/>
+            <a:off x="548640" y="274320"/>
+            <a:ext cx="9144000" cy="640080"/>
           </a:xfrm>
           <a:prstGeom prst="rect">
             <a:avLst/>
@@ -1753,64 +1667,43 @@
           <a:bodyPr wrap="square" rtlCol="0" anchor="ctr"/>
           <a:lstStyle/>
           <a:p>
-            <a:pPr algn="ctr" indent="0" marL="0">
+            <a:pPr indent="0" marL="0">
               <a:buNone/>
             </a:pPr>
             <a:r>
-              <a:rPr lang="en-US" sz="16000" b="1" dirty="0">
-                <a:solidFill>
-                  <a:srgbClr val="2A9D8F">
-                    <a:alpha val="80000"/>
-                  </a:srgbClr>
+              <a:rPr lang="en-US" sz="2400" b="1" dirty="0">
+                <a:solidFill>
+                  <a:srgbClr val="1B2A4A"/>
                 </a:solidFill>
                 <a:latin typeface="Georgia" pitchFamily="34" charset="0"/>
                 <a:ea typeface="Georgia" pitchFamily="34" charset="-122"/>
                 <a:cs typeface="Georgia" pitchFamily="34" charset="-120"/>
               </a:rPr>
-              <a:t>?</a:t>
-            </a:r>
-            <a:endParaRPr lang="en-US" sz="16000" dirty="0"/>
-          </a:p>
-        </p:txBody>
-      </p:sp>
-      <p:sp>
-        <p:nvSpPr>
-          <p:cNvPr id="4" name="Text 2"/>
-          <p:cNvSpPr/>
-          <p:nvPr/>
-        </p:nvSpPr>
-        <p:spPr>
-          <a:xfrm>
-            <a:off x="731520" y="548640"/>
-            <a:ext cx="2743200" cy="365760"/>
-          </a:xfrm>
-          <a:prstGeom prst="rect">
-            <a:avLst/>
-          </a:prstGeom>
-          <a:noFill/>
-          <a:ln/>
-        </p:spPr>
-        <p:txBody>
-          <a:bodyPr wrap="square" rtlCol="0" anchor="ctr"/>
-          <a:lstStyle/>
-          <a:p>
-            <a:pPr indent="0" marL="0">
-              <a:buNone/>
-            </a:pPr>
-            <a:r>
-              <a:rPr lang="en-US" sz="1200" b="1" spc="400" kern="0" dirty="0">
-                <a:solidFill>
-                  <a:srgbClr val="2A9D8F"/>
-                </a:solidFill>
-                <a:latin typeface="Calibri" pitchFamily="34" charset="0"/>
-                <a:ea typeface="Calibri" pitchFamily="34" charset="-122"/>
-                <a:cs typeface="Calibri" pitchFamily="34" charset="-120"/>
-              </a:rPr>
-              <a:t>INQUIRY</a:t>
-            </a:r>
-            <a:endParaRPr lang="en-US" sz="1200" dirty="0"/>
-          </a:p>
-        </p:txBody>
+              <a:t>What Is Substitution?</a:t>
+            </a:r>
+            <a:endParaRPr lang="en-US" sz="2400" dirty="0"/>
+          </a:p>
+        </p:txBody>
+      </p:sp>
+      <p:sp>
+        <p:nvSpPr>
+          <p:cNvPr id="4" name="Shape 2"/>
+          <p:cNvSpPr/>
+          <p:nvPr/>
+        </p:nvSpPr>
+        <p:spPr>
+          <a:xfrm>
+            <a:off x="548640" y="960120"/>
+            <a:ext cx="2286000" cy="36576"/>
+          </a:xfrm>
+          <a:prstGeom prst="rect">
+            <a:avLst/>
+          </a:prstGeom>
+          <a:solidFill>
+            <a:srgbClr val="2A9D8F"/>
+          </a:solidFill>
+          <a:ln/>
+        </p:spPr>
       </p:sp>
       <p:sp>
         <p:nvSpPr>
@@ -1820,8 +1713,8 @@
         </p:nvSpPr>
         <p:spPr>
           <a:xfrm>
-            <a:off x="731520" y="1005840"/>
-            <a:ext cx="6858000" cy="1463040"/>
+            <a:off x="548640" y="1188720"/>
+            <a:ext cx="10058400" cy="3474720"/>
           </a:xfrm>
           <a:prstGeom prst="rect">
             <a:avLst/>
@@ -1833,204 +1726,92 @@
           <a:bodyPr wrap="square" rtlCol="0" anchor="t"/>
           <a:lstStyle/>
           <a:p>
-            <a:pPr indent="0" marL="0">
-              <a:buNone/>
-            </a:pPr>
-            <a:r>
-              <a:rPr lang="en-US" sz="2800" b="1" dirty="0">
-                <a:solidFill>
-                  <a:srgbClr val="FFFFFF"/>
-                </a:solidFill>
-                <a:latin typeface="Georgia" pitchFamily="34" charset="0"/>
-                <a:ea typeface="Georgia" pitchFamily="34" charset="-122"/>
-                <a:cs typeface="Georgia" pitchFamily="34" charset="-120"/>
-              </a:rPr>
-              <a:t>The formula to convert Celsius to Fahrenheit is F = 1.8C + 32. It's 28°C in Nanjing today. What's that in Fahrenheit?</a:t>
-            </a:r>
-            <a:endParaRPr lang="en-US" sz="2800" dirty="0"/>
-          </a:p>
-        </p:txBody>
-      </p:sp>
-      <p:sp>
-        <p:nvSpPr>
-          <p:cNvPr id="6" name="Text 4"/>
-          <p:cNvSpPr/>
-          <p:nvPr/>
-        </p:nvSpPr>
-        <p:spPr>
-          <a:xfrm>
-            <a:off x="731520" y="2560320"/>
-            <a:ext cx="6858000" cy="548640"/>
-          </a:xfrm>
-          <a:prstGeom prst="rect">
-            <a:avLst/>
-          </a:prstGeom>
-          <a:noFill/>
-          <a:ln/>
-        </p:spPr>
-        <p:txBody>
-          <a:bodyPr wrap="square" rtlCol="0" anchor="ctr"/>
-          <a:lstStyle/>
-          <a:p>
-            <a:pPr indent="0" marL="0">
-              <a:buNone/>
-            </a:pPr>
-            <a:r>
-              <a:rPr lang="en-US" sz="1400" i="1" dirty="0">
-                <a:solidFill>
-                  <a:srgbClr val="9B9690"/>
-                </a:solidFill>
-                <a:latin typeface="Calibri" pitchFamily="34" charset="0"/>
-                <a:ea typeface="Calibri" pitchFamily="34" charset="-122"/>
-                <a:cs typeface="Calibri" pitchFamily="34" charset="-120"/>
-              </a:rPr>
-              <a:t>Substitution means replacing a variable with a given number, then calculating.</a:t>
-            </a:r>
-            <a:endParaRPr lang="en-US" sz="1400" dirty="0"/>
-          </a:p>
-        </p:txBody>
-      </p:sp>
-      <p:sp>
-        <p:nvSpPr>
-          <p:cNvPr id="7" name="Shape 5"/>
-          <p:cNvSpPr/>
-          <p:nvPr/>
-        </p:nvSpPr>
-        <p:spPr>
-          <a:xfrm>
-            <a:off x="548640" y="3200400"/>
-            <a:ext cx="7315200" cy="1645920"/>
-          </a:xfrm>
-          <a:prstGeom prst="rect">
-            <a:avLst/>
-          </a:prstGeom>
-          <a:solidFill>
-            <a:srgbClr val="243660"/>
-          </a:solidFill>
-          <a:ln/>
-        </p:spPr>
-      </p:sp>
-      <p:sp>
-        <p:nvSpPr>
-          <p:cNvPr id="8" name="Text 6"/>
-          <p:cNvSpPr/>
-          <p:nvPr/>
-        </p:nvSpPr>
-        <p:spPr>
-          <a:xfrm>
-            <a:off x="731520" y="3246120"/>
-            <a:ext cx="3657600" cy="320040"/>
-          </a:xfrm>
-          <a:prstGeom prst="rect">
-            <a:avLst/>
-          </a:prstGeom>
-          <a:noFill/>
-          <a:ln/>
-        </p:spPr>
-        <p:txBody>
-          <a:bodyPr wrap="square" rtlCol="0" anchor="ctr"/>
-          <a:lstStyle/>
-          <a:p>
-            <a:pPr indent="0" marL="0">
-              <a:buNone/>
-            </a:pPr>
-            <a:r>
-              <a:rPr lang="en-US" sz="1100" b="1" spc="200" kern="0" dirty="0">
-                <a:solidFill>
-                  <a:srgbClr val="2A9D8F"/>
-                </a:solidFill>
-                <a:latin typeface="Calibri" pitchFamily="34" charset="0"/>
-                <a:ea typeface="Calibri" pitchFamily="34" charset="-122"/>
-                <a:cs typeface="Calibri" pitchFamily="34" charset="-120"/>
-              </a:rPr>
-              <a:t>Think — Pair — Share</a:t>
-            </a:r>
-            <a:endParaRPr lang="en-US" sz="1100" dirty="0"/>
-          </a:p>
-        </p:txBody>
-      </p:sp>
-      <p:sp>
-        <p:nvSpPr>
-          <p:cNvPr id="9" name="Text 7"/>
-          <p:cNvSpPr/>
-          <p:nvPr/>
-        </p:nvSpPr>
-        <p:spPr>
-          <a:xfrm>
-            <a:off x="731520" y="3566160"/>
-            <a:ext cx="6949440" cy="1188720"/>
-          </a:xfrm>
-          <a:prstGeom prst="rect">
-            <a:avLst/>
-          </a:prstGeom>
-          <a:noFill/>
-          <a:ln/>
-        </p:spPr>
-        <p:txBody>
-          <a:bodyPr wrap="square" rtlCol="0" anchor="ctr"/>
-          <a:lstStyle/>
-          <a:p>
-            <a:pPr marL="342900" indent="-342900">
+            <a:pPr>
+              <a:lnSpc>
+                <a:spcPct val="150000"/>
+              </a:lnSpc>
               <a:spcAft>
                 <a:spcPts val="600"/>
               </a:spcAft>
-              <a:buSzPct val="100000"/>
-              <a:buChar char="•"/>
-            </a:pPr>
-            <a:r>
-              <a:rPr lang="en-US" sz="1400" dirty="0">
-                <a:solidFill>
-                  <a:srgbClr val="E5E2DC"/>
-                </a:solidFill>
-                <a:latin typeface="Calibri" pitchFamily="34" charset="0"/>
-                <a:ea typeface="Calibri" pitchFamily="34" charset="-122"/>
-                <a:cs typeface="Calibri" pitchFamily="34" charset="-120"/>
-              </a:rPr>
-              <a:t>What would you replace C with?</a:t>
-            </a:r>
-            <a:endParaRPr lang="en-US" sz="1400" dirty="0"/>
-          </a:p>
-          <a:p>
-            <a:pPr marL="342900" indent="-342900">
+            </a:pPr>
+            <a:r>
+              <a:rPr lang="en-US" sz="1500" dirty="0">
+                <a:solidFill>
+                  <a:srgbClr val="3D3A36"/>
+                </a:solidFill>
+                <a:latin typeface="Arial" pitchFamily="34" charset="0"/>
+                <a:ea typeface="Arial" pitchFamily="34" charset="-122"/>
+                <a:cs typeface="Arial" pitchFamily="34" charset="-120"/>
+              </a:rPr>
+              <a:t>Substitution = replacing a variable with a specific number.</a:t>
+            </a:r>
+            <a:endParaRPr lang="en-US" sz="1500" dirty="0"/>
+          </a:p>
+          <a:p>
+            <a:pPr>
+              <a:lnSpc>
+                <a:spcPct val="150000"/>
+              </a:lnSpc>
               <a:spcAft>
                 <a:spcPts val="600"/>
               </a:spcAft>
-              <a:buSzPct val="100000"/>
-              <a:buChar char="•"/>
-            </a:pPr>
-            <a:r>
-              <a:rPr lang="en-US" sz="1400" dirty="0">
-                <a:solidFill>
-                  <a:srgbClr val="E5E2DC"/>
-                </a:solidFill>
-                <a:latin typeface="Calibri" pitchFamily="34" charset="0"/>
-                <a:ea typeface="Calibri" pitchFamily="34" charset="-122"/>
-                <a:cs typeface="Calibri" pitchFamily="34" charset="-120"/>
-              </a:rPr>
-              <a:t>What order do you do the operations?</a:t>
-            </a:r>
-            <a:endParaRPr lang="en-US" sz="1400" dirty="0"/>
-          </a:p>
-          <a:p>
-            <a:pPr marL="342900" indent="-342900">
+            </a:pPr>
+            <a:r>
+              <a:rPr lang="en-US" sz="1500" dirty="0">
+                <a:solidFill>
+                  <a:srgbClr val="3D3A36"/>
+                </a:solidFill>
+                <a:latin typeface="Arial" pitchFamily="34" charset="0"/>
+                <a:ea typeface="Arial" pitchFamily="34" charset="-122"/>
+                <a:cs typeface="Arial" pitchFamily="34" charset="-120"/>
+              </a:rPr>
+              <a:t>If x = 4, then 3x + 2 = 3(4) + 2 = 12 + 2 = 14.</a:t>
+            </a:r>
+            <a:endParaRPr lang="en-US" sz="1500" dirty="0"/>
+          </a:p>
+          <a:p>
+            <a:pPr>
+              <a:lnSpc>
+                <a:spcPct val="150000"/>
+              </a:lnSpc>
               <a:spcAft>
                 <a:spcPts val="600"/>
               </a:spcAft>
-              <a:buSzPct val="100000"/>
-              <a:buChar char="•"/>
-            </a:pPr>
-            <a:r>
-              <a:rPr lang="en-US" sz="1400" dirty="0">
-                <a:solidFill>
-                  <a:srgbClr val="E5E2DC"/>
-                </a:solidFill>
-                <a:latin typeface="Calibri" pitchFamily="34" charset="0"/>
-                <a:ea typeface="Calibri" pitchFamily="34" charset="-122"/>
-                <a:cs typeface="Calibri" pitchFamily="34" charset="-120"/>
-              </a:rPr>
-              <a:t>What if it's −5°C in Nanjing winter?</a:t>
-            </a:r>
-            <a:endParaRPr lang="en-US" sz="1400" dirty="0"/>
+            </a:pPr>
+            <a:r>
+              <a:rPr lang="en-US" sz="1500" dirty="0">
+                <a:solidFill>
+                  <a:srgbClr val="3D3A36"/>
+                </a:solidFill>
+                <a:latin typeface="Arial" pitchFamily="34" charset="0"/>
+                <a:ea typeface="Arial" pitchFamily="34" charset="-122"/>
+                <a:cs typeface="Arial" pitchFamily="34" charset="-120"/>
+              </a:rPr>
+              <a:t>Always use BIDMAS after substituting!</a:t>
+            </a:r>
+            <a:endParaRPr lang="en-US" sz="1500" dirty="0"/>
+          </a:p>
+          <a:p>
+            <a:pPr>
+              <a:lnSpc>
+                <a:spcPct val="150000"/>
+              </a:lnSpc>
+              <a:spcAft>
+                <a:spcPts val="600"/>
+              </a:spcAft>
+            </a:pPr>
+            <a:r>
+              <a:rPr lang="en-US" sz="1500" dirty="0">
+                <a:solidFill>
+                  <a:srgbClr val="3D3A36"/>
+                </a:solidFill>
+                <a:latin typeface="Arial" pitchFamily="34" charset="0"/>
+                <a:ea typeface="Arial" pitchFamily="34" charset="-122"/>
+                <a:cs typeface="Arial" pitchFamily="34" charset="-120"/>
+              </a:rPr>
+              <a:t>Remember: 3x means 3 × x. x² means x × x.</a:t>
+            </a:r>
+            <a:endParaRPr lang="en-US" sz="1500" dirty="0"/>
           </a:p>
         </p:txBody>
       </p:sp>
@@ -2075,27 +1856,7 @@
         <p:spPr>
           <a:xfrm>
             <a:off x="0" y="0"/>
-            <a:ext cx="9144000" cy="822960"/>
-          </a:xfrm>
-          <a:prstGeom prst="rect">
-            <a:avLst/>
-          </a:prstGeom>
-          <a:solidFill>
-            <a:srgbClr val="FFFFFF"/>
-          </a:solidFill>
-          <a:ln/>
-        </p:spPr>
-      </p:sp>
-      <p:sp>
-        <p:nvSpPr>
-          <p:cNvPr id="3" name="Shape 1"/>
-          <p:cNvSpPr/>
-          <p:nvPr/>
-        </p:nvSpPr>
-        <p:spPr>
-          <a:xfrm>
-            <a:off x="0" y="795528"/>
-            <a:ext cx="9144000" cy="27432"/>
+            <a:ext cx="73152" cy="5148072"/>
           </a:xfrm>
           <a:prstGeom prst="rect">
             <a:avLst/>
@@ -2108,30 +1869,91 @@
       </p:sp>
       <p:sp>
         <p:nvSpPr>
+          <p:cNvPr id="3" name="Shape 1"/>
+          <p:cNvSpPr/>
+          <p:nvPr/>
+        </p:nvSpPr>
+        <p:spPr>
+          <a:xfrm>
+            <a:off x="548640" y="274320"/>
+            <a:ext cx="2011680" cy="320040"/>
+          </a:xfrm>
+          <a:prstGeom prst="roundRect">
+            <a:avLst>
+              <a:gd name="adj" fmla="val 17143"/>
+            </a:avLst>
+          </a:prstGeom>
+          <a:solidFill>
+            <a:srgbClr val="2A9D8F"/>
+          </a:solidFill>
+          <a:ln/>
+        </p:spPr>
+      </p:sp>
+      <p:sp>
+        <p:nvSpPr>
           <p:cNvPr id="4" name="Text 2"/>
           <p:cNvSpPr/>
           <p:nvPr/>
         </p:nvSpPr>
         <p:spPr>
           <a:xfrm>
-            <a:off x="640080" y="91440"/>
-            <a:ext cx="7863840" cy="640080"/>
-          </a:xfrm>
-          <a:prstGeom prst="rect">
-            <a:avLst/>
-          </a:prstGeom>
-          <a:noFill/>
-          <a:ln/>
-        </p:spPr>
-        <p:txBody>
-          <a:bodyPr wrap="square" lIns="0" tIns="0" rIns="0" bIns="0" rtlCol="0" anchor="ctr"/>
+            <a:off x="548640" y="274320"/>
+            <a:ext cx="2011680" cy="320040"/>
+          </a:xfrm>
+          <a:prstGeom prst="rect">
+            <a:avLst/>
+          </a:prstGeom>
+          <a:noFill/>
+          <a:ln/>
+        </p:spPr>
+        <p:txBody>
+          <a:bodyPr wrap="square" rtlCol="0" anchor="ctr"/>
+          <a:lstStyle/>
+          <a:p>
+            <a:pPr algn="ctr" indent="0" marL="0">
+              <a:buNone/>
+            </a:pPr>
+            <a:r>
+              <a:rPr lang="en-US" sz="1000" b="1" dirty="0">
+                <a:solidFill>
+                  <a:srgbClr val="FFFFFF"/>
+                </a:solidFill>
+                <a:latin typeface="Arial" pitchFamily="34" charset="0"/>
+                <a:ea typeface="Arial" pitchFamily="34" charset="-122"/>
+                <a:cs typeface="Arial" pitchFamily="34" charset="-120"/>
+              </a:rPr>
+              <a:t>WORKED EXAMPLE</a:t>
+            </a:r>
+            <a:endParaRPr lang="en-US" sz="1000" dirty="0"/>
+          </a:p>
+        </p:txBody>
+      </p:sp>
+      <p:sp>
+        <p:nvSpPr>
+          <p:cNvPr id="5" name="Text 3"/>
+          <p:cNvSpPr/>
+          <p:nvPr/>
+        </p:nvSpPr>
+        <p:spPr>
+          <a:xfrm>
+            <a:off x="2743200" y="274320"/>
+            <a:ext cx="7315200" cy="457200"/>
+          </a:xfrm>
+          <a:prstGeom prst="rect">
+            <a:avLst/>
+          </a:prstGeom>
+          <a:noFill/>
+          <a:ln/>
+        </p:spPr>
+        <p:txBody>
+          <a:bodyPr wrap="square" rtlCol="0" anchor="ctr"/>
           <a:lstStyle/>
           <a:p>
             <a:pPr indent="0" marL="0">
               <a:buNone/>
             </a:pPr>
             <a:r>
-              <a:rPr lang="en-US" sz="2200" b="1" dirty="0">
+              <a:rPr lang="en-US" sz="2000" b="1" dirty="0">
                 <a:solidFill>
                   <a:srgbClr val="1B2A4A"/>
                 </a:solidFill>
@@ -2139,22 +1961,42 @@
                 <a:ea typeface="Georgia" pitchFamily="34" charset="-122"/>
                 <a:cs typeface="Georgia" pitchFamily="34" charset="-120"/>
               </a:rPr>
-              <a:t>What Is Substitution?</a:t>
-            </a:r>
-            <a:endParaRPr lang="en-US" sz="2200" dirty="0"/>
-          </a:p>
-        </p:txBody>
-      </p:sp>
-      <p:sp>
-        <p:nvSpPr>
-          <p:cNvPr id="5" name="Text 3"/>
-          <p:cNvSpPr/>
-          <p:nvPr/>
-        </p:nvSpPr>
-        <p:spPr>
-          <a:xfrm>
-            <a:off x="640080" y="1005840"/>
-            <a:ext cx="7863840" cy="2926080"/>
+              <a:t>Find the value when a = 3, b = 5</a:t>
+            </a:r>
+            <a:endParaRPr lang="en-US" sz="2000" dirty="0"/>
+          </a:p>
+        </p:txBody>
+      </p:sp>
+      <p:sp>
+        <p:nvSpPr>
+          <p:cNvPr id="6" name="Shape 4"/>
+          <p:cNvSpPr/>
+          <p:nvPr/>
+        </p:nvSpPr>
+        <p:spPr>
+          <a:xfrm>
+            <a:off x="548640" y="1051560"/>
+            <a:ext cx="365760" cy="365760"/>
+          </a:xfrm>
+          <a:prstGeom prst="ellipse">
+            <a:avLst/>
+          </a:prstGeom>
+          <a:solidFill>
+            <a:srgbClr val="111D35"/>
+          </a:solidFill>
+          <a:ln/>
+        </p:spPr>
+      </p:sp>
+      <p:sp>
+        <p:nvSpPr>
+          <p:cNvPr id="7" name="Text 5"/>
+          <p:cNvSpPr/>
+          <p:nvPr/>
+        </p:nvSpPr>
+        <p:spPr>
+          <a:xfrm>
+            <a:off x="548640" y="1051560"/>
+            <a:ext cx="365760" cy="365760"/>
           </a:xfrm>
           <a:prstGeom prst="rect">
             <a:avLst/>
@@ -2166,130 +2008,271 @@
           <a:bodyPr wrap="square" rtlCol="0" anchor="ctr"/>
           <a:lstStyle/>
           <a:p>
-            <a:pPr marL="342900" indent="-342900">
-              <a:spcAft>
-                <a:spcPts val="800"/>
-              </a:spcAft>
-              <a:buSzPct val="100000"/>
-              <a:buChar char="•"/>
-            </a:pPr>
-            <a:r>
-              <a:rPr lang="en-US" sz="1600" dirty="0">
+            <a:pPr algn="ctr" indent="0" marL="0">
+              <a:buNone/>
+            </a:pPr>
+            <a:r>
+              <a:rPr lang="en-US" sz="1300" b="1" dirty="0">
+                <a:solidFill>
+                  <a:srgbClr val="FFFFFF"/>
+                </a:solidFill>
+                <a:latin typeface="Arial" pitchFamily="34" charset="0"/>
+                <a:ea typeface="Arial" pitchFamily="34" charset="-122"/>
+                <a:cs typeface="Arial" pitchFamily="34" charset="-120"/>
+              </a:rPr>
+              <a:t>1</a:t>
+            </a:r>
+            <a:endParaRPr lang="en-US" sz="1300" dirty="0"/>
+          </a:p>
+        </p:txBody>
+      </p:sp>
+      <p:sp>
+        <p:nvSpPr>
+          <p:cNvPr id="8" name="Text 6"/>
+          <p:cNvSpPr/>
+          <p:nvPr/>
+        </p:nvSpPr>
+        <p:spPr>
+          <a:xfrm>
+            <a:off x="1097280" y="1005840"/>
+            <a:ext cx="9601200" cy="502920"/>
+          </a:xfrm>
+          <a:prstGeom prst="rect">
+            <a:avLst/>
+          </a:prstGeom>
+          <a:noFill/>
+          <a:ln/>
+        </p:spPr>
+        <p:txBody>
+          <a:bodyPr wrap="square" rtlCol="0" anchor="ctr"/>
+          <a:lstStyle/>
+          <a:p>
+            <a:pPr indent="0" marL="0">
+              <a:buNone/>
+            </a:pPr>
+            <a:r>
+              <a:rPr lang="en-US" sz="1500" dirty="0">
                 <a:solidFill>
                   <a:srgbClr val="3D3A36"/>
                 </a:solidFill>
-                <a:latin typeface="Calibri" pitchFamily="34" charset="0"/>
-                <a:ea typeface="Calibri" pitchFamily="34" charset="-122"/>
-                <a:cs typeface="Calibri" pitchFamily="34" charset="-120"/>
-              </a:rPr>
-              <a:t>Replace a variable with a given number.</a:t>
-            </a:r>
-            <a:endParaRPr lang="en-US" sz="1600" dirty="0"/>
-          </a:p>
-          <a:p>
-            <a:pPr marL="342900" indent="-342900">
-              <a:spcAft>
-                <a:spcPts val="800"/>
-              </a:spcAft>
-              <a:buSzPct val="100000"/>
-              <a:buChar char="•"/>
-            </a:pPr>
-            <a:r>
-              <a:rPr lang="en-US" sz="1600" dirty="0">
+                <a:latin typeface="Arial" pitchFamily="34" charset="0"/>
+                <a:ea typeface="Arial" pitchFamily="34" charset="-122"/>
+                <a:cs typeface="Arial" pitchFamily="34" charset="-120"/>
+              </a:rPr>
+              <a:t>Expression: 2a + 3b − 4</a:t>
+            </a:r>
+            <a:endParaRPr lang="en-US" sz="1500" dirty="0"/>
+          </a:p>
+        </p:txBody>
+      </p:sp>
+      <p:sp>
+        <p:nvSpPr>
+          <p:cNvPr id="9" name="Shape 7"/>
+          <p:cNvSpPr/>
+          <p:nvPr/>
+        </p:nvSpPr>
+        <p:spPr>
+          <a:xfrm>
+            <a:off x="548640" y="1783080"/>
+            <a:ext cx="365760" cy="365760"/>
+          </a:xfrm>
+          <a:prstGeom prst="ellipse">
+            <a:avLst/>
+          </a:prstGeom>
+          <a:solidFill>
+            <a:srgbClr val="111D35"/>
+          </a:solidFill>
+          <a:ln/>
+        </p:spPr>
+      </p:sp>
+      <p:sp>
+        <p:nvSpPr>
+          <p:cNvPr id="10" name="Text 8"/>
+          <p:cNvSpPr/>
+          <p:nvPr/>
+        </p:nvSpPr>
+        <p:spPr>
+          <a:xfrm>
+            <a:off x="548640" y="1783080"/>
+            <a:ext cx="365760" cy="365760"/>
+          </a:xfrm>
+          <a:prstGeom prst="rect">
+            <a:avLst/>
+          </a:prstGeom>
+          <a:noFill/>
+          <a:ln/>
+        </p:spPr>
+        <p:txBody>
+          <a:bodyPr wrap="square" rtlCol="0" anchor="ctr"/>
+          <a:lstStyle/>
+          <a:p>
+            <a:pPr algn="ctr" indent="0" marL="0">
+              <a:buNone/>
+            </a:pPr>
+            <a:r>
+              <a:rPr lang="en-US" sz="1300" b="1" dirty="0">
+                <a:solidFill>
+                  <a:srgbClr val="FFFFFF"/>
+                </a:solidFill>
+                <a:latin typeface="Arial" pitchFamily="34" charset="0"/>
+                <a:ea typeface="Arial" pitchFamily="34" charset="-122"/>
+                <a:cs typeface="Arial" pitchFamily="34" charset="-120"/>
+              </a:rPr>
+              <a:t>2</a:t>
+            </a:r>
+            <a:endParaRPr lang="en-US" sz="1300" dirty="0"/>
+          </a:p>
+        </p:txBody>
+      </p:sp>
+      <p:sp>
+        <p:nvSpPr>
+          <p:cNvPr id="11" name="Text 9"/>
+          <p:cNvSpPr/>
+          <p:nvPr/>
+        </p:nvSpPr>
+        <p:spPr>
+          <a:xfrm>
+            <a:off x="1097280" y="1737360"/>
+            <a:ext cx="9601200" cy="502920"/>
+          </a:xfrm>
+          <a:prstGeom prst="rect">
+            <a:avLst/>
+          </a:prstGeom>
+          <a:noFill/>
+          <a:ln/>
+        </p:spPr>
+        <p:txBody>
+          <a:bodyPr wrap="square" rtlCol="0" anchor="ctr"/>
+          <a:lstStyle/>
+          <a:p>
+            <a:pPr indent="0" marL="0">
+              <a:buNone/>
+            </a:pPr>
+            <a:r>
+              <a:rPr lang="en-US" sz="1500" dirty="0">
                 <a:solidFill>
                   <a:srgbClr val="3D3A36"/>
                 </a:solidFill>
-                <a:latin typeface="Calibri" pitchFamily="34" charset="0"/>
-                <a:ea typeface="Calibri" pitchFamily="34" charset="-122"/>
-                <a:cs typeface="Calibri" pitchFamily="34" charset="-120"/>
-              </a:rPr>
-              <a:t>If x = 3, then 2x + 1 = 2(3) + 1 = 7.</a:t>
-            </a:r>
-            <a:endParaRPr lang="en-US" sz="1600" dirty="0"/>
-          </a:p>
-          <a:p>
-            <a:pPr marL="342900" indent="-342900">
-              <a:spcAft>
-                <a:spcPts val="800"/>
-              </a:spcAft>
-              <a:buSzPct val="100000"/>
-              <a:buChar char="•"/>
-            </a:pPr>
-            <a:r>
-              <a:rPr lang="en-US" sz="1600" dirty="0">
+                <a:latin typeface="Arial" pitchFamily="34" charset="0"/>
+                <a:ea typeface="Arial" pitchFamily="34" charset="-122"/>
+                <a:cs typeface="Arial" pitchFamily="34" charset="-120"/>
+              </a:rPr>
+              <a:t>Substitute: 2(3) + 3(5) − 4</a:t>
+            </a:r>
+            <a:endParaRPr lang="en-US" sz="1500" dirty="0"/>
+          </a:p>
+        </p:txBody>
+      </p:sp>
+      <p:sp>
+        <p:nvSpPr>
+          <p:cNvPr id="12" name="Shape 10"/>
+          <p:cNvSpPr/>
+          <p:nvPr/>
+        </p:nvSpPr>
+        <p:spPr>
+          <a:xfrm>
+            <a:off x="548640" y="2514600"/>
+            <a:ext cx="365760" cy="365760"/>
+          </a:xfrm>
+          <a:prstGeom prst="ellipse">
+            <a:avLst/>
+          </a:prstGeom>
+          <a:solidFill>
+            <a:srgbClr val="111D35"/>
+          </a:solidFill>
+          <a:ln/>
+        </p:spPr>
+      </p:sp>
+      <p:sp>
+        <p:nvSpPr>
+          <p:cNvPr id="13" name="Text 11"/>
+          <p:cNvSpPr/>
+          <p:nvPr/>
+        </p:nvSpPr>
+        <p:spPr>
+          <a:xfrm>
+            <a:off x="548640" y="2514600"/>
+            <a:ext cx="365760" cy="365760"/>
+          </a:xfrm>
+          <a:prstGeom prst="rect">
+            <a:avLst/>
+          </a:prstGeom>
+          <a:noFill/>
+          <a:ln/>
+        </p:spPr>
+        <p:txBody>
+          <a:bodyPr wrap="square" rtlCol="0" anchor="ctr"/>
+          <a:lstStyle/>
+          <a:p>
+            <a:pPr algn="ctr" indent="0" marL="0">
+              <a:buNone/>
+            </a:pPr>
+            <a:r>
+              <a:rPr lang="en-US" sz="1300" b="1" dirty="0">
+                <a:solidFill>
+                  <a:srgbClr val="FFFFFF"/>
+                </a:solidFill>
+                <a:latin typeface="Arial" pitchFamily="34" charset="0"/>
+                <a:ea typeface="Arial" pitchFamily="34" charset="-122"/>
+                <a:cs typeface="Arial" pitchFamily="34" charset="-120"/>
+              </a:rPr>
+              <a:t>3</a:t>
+            </a:r>
+            <a:endParaRPr lang="en-US" sz="1300" dirty="0"/>
+          </a:p>
+        </p:txBody>
+      </p:sp>
+      <p:sp>
+        <p:nvSpPr>
+          <p:cNvPr id="14" name="Text 12"/>
+          <p:cNvSpPr/>
+          <p:nvPr/>
+        </p:nvSpPr>
+        <p:spPr>
+          <a:xfrm>
+            <a:off x="1097280" y="2468880"/>
+            <a:ext cx="9601200" cy="502920"/>
+          </a:xfrm>
+          <a:prstGeom prst="rect">
+            <a:avLst/>
+          </a:prstGeom>
+          <a:noFill/>
+          <a:ln/>
+        </p:spPr>
+        <p:txBody>
+          <a:bodyPr wrap="square" rtlCol="0" anchor="ctr"/>
+          <a:lstStyle/>
+          <a:p>
+            <a:pPr indent="0" marL="0">
+              <a:buNone/>
+            </a:pPr>
+            <a:r>
+              <a:rPr lang="en-US" sz="1500" dirty="0">
                 <a:solidFill>
                   <a:srgbClr val="3D3A36"/>
                 </a:solidFill>
-                <a:latin typeface="Calibri" pitchFamily="34" charset="0"/>
-                <a:ea typeface="Calibri" pitchFamily="34" charset="-122"/>
-                <a:cs typeface="Calibri" pitchFamily="34" charset="-120"/>
-              </a:rPr>
-              <a:t>Always use BRACKETS when substituting.</a:t>
-            </a:r>
-            <a:endParaRPr lang="en-US" sz="1600" dirty="0"/>
-          </a:p>
-          <a:p>
-            <a:pPr marL="342900" indent="-342900">
-              <a:spcAft>
-                <a:spcPts val="800"/>
-              </a:spcAft>
-              <a:buSzPct val="100000"/>
-              <a:buChar char="•"/>
-            </a:pPr>
-            <a:r>
-              <a:rPr lang="en-US" sz="1600" dirty="0">
-                <a:solidFill>
-                  <a:srgbClr val="3D3A36"/>
-                </a:solidFill>
-                <a:latin typeface="Calibri" pitchFamily="34" charset="0"/>
-                <a:ea typeface="Calibri" pitchFamily="34" charset="-122"/>
-                <a:cs typeface="Calibri" pitchFamily="34" charset="-120"/>
-              </a:rPr>
-              <a:t>Follow BIDMAS after substituting.</a:t>
-            </a:r>
-            <a:endParaRPr lang="en-US" sz="1600" dirty="0"/>
-          </a:p>
-        </p:txBody>
-      </p:sp>
-      <p:sp>
-        <p:nvSpPr>
-          <p:cNvPr id="6" name="Shape 4"/>
-          <p:cNvSpPr/>
-          <p:nvPr/>
-        </p:nvSpPr>
-        <p:spPr>
-          <a:xfrm>
-            <a:off x="640080" y="4114800"/>
-            <a:ext cx="7863840" cy="731520"/>
-          </a:xfrm>
-          <a:prstGeom prst="rect">
-            <a:avLst/>
-          </a:prstGeom>
-          <a:solidFill>
-            <a:srgbClr val="E8F5F3"/>
-          </a:solidFill>
-          <a:ln/>
-          <a:effectLst>
-            <a:outerShdw sx="100000" sy="100000" kx="0" ky="0" algn="bl" rotWithShape="0" blurRad="76200" dist="25400" dir="8100000">
-              <a:srgbClr val="000000">
-                <a:alpha val="12000"/>
-              </a:srgbClr>
-            </a:outerShdw>
-          </a:effectLst>
-        </p:spPr>
-      </p:sp>
-      <p:sp>
-        <p:nvSpPr>
-          <p:cNvPr id="7" name="Shape 5"/>
-          <p:cNvSpPr/>
-          <p:nvPr/>
-        </p:nvSpPr>
-        <p:spPr>
-          <a:xfrm>
-            <a:off x="640080" y="4114800"/>
-            <a:ext cx="64008" cy="731520"/>
-          </a:xfrm>
-          <a:prstGeom prst="rect">
+                <a:latin typeface="Arial" pitchFamily="34" charset="0"/>
+                <a:ea typeface="Arial" pitchFamily="34" charset="-122"/>
+                <a:cs typeface="Arial" pitchFamily="34" charset="-120"/>
+              </a:rPr>
+              <a:t>Calculate: 6 + 15 − 4</a:t>
+            </a:r>
+            <a:endParaRPr lang="en-US" sz="1500" dirty="0"/>
+          </a:p>
+        </p:txBody>
+      </p:sp>
+      <p:sp>
+        <p:nvSpPr>
+          <p:cNvPr id="15" name="Shape 13"/>
+          <p:cNvSpPr/>
+          <p:nvPr/>
+        </p:nvSpPr>
+        <p:spPr>
+          <a:xfrm>
+            <a:off x="548640" y="3246120"/>
+            <a:ext cx="365760" cy="365760"/>
+          </a:xfrm>
+          <a:prstGeom prst="ellipse">
             <a:avLst/>
           </a:prstGeom>
           <a:solidFill>
@@ -2300,14 +2283,53 @@
       </p:sp>
       <p:sp>
         <p:nvSpPr>
-          <p:cNvPr id="8" name="Text 6"/>
-          <p:cNvSpPr/>
-          <p:nvPr/>
-        </p:nvSpPr>
-        <p:spPr>
-          <a:xfrm>
-            <a:off x="914400" y="4160520"/>
-            <a:ext cx="7406640" cy="640080"/>
+          <p:cNvPr id="16" name="Text 14"/>
+          <p:cNvSpPr/>
+          <p:nvPr/>
+        </p:nvSpPr>
+        <p:spPr>
+          <a:xfrm>
+            <a:off x="548640" y="3246120"/>
+            <a:ext cx="365760" cy="365760"/>
+          </a:xfrm>
+          <a:prstGeom prst="rect">
+            <a:avLst/>
+          </a:prstGeom>
+          <a:noFill/>
+          <a:ln/>
+        </p:spPr>
+        <p:txBody>
+          <a:bodyPr wrap="square" rtlCol="0" anchor="ctr"/>
+          <a:lstStyle/>
+          <a:p>
+            <a:pPr algn="ctr" indent="0" marL="0">
+              <a:buNone/>
+            </a:pPr>
+            <a:r>
+              <a:rPr lang="en-US" sz="1300" b="1" dirty="0">
+                <a:solidFill>
+                  <a:srgbClr val="FFFFFF"/>
+                </a:solidFill>
+                <a:latin typeface="Arial" pitchFamily="34" charset="0"/>
+                <a:ea typeface="Arial" pitchFamily="34" charset="-122"/>
+                <a:cs typeface="Arial" pitchFamily="34" charset="-120"/>
+              </a:rPr>
+              <a:t>4</a:t>
+            </a:r>
+            <a:endParaRPr lang="en-US" sz="1300" dirty="0"/>
+          </a:p>
+        </p:txBody>
+      </p:sp>
+      <p:sp>
+        <p:nvSpPr>
+          <p:cNvPr id="17" name="Text 15"/>
+          <p:cNvSpPr/>
+          <p:nvPr/>
+        </p:nvSpPr>
+        <p:spPr>
+          <a:xfrm>
+            <a:off x="1097280" y="3200400"/>
+            <a:ext cx="9601200" cy="502920"/>
           </a:xfrm>
           <a:prstGeom prst="rect">
             <a:avLst/>
@@ -2323,17 +2345,17 @@
               <a:buNone/>
             </a:pPr>
             <a:r>
-              <a:rPr lang="en-US" sz="1300" i="1" dirty="0">
-                <a:solidFill>
-                  <a:srgbClr val="3D3A36"/>
-                </a:solidFill>
-                <a:latin typeface="Calibri" pitchFamily="34" charset="0"/>
-                <a:ea typeface="Calibri" pitchFamily="34" charset="-122"/>
-                <a:cs typeface="Calibri" pitchFamily="34" charset="-120"/>
-              </a:rPr>
-              <a:t>Common mistake: 2x with x=3 means 2×3=6, NOT '23'.</a:t>
-            </a:r>
-            <a:endParaRPr lang="en-US" sz="1300" dirty="0"/>
+              <a:rPr lang="en-US" sz="1500" b="1" dirty="0">
+                <a:solidFill>
+                  <a:srgbClr val="2A9D8F"/>
+                </a:solidFill>
+                <a:latin typeface="Arial" pitchFamily="34" charset="0"/>
+                <a:ea typeface="Arial" pitchFamily="34" charset="-122"/>
+                <a:cs typeface="Arial" pitchFamily="34" charset="-120"/>
+              </a:rPr>
+              <a:t>Answer: 17</a:t>
+            </a:r>
+            <a:endParaRPr lang="en-US" sz="1500" dirty="0"/>
           </a:p>
         </p:txBody>
       </p:sp>
@@ -2378,27 +2400,7 @@
         <p:spPr>
           <a:xfrm>
             <a:off x="0" y="0"/>
-            <a:ext cx="9144000" cy="822960"/>
-          </a:xfrm>
-          <a:prstGeom prst="rect">
-            <a:avLst/>
-          </a:prstGeom>
-          <a:solidFill>
-            <a:srgbClr val="FFFFFF"/>
-          </a:solidFill>
-          <a:ln/>
-        </p:spPr>
-      </p:sp>
-      <p:sp>
-        <p:nvSpPr>
-          <p:cNvPr id="3" name="Shape 1"/>
-          <p:cNvSpPr/>
-          <p:nvPr/>
-        </p:nvSpPr>
-        <p:spPr>
-          <a:xfrm>
-            <a:off x="0" y="795528"/>
-            <a:ext cx="9144000" cy="27432"/>
+            <a:ext cx="73152" cy="5148072"/>
           </a:xfrm>
           <a:prstGeom prst="rect">
             <a:avLst/>
@@ -2411,30 +2413,91 @@
       </p:sp>
       <p:sp>
         <p:nvSpPr>
+          <p:cNvPr id="3" name="Shape 1"/>
+          <p:cNvSpPr/>
+          <p:nvPr/>
+        </p:nvSpPr>
+        <p:spPr>
+          <a:xfrm>
+            <a:off x="548640" y="274320"/>
+            <a:ext cx="2011680" cy="320040"/>
+          </a:xfrm>
+          <a:prstGeom prst="roundRect">
+            <a:avLst>
+              <a:gd name="adj" fmla="val 17143"/>
+            </a:avLst>
+          </a:prstGeom>
+          <a:solidFill>
+            <a:srgbClr val="2A9D8F"/>
+          </a:solidFill>
+          <a:ln/>
+        </p:spPr>
+      </p:sp>
+      <p:sp>
+        <p:nvSpPr>
           <p:cNvPr id="4" name="Text 2"/>
           <p:cNvSpPr/>
           <p:nvPr/>
         </p:nvSpPr>
         <p:spPr>
           <a:xfrm>
-            <a:off x="640080" y="91440"/>
-            <a:ext cx="7863840" cy="640080"/>
-          </a:xfrm>
-          <a:prstGeom prst="rect">
-            <a:avLst/>
-          </a:prstGeom>
-          <a:noFill/>
-          <a:ln/>
-        </p:spPr>
-        <p:txBody>
-          <a:bodyPr wrap="square" lIns="0" tIns="0" rIns="0" bIns="0" rtlCol="0" anchor="ctr"/>
+            <a:off x="548640" y="274320"/>
+            <a:ext cx="2011680" cy="320040"/>
+          </a:xfrm>
+          <a:prstGeom prst="rect">
+            <a:avLst/>
+          </a:prstGeom>
+          <a:noFill/>
+          <a:ln/>
+        </p:spPr>
+        <p:txBody>
+          <a:bodyPr wrap="square" rtlCol="0" anchor="ctr"/>
+          <a:lstStyle/>
+          <a:p>
+            <a:pPr algn="ctr" indent="0" marL="0">
+              <a:buNone/>
+            </a:pPr>
+            <a:r>
+              <a:rPr lang="en-US" sz="1000" b="1" dirty="0">
+                <a:solidFill>
+                  <a:srgbClr val="FFFFFF"/>
+                </a:solidFill>
+                <a:latin typeface="Arial" pitchFamily="34" charset="0"/>
+                <a:ea typeface="Arial" pitchFamily="34" charset="-122"/>
+                <a:cs typeface="Arial" pitchFamily="34" charset="-120"/>
+              </a:rPr>
+              <a:t>WORKED EXAMPLE</a:t>
+            </a:r>
+            <a:endParaRPr lang="en-US" sz="1000" dirty="0"/>
+          </a:p>
+        </p:txBody>
+      </p:sp>
+      <p:sp>
+        <p:nvSpPr>
+          <p:cNvPr id="5" name="Text 3"/>
+          <p:cNvSpPr/>
+          <p:nvPr/>
+        </p:nvSpPr>
+        <p:spPr>
+          <a:xfrm>
+            <a:off x="2743200" y="274320"/>
+            <a:ext cx="7315200" cy="457200"/>
+          </a:xfrm>
+          <a:prstGeom prst="rect">
+            <a:avLst/>
+          </a:prstGeom>
+          <a:noFill/>
+          <a:ln/>
+        </p:spPr>
+        <p:txBody>
+          <a:bodyPr wrap="square" rtlCol="0" anchor="ctr"/>
           <a:lstStyle/>
           <a:p>
             <a:pPr indent="0" marL="0">
               <a:buNone/>
             </a:pPr>
             <a:r>
-              <a:rPr lang="en-US" sz="2200" b="1" dirty="0">
+              <a:rPr lang="en-US" sz="2000" b="1" dirty="0">
                 <a:solidFill>
                   <a:srgbClr val="1B2A4A"/>
                 </a:solidFill>
@@ -2442,22 +2505,42 @@
                 <a:ea typeface="Georgia" pitchFamily="34" charset="-122"/>
                 <a:cs typeface="Georgia" pitchFamily="34" charset="-120"/>
               </a:rPr>
-              <a:t>Step-by-Step Example</a:t>
-            </a:r>
-            <a:endParaRPr lang="en-US" sz="2200" dirty="0"/>
-          </a:p>
-        </p:txBody>
-      </p:sp>
-      <p:sp>
-        <p:nvSpPr>
-          <p:cNvPr id="5" name="Text 3"/>
-          <p:cNvSpPr/>
-          <p:nvPr/>
-        </p:nvSpPr>
-        <p:spPr>
-          <a:xfrm>
-            <a:off x="640080" y="1005840"/>
-            <a:ext cx="7863840" cy="2926080"/>
+              <a:t>Find the value when x = −2</a:t>
+            </a:r>
+            <a:endParaRPr lang="en-US" sz="2000" dirty="0"/>
+          </a:p>
+        </p:txBody>
+      </p:sp>
+      <p:sp>
+        <p:nvSpPr>
+          <p:cNvPr id="6" name="Shape 4"/>
+          <p:cNvSpPr/>
+          <p:nvPr/>
+        </p:nvSpPr>
+        <p:spPr>
+          <a:xfrm>
+            <a:off x="548640" y="1051560"/>
+            <a:ext cx="365760" cy="365760"/>
+          </a:xfrm>
+          <a:prstGeom prst="ellipse">
+            <a:avLst/>
+          </a:prstGeom>
+          <a:solidFill>
+            <a:srgbClr val="111D35"/>
+          </a:solidFill>
+          <a:ln/>
+        </p:spPr>
+      </p:sp>
+      <p:sp>
+        <p:nvSpPr>
+          <p:cNvPr id="7" name="Text 5"/>
+          <p:cNvSpPr/>
+          <p:nvPr/>
+        </p:nvSpPr>
+        <p:spPr>
+          <a:xfrm>
+            <a:off x="548640" y="1051560"/>
+            <a:ext cx="365760" cy="365760"/>
           </a:xfrm>
           <a:prstGeom prst="rect">
             <a:avLst/>
@@ -2469,151 +2552,369 @@
           <a:bodyPr wrap="square" rtlCol="0" anchor="ctr"/>
           <a:lstStyle/>
           <a:p>
-            <a:pPr marL="342900" indent="-342900">
-              <a:spcAft>
-                <a:spcPts val="800"/>
-              </a:spcAft>
-              <a:buSzPct val="100000"/>
-              <a:buChar char="•"/>
-            </a:pPr>
-            <a:r>
-              <a:rPr lang="en-US" sz="1600" dirty="0">
+            <a:pPr algn="ctr" indent="0" marL="0">
+              <a:buNone/>
+            </a:pPr>
+            <a:r>
+              <a:rPr lang="en-US" sz="1300" b="1" dirty="0">
+                <a:solidFill>
+                  <a:srgbClr val="FFFFFF"/>
+                </a:solidFill>
+                <a:latin typeface="Arial" pitchFamily="34" charset="0"/>
+                <a:ea typeface="Arial" pitchFamily="34" charset="-122"/>
+                <a:cs typeface="Arial" pitchFamily="34" charset="-120"/>
+              </a:rPr>
+              <a:t>1</a:t>
+            </a:r>
+            <a:endParaRPr lang="en-US" sz="1300" dirty="0"/>
+          </a:p>
+        </p:txBody>
+      </p:sp>
+      <p:sp>
+        <p:nvSpPr>
+          <p:cNvPr id="8" name="Text 6"/>
+          <p:cNvSpPr/>
+          <p:nvPr/>
+        </p:nvSpPr>
+        <p:spPr>
+          <a:xfrm>
+            <a:off x="1097280" y="1005840"/>
+            <a:ext cx="9601200" cy="502920"/>
+          </a:xfrm>
+          <a:prstGeom prst="rect">
+            <a:avLst/>
+          </a:prstGeom>
+          <a:noFill/>
+          <a:ln/>
+        </p:spPr>
+        <p:txBody>
+          <a:bodyPr wrap="square" rtlCol="0" anchor="ctr"/>
+          <a:lstStyle/>
+          <a:p>
+            <a:pPr indent="0" marL="0">
+              <a:buNone/>
+            </a:pPr>
+            <a:r>
+              <a:rPr lang="en-US" sz="1500" dirty="0">
                 <a:solidFill>
                   <a:srgbClr val="3D3A36"/>
                 </a:solidFill>
-                <a:latin typeface="Calibri" pitchFamily="34" charset="0"/>
-                <a:ea typeface="Calibri" pitchFamily="34" charset="-122"/>
-                <a:cs typeface="Calibri" pitchFamily="34" charset="-120"/>
-              </a:rPr>
-              <a:t>Expression: 3x² + 2x − 1, where x = 4</a:t>
-            </a:r>
-            <a:endParaRPr lang="en-US" sz="1600" dirty="0"/>
-          </a:p>
-          <a:p>
-            <a:pPr marL="342900" indent="-342900">
-              <a:spcAft>
-                <a:spcPts val="800"/>
-              </a:spcAft>
-              <a:buSzPct val="100000"/>
-              <a:buChar char="•"/>
-            </a:pPr>
-            <a:r>
-              <a:rPr lang="en-US" sz="1600" dirty="0">
+                <a:latin typeface="Arial" pitchFamily="34" charset="0"/>
+                <a:ea typeface="Arial" pitchFamily="34" charset="-122"/>
+                <a:cs typeface="Arial" pitchFamily="34" charset="-120"/>
+              </a:rPr>
+              <a:t>Expression: x² + 3x − 1</a:t>
+            </a:r>
+            <a:endParaRPr lang="en-US" sz="1500" dirty="0"/>
+          </a:p>
+        </p:txBody>
+      </p:sp>
+      <p:sp>
+        <p:nvSpPr>
+          <p:cNvPr id="9" name="Shape 7"/>
+          <p:cNvSpPr/>
+          <p:nvPr/>
+        </p:nvSpPr>
+        <p:spPr>
+          <a:xfrm>
+            <a:off x="548640" y="1783080"/>
+            <a:ext cx="365760" cy="365760"/>
+          </a:xfrm>
+          <a:prstGeom prst="ellipse">
+            <a:avLst/>
+          </a:prstGeom>
+          <a:solidFill>
+            <a:srgbClr val="111D35"/>
+          </a:solidFill>
+          <a:ln/>
+        </p:spPr>
+      </p:sp>
+      <p:sp>
+        <p:nvSpPr>
+          <p:cNvPr id="10" name="Text 8"/>
+          <p:cNvSpPr/>
+          <p:nvPr/>
+        </p:nvSpPr>
+        <p:spPr>
+          <a:xfrm>
+            <a:off x="548640" y="1783080"/>
+            <a:ext cx="365760" cy="365760"/>
+          </a:xfrm>
+          <a:prstGeom prst="rect">
+            <a:avLst/>
+          </a:prstGeom>
+          <a:noFill/>
+          <a:ln/>
+        </p:spPr>
+        <p:txBody>
+          <a:bodyPr wrap="square" rtlCol="0" anchor="ctr"/>
+          <a:lstStyle/>
+          <a:p>
+            <a:pPr algn="ctr" indent="0" marL="0">
+              <a:buNone/>
+            </a:pPr>
+            <a:r>
+              <a:rPr lang="en-US" sz="1300" b="1" dirty="0">
+                <a:solidFill>
+                  <a:srgbClr val="FFFFFF"/>
+                </a:solidFill>
+                <a:latin typeface="Arial" pitchFamily="34" charset="0"/>
+                <a:ea typeface="Arial" pitchFamily="34" charset="-122"/>
+                <a:cs typeface="Arial" pitchFamily="34" charset="-120"/>
+              </a:rPr>
+              <a:t>2</a:t>
+            </a:r>
+            <a:endParaRPr lang="en-US" sz="1300" dirty="0"/>
+          </a:p>
+        </p:txBody>
+      </p:sp>
+      <p:sp>
+        <p:nvSpPr>
+          <p:cNvPr id="11" name="Text 9"/>
+          <p:cNvSpPr/>
+          <p:nvPr/>
+        </p:nvSpPr>
+        <p:spPr>
+          <a:xfrm>
+            <a:off x="1097280" y="1737360"/>
+            <a:ext cx="9601200" cy="502920"/>
+          </a:xfrm>
+          <a:prstGeom prst="rect">
+            <a:avLst/>
+          </a:prstGeom>
+          <a:noFill/>
+          <a:ln/>
+        </p:spPr>
+        <p:txBody>
+          <a:bodyPr wrap="square" rtlCol="0" anchor="ctr"/>
+          <a:lstStyle/>
+          <a:p>
+            <a:pPr indent="0" marL="0">
+              <a:buNone/>
+            </a:pPr>
+            <a:r>
+              <a:rPr lang="en-US" sz="1500" dirty="0">
                 <a:solidFill>
                   <a:srgbClr val="3D3A36"/>
                 </a:solidFill>
-                <a:latin typeface="Calibri" pitchFamily="34" charset="0"/>
-                <a:ea typeface="Calibri" pitchFamily="34" charset="-122"/>
-                <a:cs typeface="Calibri" pitchFamily="34" charset="-120"/>
-              </a:rPr>
-              <a:t>Step 1: Replace x → 3(4)² + 2(4) − 1</a:t>
-            </a:r>
-            <a:endParaRPr lang="en-US" sz="1600" dirty="0"/>
-          </a:p>
-          <a:p>
-            <a:pPr marL="342900" indent="-342900">
-              <a:spcAft>
-                <a:spcPts val="800"/>
-              </a:spcAft>
-              <a:buSzPct val="100000"/>
-              <a:buChar char="•"/>
-            </a:pPr>
-            <a:r>
-              <a:rPr lang="en-US" sz="1600" dirty="0">
+                <a:latin typeface="Arial" pitchFamily="34" charset="0"/>
+                <a:ea typeface="Arial" pitchFamily="34" charset="-122"/>
+                <a:cs typeface="Arial" pitchFamily="34" charset="-120"/>
+              </a:rPr>
+              <a:t>Substitute: (−2)² + 3(−2) − 1</a:t>
+            </a:r>
+            <a:endParaRPr lang="en-US" sz="1500" dirty="0"/>
+          </a:p>
+        </p:txBody>
+      </p:sp>
+      <p:sp>
+        <p:nvSpPr>
+          <p:cNvPr id="12" name="Shape 10"/>
+          <p:cNvSpPr/>
+          <p:nvPr/>
+        </p:nvSpPr>
+        <p:spPr>
+          <a:xfrm>
+            <a:off x="548640" y="2514600"/>
+            <a:ext cx="365760" cy="365760"/>
+          </a:xfrm>
+          <a:prstGeom prst="ellipse">
+            <a:avLst/>
+          </a:prstGeom>
+          <a:solidFill>
+            <a:srgbClr val="111D35"/>
+          </a:solidFill>
+          <a:ln/>
+        </p:spPr>
+      </p:sp>
+      <p:sp>
+        <p:nvSpPr>
+          <p:cNvPr id="13" name="Text 11"/>
+          <p:cNvSpPr/>
+          <p:nvPr/>
+        </p:nvSpPr>
+        <p:spPr>
+          <a:xfrm>
+            <a:off x="548640" y="2514600"/>
+            <a:ext cx="365760" cy="365760"/>
+          </a:xfrm>
+          <a:prstGeom prst="rect">
+            <a:avLst/>
+          </a:prstGeom>
+          <a:noFill/>
+          <a:ln/>
+        </p:spPr>
+        <p:txBody>
+          <a:bodyPr wrap="square" rtlCol="0" anchor="ctr"/>
+          <a:lstStyle/>
+          <a:p>
+            <a:pPr algn="ctr" indent="0" marL="0">
+              <a:buNone/>
+            </a:pPr>
+            <a:r>
+              <a:rPr lang="en-US" sz="1300" b="1" dirty="0">
+                <a:solidFill>
+                  <a:srgbClr val="FFFFFF"/>
+                </a:solidFill>
+                <a:latin typeface="Arial" pitchFamily="34" charset="0"/>
+                <a:ea typeface="Arial" pitchFamily="34" charset="-122"/>
+                <a:cs typeface="Arial" pitchFamily="34" charset="-120"/>
+              </a:rPr>
+              <a:t>3</a:t>
+            </a:r>
+            <a:endParaRPr lang="en-US" sz="1300" dirty="0"/>
+          </a:p>
+        </p:txBody>
+      </p:sp>
+      <p:sp>
+        <p:nvSpPr>
+          <p:cNvPr id="14" name="Text 12"/>
+          <p:cNvSpPr/>
+          <p:nvPr/>
+        </p:nvSpPr>
+        <p:spPr>
+          <a:xfrm>
+            <a:off x="1097280" y="2468880"/>
+            <a:ext cx="9601200" cy="502920"/>
+          </a:xfrm>
+          <a:prstGeom prst="rect">
+            <a:avLst/>
+          </a:prstGeom>
+          <a:noFill/>
+          <a:ln/>
+        </p:spPr>
+        <p:txBody>
+          <a:bodyPr wrap="square" rtlCol="0" anchor="ctr"/>
+          <a:lstStyle/>
+          <a:p>
+            <a:pPr indent="0" marL="0">
+              <a:buNone/>
+            </a:pPr>
+            <a:r>
+              <a:rPr lang="en-US" sz="1500" dirty="0">
                 <a:solidFill>
                   <a:srgbClr val="3D3A36"/>
                 </a:solidFill>
-                <a:latin typeface="Calibri" pitchFamily="34" charset="0"/>
-                <a:ea typeface="Calibri" pitchFamily="34" charset="-122"/>
-                <a:cs typeface="Calibri" pitchFamily="34" charset="-120"/>
-              </a:rPr>
-              <a:t>Step 2: Powers first → 3(16) + 2(4) − 1</a:t>
-            </a:r>
-            <a:endParaRPr lang="en-US" sz="1600" dirty="0"/>
-          </a:p>
-          <a:p>
-            <a:pPr marL="342900" indent="-342900">
-              <a:spcAft>
-                <a:spcPts val="800"/>
-              </a:spcAft>
-              <a:buSzPct val="100000"/>
-              <a:buChar char="•"/>
-            </a:pPr>
-            <a:r>
-              <a:rPr lang="en-US" sz="1600" dirty="0">
+                <a:latin typeface="Arial" pitchFamily="34" charset="0"/>
+                <a:ea typeface="Arial" pitchFamily="34" charset="-122"/>
+                <a:cs typeface="Arial" pitchFamily="34" charset="-120"/>
+              </a:rPr>
+              <a:t>Calculate: 4 + (−6) − 1</a:t>
+            </a:r>
+            <a:endParaRPr lang="en-US" sz="1500" dirty="0"/>
+          </a:p>
+        </p:txBody>
+      </p:sp>
+      <p:sp>
+        <p:nvSpPr>
+          <p:cNvPr id="15" name="Shape 13"/>
+          <p:cNvSpPr/>
+          <p:nvPr/>
+        </p:nvSpPr>
+        <p:spPr>
+          <a:xfrm>
+            <a:off x="548640" y="3246120"/>
+            <a:ext cx="365760" cy="365760"/>
+          </a:xfrm>
+          <a:prstGeom prst="ellipse">
+            <a:avLst/>
+          </a:prstGeom>
+          <a:solidFill>
+            <a:srgbClr val="111D35"/>
+          </a:solidFill>
+          <a:ln/>
+        </p:spPr>
+      </p:sp>
+      <p:sp>
+        <p:nvSpPr>
+          <p:cNvPr id="16" name="Text 14"/>
+          <p:cNvSpPr/>
+          <p:nvPr/>
+        </p:nvSpPr>
+        <p:spPr>
+          <a:xfrm>
+            <a:off x="548640" y="3246120"/>
+            <a:ext cx="365760" cy="365760"/>
+          </a:xfrm>
+          <a:prstGeom prst="rect">
+            <a:avLst/>
+          </a:prstGeom>
+          <a:noFill/>
+          <a:ln/>
+        </p:spPr>
+        <p:txBody>
+          <a:bodyPr wrap="square" rtlCol="0" anchor="ctr"/>
+          <a:lstStyle/>
+          <a:p>
+            <a:pPr algn="ctr" indent="0" marL="0">
+              <a:buNone/>
+            </a:pPr>
+            <a:r>
+              <a:rPr lang="en-US" sz="1300" b="1" dirty="0">
+                <a:solidFill>
+                  <a:srgbClr val="FFFFFF"/>
+                </a:solidFill>
+                <a:latin typeface="Arial" pitchFamily="34" charset="0"/>
+                <a:ea typeface="Arial" pitchFamily="34" charset="-122"/>
+                <a:cs typeface="Arial" pitchFamily="34" charset="-120"/>
+              </a:rPr>
+              <a:t>4</a:t>
+            </a:r>
+            <a:endParaRPr lang="en-US" sz="1300" dirty="0"/>
+          </a:p>
+        </p:txBody>
+      </p:sp>
+      <p:sp>
+        <p:nvSpPr>
+          <p:cNvPr id="17" name="Text 15"/>
+          <p:cNvSpPr/>
+          <p:nvPr/>
+        </p:nvSpPr>
+        <p:spPr>
+          <a:xfrm>
+            <a:off x="1097280" y="3200400"/>
+            <a:ext cx="9601200" cy="502920"/>
+          </a:xfrm>
+          <a:prstGeom prst="rect">
+            <a:avLst/>
+          </a:prstGeom>
+          <a:noFill/>
+          <a:ln/>
+        </p:spPr>
+        <p:txBody>
+          <a:bodyPr wrap="square" rtlCol="0" anchor="ctr"/>
+          <a:lstStyle/>
+          <a:p>
+            <a:pPr indent="0" marL="0">
+              <a:buNone/>
+            </a:pPr>
+            <a:r>
+              <a:rPr lang="en-US" sz="1500" dirty="0">
                 <a:solidFill>
                   <a:srgbClr val="3D3A36"/>
                 </a:solidFill>
-                <a:latin typeface="Calibri" pitchFamily="34" charset="0"/>
-                <a:ea typeface="Calibri" pitchFamily="34" charset="-122"/>
-                <a:cs typeface="Calibri" pitchFamily="34" charset="-120"/>
-              </a:rPr>
-              <a:t>Step 3: Multiply → 48 + 8 − 1</a:t>
-            </a:r>
-            <a:endParaRPr lang="en-US" sz="1600" dirty="0"/>
-          </a:p>
-          <a:p>
-            <a:pPr marL="342900" indent="-342900">
-              <a:spcAft>
-                <a:spcPts val="800"/>
-              </a:spcAft>
-              <a:buSzPct val="100000"/>
-              <a:buChar char="•"/>
-            </a:pPr>
-            <a:r>
-              <a:rPr lang="en-US" sz="1600" dirty="0">
-                <a:solidFill>
-                  <a:srgbClr val="3D3A36"/>
-                </a:solidFill>
-                <a:latin typeface="Calibri" pitchFamily="34" charset="0"/>
-                <a:ea typeface="Calibri" pitchFamily="34" charset="-122"/>
-                <a:cs typeface="Calibri" pitchFamily="34" charset="-120"/>
-              </a:rPr>
-              <a:t>Step 4: Add/Subtract → 55</a:t>
-            </a:r>
-            <a:endParaRPr lang="en-US" sz="1600" dirty="0"/>
-          </a:p>
-        </p:txBody>
-      </p:sp>
-      <p:sp>
-        <p:nvSpPr>
-          <p:cNvPr id="6" name="Shape 4"/>
-          <p:cNvSpPr/>
-          <p:nvPr/>
-        </p:nvSpPr>
-        <p:spPr>
-          <a:xfrm>
-            <a:off x="640080" y="4114800"/>
-            <a:ext cx="7863840" cy="731520"/>
-          </a:xfrm>
-          <a:prstGeom prst="rect">
-            <a:avLst/>
-          </a:prstGeom>
-          <a:solidFill>
-            <a:srgbClr val="E8F5F3"/>
-          </a:solidFill>
-          <a:ln/>
-          <a:effectLst>
-            <a:outerShdw sx="100000" sy="100000" kx="0" ky="0" algn="bl" rotWithShape="0" blurRad="76200" dist="25400" dir="8100000">
-              <a:srgbClr val="000000">
-                <a:alpha val="12000"/>
-              </a:srgbClr>
-            </a:outerShdw>
-          </a:effectLst>
-        </p:spPr>
-      </p:sp>
-      <p:sp>
-        <p:nvSpPr>
-          <p:cNvPr id="7" name="Shape 5"/>
-          <p:cNvSpPr/>
-          <p:nvPr/>
-        </p:nvSpPr>
-        <p:spPr>
-          <a:xfrm>
-            <a:off x="640080" y="4114800"/>
-            <a:ext cx="64008" cy="731520"/>
-          </a:xfrm>
-          <a:prstGeom prst="rect">
+                <a:latin typeface="Arial" pitchFamily="34" charset="0"/>
+                <a:ea typeface="Arial" pitchFamily="34" charset="-122"/>
+                <a:cs typeface="Arial" pitchFamily="34" charset="-120"/>
+              </a:rPr>
+              <a:t>Answer: −3</a:t>
+            </a:r>
+            <a:endParaRPr lang="en-US" sz="1500" dirty="0"/>
+          </a:p>
+        </p:txBody>
+      </p:sp>
+      <p:sp>
+        <p:nvSpPr>
+          <p:cNvPr id="18" name="Shape 16"/>
+          <p:cNvSpPr/>
+          <p:nvPr/>
+        </p:nvSpPr>
+        <p:spPr>
+          <a:xfrm>
+            <a:off x="548640" y="3977640"/>
+            <a:ext cx="365760" cy="365760"/>
+          </a:xfrm>
+          <a:prstGeom prst="ellipse">
             <a:avLst/>
           </a:prstGeom>
           <a:solidFill>
@@ -2624,14 +2925,53 @@
       </p:sp>
       <p:sp>
         <p:nvSpPr>
-          <p:cNvPr id="8" name="Text 6"/>
-          <p:cNvSpPr/>
-          <p:nvPr/>
-        </p:nvSpPr>
-        <p:spPr>
-          <a:xfrm>
-            <a:off x="914400" y="4160520"/>
-            <a:ext cx="7406640" cy="640080"/>
+          <p:cNvPr id="19" name="Text 17"/>
+          <p:cNvSpPr/>
+          <p:nvPr/>
+        </p:nvSpPr>
+        <p:spPr>
+          <a:xfrm>
+            <a:off x="548640" y="3977640"/>
+            <a:ext cx="365760" cy="365760"/>
+          </a:xfrm>
+          <a:prstGeom prst="rect">
+            <a:avLst/>
+          </a:prstGeom>
+          <a:noFill/>
+          <a:ln/>
+        </p:spPr>
+        <p:txBody>
+          <a:bodyPr wrap="square" rtlCol="0" anchor="ctr"/>
+          <a:lstStyle/>
+          <a:p>
+            <a:pPr algn="ctr" indent="0" marL="0">
+              <a:buNone/>
+            </a:pPr>
+            <a:r>
+              <a:rPr lang="en-US" sz="1300" b="1" dirty="0">
+                <a:solidFill>
+                  <a:srgbClr val="FFFFFF"/>
+                </a:solidFill>
+                <a:latin typeface="Arial" pitchFamily="34" charset="0"/>
+                <a:ea typeface="Arial" pitchFamily="34" charset="-122"/>
+                <a:cs typeface="Arial" pitchFamily="34" charset="-120"/>
+              </a:rPr>
+              <a:t>5</a:t>
+            </a:r>
+            <a:endParaRPr lang="en-US" sz="1300" dirty="0"/>
+          </a:p>
+        </p:txBody>
+      </p:sp>
+      <p:sp>
+        <p:nvSpPr>
+          <p:cNvPr id="20" name="Text 18"/>
+          <p:cNvSpPr/>
+          <p:nvPr/>
+        </p:nvSpPr>
+        <p:spPr>
+          <a:xfrm>
+            <a:off x="1097280" y="3931920"/>
+            <a:ext cx="9601200" cy="502920"/>
           </a:xfrm>
           <a:prstGeom prst="rect">
             <a:avLst/>
@@ -2647,17 +2987,17 @@
               <a:buNone/>
             </a:pPr>
             <a:r>
-              <a:rPr lang="en-US" sz="1300" i="1" dirty="0">
-                <a:solidFill>
-                  <a:srgbClr val="3D3A36"/>
-                </a:solidFill>
-                <a:latin typeface="Calibri" pitchFamily="34" charset="0"/>
-                <a:ea typeface="Calibri" pitchFamily="34" charset="-122"/>
-                <a:cs typeface="Calibri" pitchFamily="34" charset="-120"/>
-              </a:rPr>
-              <a:t>Formula → Substitution → BIDMAS → Answer</a:t>
-            </a:r>
-            <a:endParaRPr lang="en-US" sz="1300" dirty="0"/>
+              <a:rPr lang="en-US" sz="1500" b="1" dirty="0">
+                <a:solidFill>
+                  <a:srgbClr val="2A9D8F"/>
+                </a:solidFill>
+                <a:latin typeface="Arial" pitchFamily="34" charset="0"/>
+                <a:ea typeface="Arial" pitchFamily="34" charset="-122"/>
+                <a:cs typeface="Arial" pitchFamily="34" charset="-120"/>
+              </a:rPr>
+              <a:t>Remember: (−2)² = 4 (negative × negative = positive)</a:t>
+            </a:r>
+            <a:endParaRPr lang="en-US" sz="1500" dirty="0"/>
           </a:p>
         </p:txBody>
       </p:sp>
@@ -2702,27 +3042,7 @@
         <p:spPr>
           <a:xfrm>
             <a:off x="0" y="0"/>
-            <a:ext cx="9144000" cy="822960"/>
-          </a:xfrm>
-          <a:prstGeom prst="rect">
-            <a:avLst/>
-          </a:prstGeom>
-          <a:solidFill>
-            <a:srgbClr val="FFFFFF"/>
-          </a:solidFill>
-          <a:ln/>
-        </p:spPr>
-      </p:sp>
-      <p:sp>
-        <p:nvSpPr>
-          <p:cNvPr id="3" name="Shape 1"/>
-          <p:cNvSpPr/>
-          <p:nvPr/>
-        </p:nvSpPr>
-        <p:spPr>
-          <a:xfrm>
-            <a:off x="0" y="795528"/>
-            <a:ext cx="9144000" cy="27432"/>
+            <a:ext cx="73152" cy="5148072"/>
           </a:xfrm>
           <a:prstGeom prst="rect">
             <a:avLst/>
@@ -2735,30 +3055,30 @@
       </p:sp>
       <p:sp>
         <p:nvSpPr>
-          <p:cNvPr id="4" name="Text 2"/>
-          <p:cNvSpPr/>
-          <p:nvPr/>
-        </p:nvSpPr>
-        <p:spPr>
-          <a:xfrm>
-            <a:off x="640080" y="91440"/>
-            <a:ext cx="7863840" cy="640080"/>
-          </a:xfrm>
-          <a:prstGeom prst="rect">
-            <a:avLst/>
-          </a:prstGeom>
-          <a:noFill/>
-          <a:ln/>
-        </p:spPr>
-        <p:txBody>
-          <a:bodyPr wrap="square" lIns="0" tIns="0" rIns="0" bIns="0" rtlCol="0" anchor="ctr"/>
+          <p:cNvPr id="3" name="Text 1"/>
+          <p:cNvSpPr/>
+          <p:nvPr/>
+        </p:nvSpPr>
+        <p:spPr>
+          <a:xfrm>
+            <a:off x="548640" y="274320"/>
+            <a:ext cx="9144000" cy="640080"/>
+          </a:xfrm>
+          <a:prstGeom prst="rect">
+            <a:avLst/>
+          </a:prstGeom>
+          <a:noFill/>
+          <a:ln/>
+        </p:spPr>
+        <p:txBody>
+          <a:bodyPr wrap="square" rtlCol="0" anchor="ctr"/>
           <a:lstStyle/>
           <a:p>
             <a:pPr indent="0" marL="0">
               <a:buNone/>
             </a:pPr>
             <a:r>
-              <a:rPr lang="en-US" sz="2200" b="1" dirty="0">
+              <a:rPr lang="en-US" sz="2400" b="1" dirty="0">
                 <a:solidFill>
                   <a:srgbClr val="1B2A4A"/>
                 </a:solidFill>
@@ -2766,49 +3086,22 @@
                 <a:ea typeface="Georgia" pitchFamily="34" charset="-122"/>
                 <a:cs typeface="Georgia" pitchFamily="34" charset="-120"/>
               </a:rPr>
-              <a:t>Watch Out: Negatives!</a:t>
-            </a:r>
-            <a:endParaRPr lang="en-US" sz="2200" dirty="0"/>
-          </a:p>
-        </p:txBody>
-      </p:sp>
-      <p:sp>
-        <p:nvSpPr>
-          <p:cNvPr id="5" name="Shape 3"/>
-          <p:cNvSpPr/>
-          <p:nvPr/>
-        </p:nvSpPr>
-        <p:spPr>
-          <a:xfrm>
-            <a:off x="457200" y="1005840"/>
-            <a:ext cx="3931920" cy="3657600"/>
-          </a:xfrm>
-          <a:prstGeom prst="rect">
-            <a:avLst/>
-          </a:prstGeom>
-          <a:solidFill>
-            <a:srgbClr val="FFFFFF"/>
-          </a:solidFill>
-          <a:ln/>
-          <a:effectLst>
-            <a:outerShdw sx="100000" sy="100000" kx="0" ky="0" algn="bl" rotWithShape="0" blurRad="76200" dist="25400" dir="8100000">
-              <a:srgbClr val="000000">
-                <a:alpha val="12000"/>
-              </a:srgbClr>
-            </a:outerShdw>
-          </a:effectLst>
-        </p:spPr>
-      </p:sp>
-      <p:sp>
-        <p:nvSpPr>
-          <p:cNvPr id="6" name="Shape 4"/>
-          <p:cNvSpPr/>
-          <p:nvPr/>
-        </p:nvSpPr>
-        <p:spPr>
-          <a:xfrm>
-            <a:off x="457200" y="1005840"/>
-            <a:ext cx="3931920" cy="64008"/>
+              <a:t>Using Formulas</a:t>
+            </a:r>
+            <a:endParaRPr lang="en-US" sz="2400" dirty="0"/>
+          </a:p>
+        </p:txBody>
+      </p:sp>
+      <p:sp>
+        <p:nvSpPr>
+          <p:cNvPr id="4" name="Shape 2"/>
+          <p:cNvSpPr/>
+          <p:nvPr/>
+        </p:nvSpPr>
+        <p:spPr>
+          <a:xfrm>
+            <a:off x="548640" y="960120"/>
+            <a:ext cx="2286000" cy="36576"/>
           </a:xfrm>
           <a:prstGeom prst="rect">
             <a:avLst/>
@@ -2821,296 +3114,111 @@
       </p:sp>
       <p:sp>
         <p:nvSpPr>
-          <p:cNvPr id="7" name="Text 5"/>
-          <p:cNvSpPr/>
-          <p:nvPr/>
-        </p:nvSpPr>
-        <p:spPr>
-          <a:xfrm>
-            <a:off x="640080" y="1188720"/>
-            <a:ext cx="3566160" cy="457200"/>
-          </a:xfrm>
-          <a:prstGeom prst="rect">
-            <a:avLst/>
-          </a:prstGeom>
-          <a:noFill/>
-          <a:ln/>
-        </p:spPr>
-        <p:txBody>
-          <a:bodyPr wrap="square" rtlCol="0" anchor="ctr"/>
-          <a:lstStyle/>
-          <a:p>
-            <a:pPr indent="0" marL="0">
-              <a:buNone/>
-            </a:pPr>
-            <a:r>
-              <a:rPr lang="en-US" sz="1600" b="1" dirty="0">
-                <a:solidFill>
-                  <a:srgbClr val="2A9D8F"/>
-                </a:solidFill>
-                <a:latin typeface="Calibri" pitchFamily="34" charset="0"/>
-                <a:ea typeface="Calibri" pitchFamily="34" charset="-122"/>
-                <a:cs typeface="Calibri" pitchFamily="34" charset="-120"/>
-              </a:rPr>
-              <a:t>Common Traps</a:t>
-            </a:r>
-            <a:endParaRPr lang="en-US" sz="1600" dirty="0"/>
-          </a:p>
-        </p:txBody>
-      </p:sp>
-      <p:sp>
-        <p:nvSpPr>
-          <p:cNvPr id="8" name="Text 6"/>
-          <p:cNvSpPr/>
-          <p:nvPr/>
-        </p:nvSpPr>
-        <p:spPr>
-          <a:xfrm>
-            <a:off x="640080" y="1691640"/>
-            <a:ext cx="3566160" cy="2743200"/>
-          </a:xfrm>
-          <a:prstGeom prst="rect">
-            <a:avLst/>
-          </a:prstGeom>
-          <a:noFill/>
-          <a:ln/>
-        </p:spPr>
-        <p:txBody>
-          <a:bodyPr wrap="square" rtlCol="0" anchor="ctr"/>
-          <a:lstStyle/>
-          <a:p>
-            <a:pPr marL="342900" indent="-342900">
+          <p:cNvPr id="5" name="Text 3"/>
+          <p:cNvSpPr/>
+          <p:nvPr/>
+        </p:nvSpPr>
+        <p:spPr>
+          <a:xfrm>
+            <a:off x="548640" y="1188720"/>
+            <a:ext cx="10058400" cy="3474720"/>
+          </a:xfrm>
+          <a:prstGeom prst="rect">
+            <a:avLst/>
+          </a:prstGeom>
+          <a:noFill/>
+          <a:ln/>
+        </p:spPr>
+        <p:txBody>
+          <a:bodyPr wrap="square" rtlCol="0" anchor="t"/>
+          <a:lstStyle/>
+          <a:p>
+            <a:pPr>
+              <a:lnSpc>
+                <a:spcPct val="150000"/>
+              </a:lnSpc>
               <a:spcAft>
                 <a:spcPts val="600"/>
               </a:spcAft>
-              <a:buSzPct val="100000"/>
-              <a:buChar char="•"/>
-            </a:pPr>
-            <a:r>
-              <a:rPr lang="en-US" sz="1400" dirty="0">
+            </a:pPr>
+            <a:r>
+              <a:rPr lang="en-US" sz="1500" dirty="0">
                 <a:solidFill>
                   <a:srgbClr val="3D3A36"/>
                 </a:solidFill>
-                <a:latin typeface="Calibri" pitchFamily="34" charset="0"/>
-                <a:ea typeface="Calibri" pitchFamily="34" charset="-122"/>
-                <a:cs typeface="Calibri" pitchFamily="34" charset="-120"/>
-              </a:rPr>
-              <a:t>(−3)² = 9, not −9</a:t>
-            </a:r>
-            <a:endParaRPr lang="en-US" sz="1400" dirty="0"/>
-          </a:p>
-          <a:p>
-            <a:pPr marL="342900" indent="-342900">
+                <a:latin typeface="Arial" pitchFamily="34" charset="0"/>
+                <a:ea typeface="Arial" pitchFamily="34" charset="-122"/>
+                <a:cs typeface="Arial" pitchFamily="34" charset="-120"/>
+              </a:rPr>
+              <a:t>A formula is an expression that calculates something useful.</a:t>
+            </a:r>
+            <a:endParaRPr lang="en-US" sz="1500" dirty="0"/>
+          </a:p>
+          <a:p>
+            <a:pPr>
+              <a:lnSpc>
+                <a:spcPct val="150000"/>
+              </a:lnSpc>
               <a:spcAft>
                 <a:spcPts val="600"/>
               </a:spcAft>
-              <a:buSzPct val="100000"/>
-              <a:buChar char="•"/>
-            </a:pPr>
-            <a:r>
-              <a:rPr lang="en-US" sz="1400" dirty="0">
+            </a:pPr>
+            <a:r>
+              <a:rPr lang="en-US" sz="1500" dirty="0">
                 <a:solidFill>
                   <a:srgbClr val="3D3A36"/>
                 </a:solidFill>
-                <a:latin typeface="Calibri" pitchFamily="34" charset="0"/>
-                <a:ea typeface="Calibri" pitchFamily="34" charset="-122"/>
-                <a:cs typeface="Calibri" pitchFamily="34" charset="-120"/>
-              </a:rPr>
-              <a:t>2 × (−4) = −8</a:t>
-            </a:r>
-            <a:endParaRPr lang="en-US" sz="1400" dirty="0"/>
-          </a:p>
-          <a:p>
-            <a:pPr marL="342900" indent="-342900">
+                <a:latin typeface="Arial" pitchFamily="34" charset="0"/>
+                <a:ea typeface="Arial" pitchFamily="34" charset="-122"/>
+                <a:cs typeface="Arial" pitchFamily="34" charset="-120"/>
+              </a:rPr>
+              <a:t>Area of rectangle: A = l × w. If l = 8, w = 5 → A = 40 cm².</a:t>
+            </a:r>
+            <a:endParaRPr lang="en-US" sz="1500" dirty="0"/>
+          </a:p>
+          <a:p>
+            <a:pPr>
+              <a:lnSpc>
+                <a:spcPct val="150000"/>
+              </a:lnSpc>
               <a:spcAft>
                 <a:spcPts val="600"/>
               </a:spcAft>
-              <a:buSzPct val="100000"/>
-              <a:buChar char="•"/>
-            </a:pPr>
-            <a:r>
-              <a:rPr lang="en-US" sz="1400" dirty="0">
+            </a:pPr>
+            <a:r>
+              <a:rPr lang="en-US" sz="1500" dirty="0">
                 <a:solidFill>
                   <a:srgbClr val="3D3A36"/>
                 </a:solidFill>
-                <a:latin typeface="Calibri" pitchFamily="34" charset="0"/>
-                <a:ea typeface="Calibri" pitchFamily="34" charset="-122"/>
-                <a:cs typeface="Calibri" pitchFamily="34" charset="-120"/>
-              </a:rPr>
-              <a:t>5 − (−3) = 5 + 3 = 8</a:t>
-            </a:r>
-            <a:endParaRPr lang="en-US" sz="1400" dirty="0"/>
-          </a:p>
-        </p:txBody>
-      </p:sp>
-      <p:sp>
-        <p:nvSpPr>
-          <p:cNvPr id="9" name="Shape 7"/>
-          <p:cNvSpPr/>
-          <p:nvPr/>
-        </p:nvSpPr>
-        <p:spPr>
-          <a:xfrm>
-            <a:off x="4754880" y="1005840"/>
-            <a:ext cx="3931920" cy="3657600"/>
-          </a:xfrm>
-          <a:prstGeom prst="rect">
-            <a:avLst/>
-          </a:prstGeom>
-          <a:solidFill>
-            <a:srgbClr val="FFFFFF"/>
-          </a:solidFill>
-          <a:ln/>
-          <a:effectLst>
-            <a:outerShdw sx="100000" sy="100000" kx="0" ky="0" algn="bl" rotWithShape="0" blurRad="76200" dist="25400" dir="8100000">
-              <a:srgbClr val="000000">
-                <a:alpha val="12000"/>
-              </a:srgbClr>
-            </a:outerShdw>
-          </a:effectLst>
-        </p:spPr>
-      </p:sp>
-      <p:sp>
-        <p:nvSpPr>
-          <p:cNvPr id="10" name="Shape 8"/>
-          <p:cNvSpPr/>
-          <p:nvPr/>
-        </p:nvSpPr>
-        <p:spPr>
-          <a:xfrm>
-            <a:off x="4754880" y="1005840"/>
-            <a:ext cx="3931920" cy="64008"/>
-          </a:xfrm>
-          <a:prstGeom prst="rect">
-            <a:avLst/>
-          </a:prstGeom>
-          <a:solidFill>
-            <a:srgbClr val="E9C46A"/>
-          </a:solidFill>
-          <a:ln/>
-        </p:spPr>
-      </p:sp>
-      <p:sp>
-        <p:nvSpPr>
-          <p:cNvPr id="11" name="Text 9"/>
-          <p:cNvSpPr/>
-          <p:nvPr/>
-        </p:nvSpPr>
-        <p:spPr>
-          <a:xfrm>
-            <a:off x="4937760" y="1188720"/>
-            <a:ext cx="3566160" cy="457200"/>
-          </a:xfrm>
-          <a:prstGeom prst="rect">
-            <a:avLst/>
-          </a:prstGeom>
-          <a:noFill/>
-          <a:ln/>
-        </p:spPr>
-        <p:txBody>
-          <a:bodyPr wrap="square" rtlCol="0" anchor="ctr"/>
-          <a:lstStyle/>
-          <a:p>
-            <a:pPr indent="0" marL="0">
-              <a:buNone/>
-            </a:pPr>
-            <a:r>
-              <a:rPr lang="en-US" sz="1600" b="1" dirty="0">
-                <a:solidFill>
-                  <a:srgbClr val="E9C46A"/>
-                </a:solidFill>
-                <a:latin typeface="Calibri" pitchFamily="34" charset="0"/>
-                <a:ea typeface="Calibri" pitchFamily="34" charset="-122"/>
-                <a:cs typeface="Calibri" pitchFamily="34" charset="-120"/>
-              </a:rPr>
-              <a:t>Real Formulas</a:t>
-            </a:r>
-            <a:endParaRPr lang="en-US" sz="1600" dirty="0"/>
-          </a:p>
-        </p:txBody>
-      </p:sp>
-      <p:sp>
-        <p:nvSpPr>
-          <p:cNvPr id="12" name="Text 10"/>
-          <p:cNvSpPr/>
-          <p:nvPr/>
-        </p:nvSpPr>
-        <p:spPr>
-          <a:xfrm>
-            <a:off x="4937760" y="1691640"/>
-            <a:ext cx="3566160" cy="2743200"/>
-          </a:xfrm>
-          <a:prstGeom prst="rect">
-            <a:avLst/>
-          </a:prstGeom>
-          <a:noFill/>
-          <a:ln/>
-        </p:spPr>
-        <p:txBody>
-          <a:bodyPr wrap="square" rtlCol="0" anchor="ctr"/>
-          <a:lstStyle/>
-          <a:p>
-            <a:pPr marL="342900" indent="-342900">
+                <a:latin typeface="Arial" pitchFamily="34" charset="0"/>
+                <a:ea typeface="Arial" pitchFamily="34" charset="-122"/>
+                <a:cs typeface="Arial" pitchFamily="34" charset="-120"/>
+              </a:rPr>
+              <a:t>Speed formula: s = d ÷ t. If d = 100km, t = 2h → s = 50 km/h.</a:t>
+            </a:r>
+            <a:endParaRPr lang="en-US" sz="1500" dirty="0"/>
+          </a:p>
+          <a:p>
+            <a:pPr>
+              <a:lnSpc>
+                <a:spcPct val="150000"/>
+              </a:lnSpc>
               <a:spcAft>
                 <a:spcPts val="600"/>
               </a:spcAft>
-              <a:buSzPct val="100000"/>
-              <a:buChar char="•"/>
-            </a:pPr>
-            <a:r>
-              <a:rPr lang="en-US" sz="1400" dirty="0">
+            </a:pPr>
+            <a:r>
+              <a:rPr lang="en-US" sz="1500" dirty="0">
                 <a:solidFill>
                   <a:srgbClr val="3D3A36"/>
                 </a:solidFill>
-                <a:latin typeface="Calibri" pitchFamily="34" charset="0"/>
-                <a:ea typeface="Calibri" pitchFamily="34" charset="-122"/>
-                <a:cs typeface="Calibri" pitchFamily="34" charset="-120"/>
-              </a:rPr>
-              <a:t>Nanjing summer: F = 1.8(28)+32 = 82.4°F</a:t>
-            </a:r>
-            <a:endParaRPr lang="en-US" sz="1400" dirty="0"/>
-          </a:p>
-          <a:p>
-            <a:pPr marL="342900" indent="-342900">
-              <a:spcAft>
-                <a:spcPts val="600"/>
-              </a:spcAft>
-              <a:buSzPct val="100000"/>
-              <a:buChar char="•"/>
-            </a:pPr>
-            <a:r>
-              <a:rPr lang="en-US" sz="1400" dirty="0">
-                <a:solidFill>
-                  <a:srgbClr val="3D3A36"/>
-                </a:solidFill>
-                <a:latin typeface="Calibri" pitchFamily="34" charset="0"/>
-                <a:ea typeface="Calibri" pitchFamily="34" charset="-122"/>
-                <a:cs typeface="Calibri" pitchFamily="34" charset="-120"/>
-              </a:rPr>
-              <a:t>Nanjing winter: F = 1.8(−5)+32 = 23°F</a:t>
-            </a:r>
-            <a:endParaRPr lang="en-US" sz="1400" dirty="0"/>
-          </a:p>
-          <a:p>
-            <a:pPr marL="342900" indent="-342900">
-              <a:spcAft>
-                <a:spcPts val="600"/>
-              </a:spcAft>
-              <a:buSzPct val="100000"/>
-              <a:buChar char="•"/>
-            </a:pPr>
-            <a:r>
-              <a:rPr lang="en-US" sz="1400" dirty="0">
-                <a:solidFill>
-                  <a:srgbClr val="3D3A36"/>
-                </a:solidFill>
-                <a:latin typeface="Calibri" pitchFamily="34" charset="0"/>
-                <a:ea typeface="Calibri" pitchFamily="34" charset="-122"/>
-                <a:cs typeface="Calibri" pitchFamily="34" charset="-120"/>
-              </a:rPr>
-              <a:t>Seoul summer: F = 1.8(35)+32 = 95°F</a:t>
-            </a:r>
-            <a:endParaRPr lang="en-US" sz="1400" dirty="0"/>
+                <a:latin typeface="Arial" pitchFamily="34" charset="0"/>
+                <a:ea typeface="Arial" pitchFamily="34" charset="-122"/>
+                <a:cs typeface="Arial" pitchFamily="34" charset="-120"/>
+              </a:rPr>
+              <a:t>Formulas are just substitution in disguise!</a:t>
+            </a:r>
+            <a:endParaRPr lang="en-US" sz="1500" dirty="0"/>
           </a:p>
         </p:txBody>
       </p:sp>
@@ -3155,27 +3263,7 @@
         <p:spPr>
           <a:xfrm>
             <a:off x="0" y="0"/>
-            <a:ext cx="9144000" cy="822960"/>
-          </a:xfrm>
-          <a:prstGeom prst="rect">
-            <a:avLst/>
-          </a:prstGeom>
-          <a:solidFill>
-            <a:srgbClr val="FFFFFF"/>
-          </a:solidFill>
-          <a:ln/>
-        </p:spPr>
-      </p:sp>
-      <p:sp>
-        <p:nvSpPr>
-          <p:cNvPr id="3" name="Shape 1"/>
-          <p:cNvSpPr/>
-          <p:nvPr/>
-        </p:nvSpPr>
-        <p:spPr>
-          <a:xfrm>
-            <a:off x="0" y="795528"/>
-            <a:ext cx="9144000" cy="27432"/>
+            <a:ext cx="73152" cy="5148072"/>
           </a:xfrm>
           <a:prstGeom prst="rect">
             <a:avLst/>
@@ -3188,30 +3276,30 @@
       </p:sp>
       <p:sp>
         <p:nvSpPr>
-          <p:cNvPr id="4" name="Text 2"/>
-          <p:cNvSpPr/>
-          <p:nvPr/>
-        </p:nvSpPr>
-        <p:spPr>
-          <a:xfrm>
-            <a:off x="640080" y="91440"/>
-            <a:ext cx="7863840" cy="640080"/>
-          </a:xfrm>
-          <a:prstGeom prst="rect">
-            <a:avLst/>
-          </a:prstGeom>
-          <a:noFill/>
-          <a:ln/>
-        </p:spPr>
-        <p:txBody>
-          <a:bodyPr wrap="square" lIns="0" tIns="0" rIns="0" bIns="0" rtlCol="0" anchor="ctr"/>
+          <p:cNvPr id="3" name="Text 1"/>
+          <p:cNvSpPr/>
+          <p:nvPr/>
+        </p:nvSpPr>
+        <p:spPr>
+          <a:xfrm>
+            <a:off x="548640" y="274320"/>
+            <a:ext cx="9144000" cy="640080"/>
+          </a:xfrm>
+          <a:prstGeom prst="rect">
+            <a:avLst/>
+          </a:prstGeom>
+          <a:noFill/>
+          <a:ln/>
+        </p:spPr>
+        <p:txBody>
+          <a:bodyPr wrap="square" rtlCol="0" anchor="ctr"/>
           <a:lstStyle/>
           <a:p>
             <a:pPr indent="0" marL="0">
               <a:buNone/>
             </a:pPr>
             <a:r>
-              <a:rPr lang="en-US" sz="2200" b="1" dirty="0">
+              <a:rPr lang="en-US" sz="2400" b="1" dirty="0">
                 <a:solidFill>
                   <a:srgbClr val="1B2A4A"/>
                 </a:solidFill>
@@ -3219,11 +3307,31 @@
                 <a:ea typeface="Georgia" pitchFamily="34" charset="-122"/>
                 <a:cs typeface="Georgia" pitchFamily="34" charset="-120"/>
               </a:rPr>
-              <a:t>Substituting into Formulas</a:t>
-            </a:r>
-            <a:endParaRPr lang="en-US" sz="2200" dirty="0"/>
-          </a:p>
-        </p:txBody>
+              <a:t>Check Your Understanding</a:t>
+            </a:r>
+            <a:endParaRPr lang="en-US" sz="2400" dirty="0"/>
+          </a:p>
+        </p:txBody>
+      </p:sp>
+      <p:sp>
+        <p:nvSpPr>
+          <p:cNvPr id="4" name="Shape 2"/>
+          <p:cNvSpPr/>
+          <p:nvPr/>
+        </p:nvSpPr>
+        <p:spPr>
+          <a:xfrm>
+            <a:off x="548640" y="960120"/>
+            <a:ext cx="2286000" cy="36576"/>
+          </a:xfrm>
+          <a:prstGeom prst="rect">
+            <a:avLst/>
+          </a:prstGeom>
+          <a:solidFill>
+            <a:srgbClr val="2A9D8F"/>
+          </a:solidFill>
+          <a:ln/>
+        </p:spPr>
       </p:sp>
       <p:sp>
         <p:nvSpPr>
@@ -3233,8 +3341,8 @@
         </p:nvSpPr>
         <p:spPr>
           <a:xfrm>
-            <a:off x="640080" y="1005840"/>
-            <a:ext cx="7863840" cy="2926080"/>
+            <a:off x="548640" y="1188720"/>
+            <a:ext cx="365760" cy="457200"/>
           </a:xfrm>
           <a:prstGeom prst="rect">
             <a:avLst/>
@@ -3246,88 +3354,306 @@
           <a:bodyPr wrap="square" rtlCol="0" anchor="ctr"/>
           <a:lstStyle/>
           <a:p>
-            <a:pPr marL="342900" indent="-342900">
-              <a:spcAft>
-                <a:spcPts val="800"/>
-              </a:spcAft>
-              <a:buSzPct val="100000"/>
-              <a:buChar char="•"/>
+            <a:pPr indent="0" marL="0">
+              <a:buNone/>
             </a:pPr>
             <a:r>
               <a:rPr lang="en-US" sz="1600" dirty="0">
                 <a:solidFill>
+                  <a:srgbClr val="2A9D8F"/>
+                </a:solidFill>
+                <a:latin typeface="Arial" pitchFamily="34" charset="0"/>
+                <a:ea typeface="Arial" pitchFamily="34" charset="-122"/>
+                <a:cs typeface="Arial" pitchFamily="34" charset="-120"/>
+              </a:rPr>
+              <a:t>☐</a:t>
+            </a:r>
+            <a:endParaRPr lang="en-US" sz="1600" dirty="0"/>
+          </a:p>
+        </p:txBody>
+      </p:sp>
+      <p:sp>
+        <p:nvSpPr>
+          <p:cNvPr id="6" name="Text 4"/>
+          <p:cNvSpPr/>
+          <p:nvPr/>
+        </p:nvSpPr>
+        <p:spPr>
+          <a:xfrm>
+            <a:off x="1005840" y="1188720"/>
+            <a:ext cx="9601200" cy="457200"/>
+          </a:xfrm>
+          <a:prstGeom prst="rect">
+            <a:avLst/>
+          </a:prstGeom>
+          <a:noFill/>
+          <a:ln/>
+        </p:spPr>
+        <p:txBody>
+          <a:bodyPr wrap="square" rtlCol="0" anchor="ctr"/>
+          <a:lstStyle/>
+          <a:p>
+            <a:pPr indent="0" marL="0">
+              <a:lnSpc>
+                <a:spcPct val="130000"/>
+              </a:lnSpc>
+              <a:buNone/>
+            </a:pPr>
+            <a:r>
+              <a:rPr lang="en-US" sz="1400" dirty="0">
+                <a:solidFill>
                   <a:srgbClr val="3D3A36"/>
                 </a:solidFill>
-                <a:latin typeface="Calibri" pitchFamily="34" charset="0"/>
-                <a:ea typeface="Calibri" pitchFamily="34" charset="-122"/>
-                <a:cs typeface="Calibri" pitchFamily="34" charset="-120"/>
-              </a:rPr>
-              <a:t>Area of triangle: A = ½bh. If b=6, h=4 → A=12</a:t>
+                <a:latin typeface="Arial" pitchFamily="34" charset="0"/>
+                <a:ea typeface="Arial" pitchFamily="34" charset="-122"/>
+                <a:cs typeface="Arial" pitchFamily="34" charset="-120"/>
+              </a:rPr>
+              <a:t>I can substitute positive and negative numbers into expressions.</a:t>
+            </a:r>
+            <a:endParaRPr lang="en-US" sz="1400" dirty="0"/>
+          </a:p>
+        </p:txBody>
+      </p:sp>
+      <p:sp>
+        <p:nvSpPr>
+          <p:cNvPr id="7" name="Text 5"/>
+          <p:cNvSpPr/>
+          <p:nvPr/>
+        </p:nvSpPr>
+        <p:spPr>
+          <a:xfrm>
+            <a:off x="548640" y="1783080"/>
+            <a:ext cx="365760" cy="457200"/>
+          </a:xfrm>
+          <a:prstGeom prst="rect">
+            <a:avLst/>
+          </a:prstGeom>
+          <a:noFill/>
+          <a:ln/>
+        </p:spPr>
+        <p:txBody>
+          <a:bodyPr wrap="square" rtlCol="0" anchor="ctr"/>
+          <a:lstStyle/>
+          <a:p>
+            <a:pPr indent="0" marL="0">
+              <a:buNone/>
+            </a:pPr>
+            <a:r>
+              <a:rPr lang="en-US" sz="1600" dirty="0">
+                <a:solidFill>
+                  <a:srgbClr val="2A9D8F"/>
+                </a:solidFill>
+                <a:latin typeface="Arial" pitchFamily="34" charset="0"/>
+                <a:ea typeface="Arial" pitchFamily="34" charset="-122"/>
+                <a:cs typeface="Arial" pitchFamily="34" charset="-120"/>
+              </a:rPr>
+              <a:t>☐</a:t>
             </a:r>
             <a:endParaRPr lang="en-US" sz="1600" dirty="0"/>
           </a:p>
-          <a:p>
-            <a:pPr marL="342900" indent="-342900">
-              <a:spcAft>
-                <a:spcPts val="800"/>
-              </a:spcAft>
-              <a:buSzPct val="100000"/>
-              <a:buChar char="•"/>
+        </p:txBody>
+      </p:sp>
+      <p:sp>
+        <p:nvSpPr>
+          <p:cNvPr id="8" name="Text 6"/>
+          <p:cNvSpPr/>
+          <p:nvPr/>
+        </p:nvSpPr>
+        <p:spPr>
+          <a:xfrm>
+            <a:off x="1005840" y="1783080"/>
+            <a:ext cx="9601200" cy="457200"/>
+          </a:xfrm>
+          <a:prstGeom prst="rect">
+            <a:avLst/>
+          </a:prstGeom>
+          <a:noFill/>
+          <a:ln/>
+        </p:spPr>
+        <p:txBody>
+          <a:bodyPr wrap="square" rtlCol="0" anchor="ctr"/>
+          <a:lstStyle/>
+          <a:p>
+            <a:pPr indent="0" marL="0">
+              <a:lnSpc>
+                <a:spcPct val="130000"/>
+              </a:lnSpc>
+              <a:buNone/>
+            </a:pPr>
+            <a:r>
+              <a:rPr lang="en-US" sz="1400" dirty="0">
+                <a:solidFill>
+                  <a:srgbClr val="3D3A36"/>
+                </a:solidFill>
+                <a:latin typeface="Arial" pitchFamily="34" charset="0"/>
+                <a:ea typeface="Arial" pitchFamily="34" charset="-122"/>
+                <a:cs typeface="Arial" pitchFamily="34" charset="-120"/>
+              </a:rPr>
+              <a:t>I can evaluate expressions with indices (x²).</a:t>
+            </a:r>
+            <a:endParaRPr lang="en-US" sz="1400" dirty="0"/>
+          </a:p>
+        </p:txBody>
+      </p:sp>
+      <p:sp>
+        <p:nvSpPr>
+          <p:cNvPr id="9" name="Text 7"/>
+          <p:cNvSpPr/>
+          <p:nvPr/>
+        </p:nvSpPr>
+        <p:spPr>
+          <a:xfrm>
+            <a:off x="548640" y="2377440"/>
+            <a:ext cx="365760" cy="457200"/>
+          </a:xfrm>
+          <a:prstGeom prst="rect">
+            <a:avLst/>
+          </a:prstGeom>
+          <a:noFill/>
+          <a:ln/>
+        </p:spPr>
+        <p:txBody>
+          <a:bodyPr wrap="square" rtlCol="0" anchor="ctr"/>
+          <a:lstStyle/>
+          <a:p>
+            <a:pPr indent="0" marL="0">
+              <a:buNone/>
             </a:pPr>
             <a:r>
               <a:rPr lang="en-US" sz="1600" dirty="0">
                 <a:solidFill>
+                  <a:srgbClr val="2A9D8F"/>
+                </a:solidFill>
+                <a:latin typeface="Arial" pitchFamily="34" charset="0"/>
+                <a:ea typeface="Arial" pitchFamily="34" charset="-122"/>
+                <a:cs typeface="Arial" pitchFamily="34" charset="-120"/>
+              </a:rPr>
+              <a:t>☐</a:t>
+            </a:r>
+            <a:endParaRPr lang="en-US" sz="1600" dirty="0"/>
+          </a:p>
+        </p:txBody>
+      </p:sp>
+      <p:sp>
+        <p:nvSpPr>
+          <p:cNvPr id="10" name="Text 8"/>
+          <p:cNvSpPr/>
+          <p:nvPr/>
+        </p:nvSpPr>
+        <p:spPr>
+          <a:xfrm>
+            <a:off x="1005840" y="2377440"/>
+            <a:ext cx="9601200" cy="457200"/>
+          </a:xfrm>
+          <a:prstGeom prst="rect">
+            <a:avLst/>
+          </a:prstGeom>
+          <a:noFill/>
+          <a:ln/>
+        </p:spPr>
+        <p:txBody>
+          <a:bodyPr wrap="square" rtlCol="0" anchor="ctr"/>
+          <a:lstStyle/>
+          <a:p>
+            <a:pPr indent="0" marL="0">
+              <a:lnSpc>
+                <a:spcPct val="130000"/>
+              </a:lnSpc>
+              <a:buNone/>
+            </a:pPr>
+            <a:r>
+              <a:rPr lang="en-US" sz="1400" dirty="0">
+                <a:solidFill>
                   <a:srgbClr val="3D3A36"/>
                 </a:solidFill>
-                <a:latin typeface="Calibri" pitchFamily="34" charset="0"/>
-                <a:ea typeface="Calibri" pitchFamily="34" charset="-122"/>
-                <a:cs typeface="Calibri" pitchFamily="34" charset="-120"/>
-              </a:rPr>
-              <a:t>Speed: s = d÷t. Nanjing–Shanghai: 300÷1.5 = 200 km/h</a:t>
+                <a:latin typeface="Arial" pitchFamily="34" charset="0"/>
+                <a:ea typeface="Arial" pitchFamily="34" charset="-122"/>
+                <a:cs typeface="Arial" pitchFamily="34" charset="-120"/>
+              </a:rPr>
+              <a:t>I can use BIDMAS correctly after substituting.</a:t>
+            </a:r>
+            <a:endParaRPr lang="en-US" sz="1400" dirty="0"/>
+          </a:p>
+        </p:txBody>
+      </p:sp>
+      <p:sp>
+        <p:nvSpPr>
+          <p:cNvPr id="11" name="Text 9"/>
+          <p:cNvSpPr/>
+          <p:nvPr/>
+        </p:nvSpPr>
+        <p:spPr>
+          <a:xfrm>
+            <a:off x="548640" y="2971800"/>
+            <a:ext cx="365760" cy="457200"/>
+          </a:xfrm>
+          <a:prstGeom prst="rect">
+            <a:avLst/>
+          </a:prstGeom>
+          <a:noFill/>
+          <a:ln/>
+        </p:spPr>
+        <p:txBody>
+          <a:bodyPr wrap="square" rtlCol="0" anchor="ctr"/>
+          <a:lstStyle/>
+          <a:p>
+            <a:pPr indent="0" marL="0">
+              <a:buNone/>
+            </a:pPr>
+            <a:r>
+              <a:rPr lang="en-US" sz="1600" dirty="0">
+                <a:solidFill>
+                  <a:srgbClr val="2A9D8F"/>
+                </a:solidFill>
+                <a:latin typeface="Arial" pitchFamily="34" charset="0"/>
+                <a:ea typeface="Arial" pitchFamily="34" charset="-122"/>
+                <a:cs typeface="Arial" pitchFamily="34" charset="-120"/>
+              </a:rPr>
+              <a:t>☐</a:t>
             </a:r>
             <a:endParaRPr lang="en-US" sz="1600" dirty="0"/>
           </a:p>
-          <a:p>
-            <a:pPr marL="342900" indent="-342900">
-              <a:spcAft>
-                <a:spcPts val="800"/>
-              </a:spcAft>
-              <a:buSzPct val="100000"/>
-              <a:buChar char="•"/>
-            </a:pPr>
-            <a:r>
-              <a:rPr lang="en-US" sz="1600" dirty="0">
+        </p:txBody>
+      </p:sp>
+      <p:sp>
+        <p:nvSpPr>
+          <p:cNvPr id="12" name="Text 10"/>
+          <p:cNvSpPr/>
+          <p:nvPr/>
+        </p:nvSpPr>
+        <p:spPr>
+          <a:xfrm>
+            <a:off x="1005840" y="2971800"/>
+            <a:ext cx="9601200" cy="457200"/>
+          </a:xfrm>
+          <a:prstGeom prst="rect">
+            <a:avLst/>
+          </a:prstGeom>
+          <a:noFill/>
+          <a:ln/>
+        </p:spPr>
+        <p:txBody>
+          <a:bodyPr wrap="square" rtlCol="0" anchor="ctr"/>
+          <a:lstStyle/>
+          <a:p>
+            <a:pPr indent="0" marL="0">
+              <a:lnSpc>
+                <a:spcPct val="130000"/>
+              </a:lnSpc>
+              <a:buNone/>
+            </a:pPr>
+            <a:r>
+              <a:rPr lang="en-US" sz="1400" dirty="0">
                 <a:solidFill>
                   <a:srgbClr val="3D3A36"/>
                 </a:solidFill>
-                <a:latin typeface="Calibri" pitchFamily="34" charset="0"/>
-                <a:ea typeface="Calibri" pitchFamily="34" charset="-122"/>
-                <a:cs typeface="Calibri" pitchFamily="34" charset="-120"/>
-              </a:rPr>
-              <a:t>Perimeter of rectangle: P = 2(l+w). NIS field: 2(100+64) = 328 m</a:t>
-            </a:r>
-            <a:endParaRPr lang="en-US" sz="1600" dirty="0"/>
-          </a:p>
-          <a:p>
-            <a:pPr marL="342900" indent="-342900">
-              <a:spcAft>
-                <a:spcPts val="800"/>
-              </a:spcAft>
-              <a:buSzPct val="100000"/>
-              <a:buChar char="•"/>
-            </a:pPr>
-            <a:r>
-              <a:rPr lang="en-US" sz="1600" dirty="0">
-                <a:solidFill>
-                  <a:srgbClr val="3D3A36"/>
-                </a:solidFill>
-                <a:latin typeface="Calibri" pitchFamily="34" charset="0"/>
-                <a:ea typeface="Calibri" pitchFamily="34" charset="-122"/>
-                <a:cs typeface="Calibri" pitchFamily="34" charset="-120"/>
-              </a:rPr>
-              <a:t>Always show working: Formula → Sub → Answer</a:t>
-            </a:r>
-            <a:endParaRPr lang="en-US" sz="1600" dirty="0"/>
+                <a:latin typeface="Arial" pitchFamily="34" charset="0"/>
+                <a:ea typeface="Arial" pitchFamily="34" charset="-122"/>
+                <a:cs typeface="Arial" pitchFamily="34" charset="-120"/>
+              </a:rPr>
+              <a:t>I can use formulas to solve problems.</a:t>
+            </a:r>
+            <a:endParaRPr lang="en-US" sz="1400" dirty="0"/>
           </a:p>
         </p:txBody>
       </p:sp>
@@ -3345,7 +3671,7 @@
     <p:bg>
       <p:bgPr>
         <a:solidFill>
-          <a:srgbClr val="FAF8F5"/>
+          <a:srgbClr val="111D35"/>
         </a:solidFill>
       </p:bgPr>
     </p:bg>
@@ -3365,93 +3691,53 @@
       </p:grpSpPr>
       <p:sp>
         <p:nvSpPr>
-          <p:cNvPr id="2" name="Shape 0"/>
-          <p:cNvSpPr/>
-          <p:nvPr/>
-        </p:nvSpPr>
-        <p:spPr>
-          <a:xfrm>
-            <a:off x="0" y="0"/>
-            <a:ext cx="9144000" cy="822960"/>
-          </a:xfrm>
-          <a:prstGeom prst="rect">
-            <a:avLst/>
-          </a:prstGeom>
-          <a:solidFill>
-            <a:srgbClr val="FFFFFF"/>
-          </a:solidFill>
-          <a:ln/>
-        </p:spPr>
-      </p:sp>
-      <p:sp>
-        <p:nvSpPr>
-          <p:cNvPr id="3" name="Shape 1"/>
-          <p:cNvSpPr/>
-          <p:nvPr/>
-        </p:nvSpPr>
-        <p:spPr>
-          <a:xfrm>
-            <a:off x="0" y="795528"/>
-            <a:ext cx="9144000" cy="27432"/>
-          </a:xfrm>
-          <a:prstGeom prst="rect">
-            <a:avLst/>
-          </a:prstGeom>
-          <a:solidFill>
-            <a:srgbClr val="2A9D8F"/>
-          </a:solidFill>
-          <a:ln/>
-        </p:spPr>
-      </p:sp>
-      <p:sp>
-        <p:nvSpPr>
-          <p:cNvPr id="4" name="Text 2"/>
-          <p:cNvSpPr/>
-          <p:nvPr/>
-        </p:nvSpPr>
-        <p:spPr>
-          <a:xfrm>
-            <a:off x="640080" y="91440"/>
-            <a:ext cx="7863840" cy="640080"/>
-          </a:xfrm>
-          <a:prstGeom prst="rect">
-            <a:avLst/>
-          </a:prstGeom>
-          <a:noFill/>
-          <a:ln/>
-        </p:spPr>
-        <p:txBody>
-          <a:bodyPr wrap="square" lIns="0" tIns="0" rIns="0" bIns="0" rtlCol="0" anchor="ctr"/>
+          <p:cNvPr id="2" name="Text 0"/>
+          <p:cNvSpPr/>
+          <p:nvPr/>
+        </p:nvSpPr>
+        <p:spPr>
+          <a:xfrm>
+            <a:off x="731520" y="1371600"/>
+            <a:ext cx="9144000" cy="914400"/>
+          </a:xfrm>
+          <a:prstGeom prst="rect">
+            <a:avLst/>
+          </a:prstGeom>
+          <a:noFill/>
+          <a:ln/>
+        </p:spPr>
+        <p:txBody>
+          <a:bodyPr wrap="square" rtlCol="0" anchor="ctr"/>
           <a:lstStyle/>
           <a:p>
             <a:pPr indent="0" marL="0">
               <a:buNone/>
             </a:pPr>
             <a:r>
-              <a:rPr lang="en-US" sz="2200" b="1" dirty="0">
-                <a:solidFill>
-                  <a:srgbClr val="1B2A4A"/>
+              <a:rPr lang="en-US" sz="3200" b="1" dirty="0">
+                <a:solidFill>
+                  <a:srgbClr val="FFFFFF"/>
                 </a:solidFill>
                 <a:latin typeface="Georgia" pitchFamily="34" charset="0"/>
                 <a:ea typeface="Georgia" pitchFamily="34" charset="-122"/>
                 <a:cs typeface="Georgia" pitchFamily="34" charset="-120"/>
               </a:rPr>
-              <a:t>Recommended Videos</a:t>
-            </a:r>
-            <a:endParaRPr lang="en-US" sz="2200" dirty="0"/>
-          </a:p>
-        </p:txBody>
-      </p:sp>
-      <p:sp>
-        <p:nvSpPr>
-          <p:cNvPr id="5" name="Text 3"/>
-          <p:cNvSpPr/>
-          <p:nvPr/>
-        </p:nvSpPr>
-        <p:spPr>
-          <a:xfrm>
-            <a:off x="640080" y="868680"/>
-            <a:ext cx="7863840" cy="274320"/>
+              <a:t>Review &amp; Practise</a:t>
+            </a:r>
+            <a:endParaRPr lang="en-US" sz="3200" dirty="0"/>
+          </a:p>
+        </p:txBody>
+      </p:sp>
+      <p:sp>
+        <p:nvSpPr>
+          <p:cNvPr id="3" name="Text 1"/>
+          <p:cNvSpPr/>
+          <p:nvPr/>
+        </p:nvSpPr>
+        <p:spPr>
+          <a:xfrm>
+            <a:off x="731520" y="2377440"/>
+            <a:ext cx="7315200" cy="548640"/>
           </a:xfrm>
           <a:prstGeom prst="rect">
             <a:avLst/>
@@ -3467,116 +3753,32 @@
               <a:buNone/>
             </a:pPr>
             <a:r>
-              <a:rPr lang="en-US" sz="1200" i="1" dirty="0">
-                <a:solidFill>
-                  <a:srgbClr val="6B6660"/>
-                </a:solidFill>
-                <a:latin typeface="Calibri" pitchFamily="34" charset="0"/>
-                <a:ea typeface="Calibri" pitchFamily="34" charset="-122"/>
-                <a:cs typeface="Calibri" pitchFamily="34" charset="-120"/>
-              </a:rPr>
-              <a:t>Search these on YouTube to learn more.</a:t>
-            </a:r>
-            <a:endParaRPr lang="en-US" sz="1200" dirty="0"/>
-          </a:p>
-        </p:txBody>
-      </p:sp>
-      <p:sp>
-        <p:nvSpPr>
-          <p:cNvPr id="6" name="Shape 4"/>
-          <p:cNvSpPr/>
-          <p:nvPr/>
-        </p:nvSpPr>
-        <p:spPr>
-          <a:xfrm>
-            <a:off x="457200" y="1234440"/>
-            <a:ext cx="8229600" cy="1051560"/>
-          </a:xfrm>
-          <a:prstGeom prst="rect">
-            <a:avLst/>
-          </a:prstGeom>
-          <a:solidFill>
-            <a:srgbClr val="FFFFFF"/>
-          </a:solidFill>
-          <a:ln/>
-          <a:effectLst>
-            <a:outerShdw sx="100000" sy="100000" kx="0" ky="0" algn="bl" rotWithShape="0" blurRad="76200" dist="25400" dir="8100000">
-              <a:srgbClr val="000000">
-                <a:alpha val="12000"/>
-              </a:srgbClr>
-            </a:outerShdw>
-          </a:effectLst>
-        </p:spPr>
-      </p:sp>
-      <p:sp>
-        <p:nvSpPr>
-          <p:cNvPr id="7" name="Shape 5"/>
-          <p:cNvSpPr/>
-          <p:nvPr/>
-        </p:nvSpPr>
-        <p:spPr>
-          <a:xfrm>
-            <a:off x="457200" y="1234440"/>
-            <a:ext cx="64008" cy="1051560"/>
-          </a:xfrm>
-          <a:prstGeom prst="rect">
-            <a:avLst/>
-          </a:prstGeom>
-          <a:solidFill>
-            <a:srgbClr val="2A9D8F"/>
-          </a:solidFill>
-          <a:ln/>
-        </p:spPr>
-      </p:sp>
-      <p:sp>
-        <p:nvSpPr>
-          <p:cNvPr id="8" name="Text 6"/>
-          <p:cNvSpPr/>
-          <p:nvPr/>
-        </p:nvSpPr>
-        <p:spPr>
-          <a:xfrm>
-            <a:off x="640080" y="1325880"/>
-            <a:ext cx="457200" cy="457200"/>
-          </a:xfrm>
-          <a:prstGeom prst="rect">
-            <a:avLst/>
-          </a:prstGeom>
-          <a:noFill/>
-          <a:ln/>
-        </p:spPr>
-        <p:txBody>
-          <a:bodyPr wrap="square" rtlCol="0" anchor="ctr"/>
-          <a:lstStyle/>
-          <a:p>
-            <a:pPr algn="ctr" indent="0" marL="0">
-              <a:buNone/>
-            </a:pPr>
-            <a:r>
-              <a:rPr lang="en-US" sz="2000" dirty="0">
-                <a:solidFill>
-                  <a:srgbClr val="2A9D8F"/>
-                </a:solidFill>
-                <a:latin typeface="Calibri" pitchFamily="34" charset="0"/>
-                <a:ea typeface="Calibri" pitchFamily="34" charset="-122"/>
-                <a:cs typeface="Calibri" pitchFamily="34" charset="-120"/>
-              </a:rPr>
-              <a:t>▶</a:t>
-            </a:r>
-            <a:endParaRPr lang="en-US" sz="2000" dirty="0"/>
-          </a:p>
-        </p:txBody>
-      </p:sp>
-      <p:sp>
-        <p:nvSpPr>
-          <p:cNvPr id="9" name="Text 7"/>
-          <p:cNvSpPr/>
-          <p:nvPr/>
-        </p:nvSpPr>
-        <p:spPr>
-          <a:xfrm>
-            <a:off x="1188720" y="1307592"/>
-            <a:ext cx="7132320" cy="411480"/>
+              <a:rPr lang="en-US" sz="1500" dirty="0">
+                <a:solidFill>
+                  <a:srgbClr val="FFFFFF">
+                    <a:alpha val="60000"/>
+                  </a:srgbClr>
+                </a:solidFill>
+                <a:latin typeface="Arial" pitchFamily="34" charset="0"/>
+                <a:ea typeface="Arial" pitchFamily="34" charset="-122"/>
+                <a:cs typeface="Arial" pitchFamily="34" charset="-120"/>
+              </a:rPr>
+              <a:t>Use the Self-Quiz, Review Games, and Practice Builder to test yourself.</a:t>
+            </a:r>
+            <a:endParaRPr lang="en-US" sz="1500" dirty="0"/>
+          </a:p>
+        </p:txBody>
+      </p:sp>
+      <p:sp>
+        <p:nvSpPr>
+          <p:cNvPr id="4" name="Text 2"/>
+          <p:cNvSpPr/>
+          <p:nvPr/>
+        </p:nvSpPr>
+        <p:spPr>
+          <a:xfrm>
+            <a:off x="731520" y="3291840"/>
+            <a:ext cx="3657600" cy="457200"/>
           </a:xfrm>
           <a:prstGeom prst="rect">
             <a:avLst/>
@@ -3592,527 +3794,17 @@
               <a:buNone/>
             </a:pPr>
             <a:r>
-              <a:rPr lang="en-US" sz="1400" b="1" dirty="0">
-                <a:solidFill>
-                  <a:srgbClr val="1B2A4A"/>
-                </a:solidFill>
-                <a:latin typeface="Calibri" pitchFamily="34" charset="0"/>
-                <a:ea typeface="Calibri" pitchFamily="34" charset="-122"/>
-                <a:cs typeface="Calibri" pitchFamily="34" charset="-120"/>
-              </a:rPr>
-              <a:t>Substitution into Expressions</a:t>
-            </a:r>
-            <a:endParaRPr lang="en-US" sz="1400" dirty="0"/>
-          </a:p>
-        </p:txBody>
-      </p:sp>
-      <p:sp>
-        <p:nvSpPr>
-          <p:cNvPr id="10" name="Text 8"/>
-          <p:cNvSpPr/>
-          <p:nvPr/>
-        </p:nvSpPr>
-        <p:spPr>
-          <a:xfrm>
-            <a:off x="1188720" y="1691640"/>
-            <a:ext cx="7132320" cy="320040"/>
-          </a:xfrm>
-          <a:prstGeom prst="rect">
-            <a:avLst/>
-          </a:prstGeom>
-          <a:noFill/>
-          <a:ln/>
-        </p:spPr>
-        <p:txBody>
-          <a:bodyPr wrap="square" rtlCol="0" anchor="ctr"/>
-          <a:lstStyle/>
-          <a:p>
-            <a:pPr indent="0" marL="0">
-              <a:buNone/>
-            </a:pPr>
-            <a:r>
-              <a:rPr lang="en-US" sz="1100" dirty="0">
-                <a:solidFill>
-                  <a:srgbClr val="6B6660"/>
-                </a:solidFill>
-                <a:latin typeface="Calibri" pitchFamily="34" charset="0"/>
-                <a:ea typeface="Calibri" pitchFamily="34" charset="-122"/>
-                <a:cs typeface="Calibri" pitchFamily="34" charset="-120"/>
-              </a:rPr>
-              <a:t>Corbettmaths  •  5 min</a:t>
-            </a:r>
-            <a:endParaRPr lang="en-US" sz="1100" dirty="0"/>
-          </a:p>
-        </p:txBody>
-      </p:sp>
-      <p:sp>
-        <p:nvSpPr>
-          <p:cNvPr id="11" name="Shape 9"/>
-          <p:cNvSpPr/>
-          <p:nvPr/>
-        </p:nvSpPr>
-        <p:spPr>
-          <a:xfrm>
-            <a:off x="457200" y="2423160"/>
-            <a:ext cx="8229600" cy="1051560"/>
-          </a:xfrm>
-          <a:prstGeom prst="rect">
-            <a:avLst/>
-          </a:prstGeom>
-          <a:solidFill>
-            <a:srgbClr val="FFFFFF"/>
-          </a:solidFill>
-          <a:ln/>
-          <a:effectLst>
-            <a:outerShdw sx="100000" sy="100000" kx="0" ky="0" algn="bl" rotWithShape="0" blurRad="76200" dist="25400" dir="8100000">
-              <a:srgbClr val="000000">
-                <a:alpha val="12000"/>
-              </a:srgbClr>
-            </a:outerShdw>
-          </a:effectLst>
-        </p:spPr>
-      </p:sp>
-      <p:sp>
-        <p:nvSpPr>
-          <p:cNvPr id="12" name="Shape 10"/>
-          <p:cNvSpPr/>
-          <p:nvPr/>
-        </p:nvSpPr>
-        <p:spPr>
-          <a:xfrm>
-            <a:off x="457200" y="2423160"/>
-            <a:ext cx="64008" cy="1051560"/>
-          </a:xfrm>
-          <a:prstGeom prst="rect">
-            <a:avLst/>
-          </a:prstGeom>
-          <a:solidFill>
-            <a:srgbClr val="2A9D8F"/>
-          </a:solidFill>
-          <a:ln/>
-        </p:spPr>
-      </p:sp>
-      <p:sp>
-        <p:nvSpPr>
-          <p:cNvPr id="13" name="Text 11"/>
-          <p:cNvSpPr/>
-          <p:nvPr/>
-        </p:nvSpPr>
-        <p:spPr>
-          <a:xfrm>
-            <a:off x="640080" y="2514600"/>
-            <a:ext cx="457200" cy="457200"/>
-          </a:xfrm>
-          <a:prstGeom prst="rect">
-            <a:avLst/>
-          </a:prstGeom>
-          <a:noFill/>
-          <a:ln/>
-        </p:spPr>
-        <p:txBody>
-          <a:bodyPr wrap="square" rtlCol="0" anchor="ctr"/>
-          <a:lstStyle/>
-          <a:p>
-            <a:pPr algn="ctr" indent="0" marL="0">
-              <a:buNone/>
-            </a:pPr>
-            <a:r>
-              <a:rPr lang="en-US" sz="2000" dirty="0">
-                <a:solidFill>
-                  <a:srgbClr val="2A9D8F"/>
-                </a:solidFill>
-                <a:latin typeface="Calibri" pitchFamily="34" charset="0"/>
-                <a:ea typeface="Calibri" pitchFamily="34" charset="-122"/>
-                <a:cs typeface="Calibri" pitchFamily="34" charset="-120"/>
-              </a:rPr>
-              <a:t>▶</a:t>
-            </a:r>
-            <a:endParaRPr lang="en-US" sz="2000" dirty="0"/>
-          </a:p>
-        </p:txBody>
-      </p:sp>
-      <p:sp>
-        <p:nvSpPr>
-          <p:cNvPr id="14" name="Text 12"/>
-          <p:cNvSpPr/>
-          <p:nvPr/>
-        </p:nvSpPr>
-        <p:spPr>
-          <a:xfrm>
-            <a:off x="1188720" y="2496312"/>
-            <a:ext cx="7132320" cy="411480"/>
-          </a:xfrm>
-          <a:prstGeom prst="rect">
-            <a:avLst/>
-          </a:prstGeom>
-          <a:noFill/>
-          <a:ln/>
-        </p:spPr>
-        <p:txBody>
-          <a:bodyPr wrap="square" rtlCol="0" anchor="ctr"/>
-          <a:lstStyle/>
-          <a:p>
-            <a:pPr indent="0" marL="0">
-              <a:buNone/>
-            </a:pPr>
-            <a:r>
-              <a:rPr lang="en-US" sz="1400" b="1" dirty="0">
-                <a:solidFill>
-                  <a:srgbClr val="1B2A4A"/>
-                </a:solidFill>
-                <a:latin typeface="Calibri" pitchFamily="34" charset="0"/>
-                <a:ea typeface="Calibri" pitchFamily="34" charset="-122"/>
-                <a:cs typeface="Calibri" pitchFamily="34" charset="-120"/>
-              </a:rPr>
-              <a:t>Substitution — The Basics</a:t>
-            </a:r>
-            <a:endParaRPr lang="en-US" sz="1400" dirty="0"/>
-          </a:p>
-        </p:txBody>
-      </p:sp>
-      <p:sp>
-        <p:nvSpPr>
-          <p:cNvPr id="15" name="Text 13"/>
-          <p:cNvSpPr/>
-          <p:nvPr/>
-        </p:nvSpPr>
-        <p:spPr>
-          <a:xfrm>
-            <a:off x="1188720" y="2880360"/>
-            <a:ext cx="7132320" cy="320040"/>
-          </a:xfrm>
-          <a:prstGeom prst="rect">
-            <a:avLst/>
-          </a:prstGeom>
-          <a:noFill/>
-          <a:ln/>
-        </p:spPr>
-        <p:txBody>
-          <a:bodyPr wrap="square" rtlCol="0" anchor="ctr"/>
-          <a:lstStyle/>
-          <a:p>
-            <a:pPr indent="0" marL="0">
-              <a:buNone/>
-            </a:pPr>
-            <a:r>
-              <a:rPr lang="en-US" sz="1100" dirty="0">
-                <a:solidFill>
-                  <a:srgbClr val="6B6660"/>
-                </a:solidFill>
-                <a:latin typeface="Calibri" pitchFamily="34" charset="0"/>
-                <a:ea typeface="Calibri" pitchFamily="34" charset="-122"/>
-                <a:cs typeface="Calibri" pitchFamily="34" charset="-120"/>
-              </a:rPr>
-              <a:t>Cognito  •  4 min</a:t>
-            </a:r>
-            <a:endParaRPr lang="en-US" sz="1100" dirty="0"/>
-          </a:p>
-        </p:txBody>
-      </p:sp>
-      <p:sp>
-        <p:nvSpPr>
-          <p:cNvPr id="16" name="Shape 14"/>
-          <p:cNvSpPr/>
-          <p:nvPr/>
-        </p:nvSpPr>
-        <p:spPr>
-          <a:xfrm>
-            <a:off x="457200" y="3611880"/>
-            <a:ext cx="8229600" cy="1051560"/>
-          </a:xfrm>
-          <a:prstGeom prst="rect">
-            <a:avLst/>
-          </a:prstGeom>
-          <a:solidFill>
-            <a:srgbClr val="FFFFFF"/>
-          </a:solidFill>
-          <a:ln/>
-          <a:effectLst>
-            <a:outerShdw sx="100000" sy="100000" kx="0" ky="0" algn="bl" rotWithShape="0" blurRad="76200" dist="25400" dir="8100000">
-              <a:srgbClr val="000000">
-                <a:alpha val="12000"/>
-              </a:srgbClr>
-            </a:outerShdw>
-          </a:effectLst>
-        </p:spPr>
-      </p:sp>
-      <p:sp>
-        <p:nvSpPr>
-          <p:cNvPr id="17" name="Shape 15"/>
-          <p:cNvSpPr/>
-          <p:nvPr/>
-        </p:nvSpPr>
-        <p:spPr>
-          <a:xfrm>
-            <a:off x="457200" y="3611880"/>
-            <a:ext cx="64008" cy="1051560"/>
-          </a:xfrm>
-          <a:prstGeom prst="rect">
-            <a:avLst/>
-          </a:prstGeom>
-          <a:solidFill>
-            <a:srgbClr val="2A9D8F"/>
-          </a:solidFill>
-          <a:ln/>
-        </p:spPr>
-      </p:sp>
-      <p:sp>
-        <p:nvSpPr>
-          <p:cNvPr id="18" name="Text 16"/>
-          <p:cNvSpPr/>
-          <p:nvPr/>
-        </p:nvSpPr>
-        <p:spPr>
-          <a:xfrm>
-            <a:off x="640080" y="3703320"/>
-            <a:ext cx="457200" cy="457200"/>
-          </a:xfrm>
-          <a:prstGeom prst="rect">
-            <a:avLst/>
-          </a:prstGeom>
-          <a:noFill/>
-          <a:ln/>
-        </p:spPr>
-        <p:txBody>
-          <a:bodyPr wrap="square" rtlCol="0" anchor="ctr"/>
-          <a:lstStyle/>
-          <a:p>
-            <a:pPr algn="ctr" indent="0" marL="0">
-              <a:buNone/>
-            </a:pPr>
-            <a:r>
-              <a:rPr lang="en-US" sz="2000" dirty="0">
-                <a:solidFill>
-                  <a:srgbClr val="2A9D8F"/>
-                </a:solidFill>
-                <a:latin typeface="Calibri" pitchFamily="34" charset="0"/>
-                <a:ea typeface="Calibri" pitchFamily="34" charset="-122"/>
-                <a:cs typeface="Calibri" pitchFamily="34" charset="-120"/>
-              </a:rPr>
-              <a:t>▶</a:t>
-            </a:r>
-            <a:endParaRPr lang="en-US" sz="2000" dirty="0"/>
-          </a:p>
-        </p:txBody>
-      </p:sp>
-      <p:sp>
-        <p:nvSpPr>
-          <p:cNvPr id="19" name="Text 17"/>
-          <p:cNvSpPr/>
-          <p:nvPr/>
-        </p:nvSpPr>
-        <p:spPr>
-          <a:xfrm>
-            <a:off x="1188720" y="3685032"/>
-            <a:ext cx="7132320" cy="411480"/>
-          </a:xfrm>
-          <a:prstGeom prst="rect">
-            <a:avLst/>
-          </a:prstGeom>
-          <a:noFill/>
-          <a:ln/>
-        </p:spPr>
-        <p:txBody>
-          <a:bodyPr wrap="square" rtlCol="0" anchor="ctr"/>
-          <a:lstStyle/>
-          <a:p>
-            <a:pPr indent="0" marL="0">
-              <a:buNone/>
-            </a:pPr>
-            <a:r>
-              <a:rPr lang="en-US" sz="1400" b="1" dirty="0">
-                <a:solidFill>
-                  <a:srgbClr val="1B2A4A"/>
-                </a:solidFill>
-                <a:latin typeface="Calibri" pitchFamily="34" charset="0"/>
-                <a:ea typeface="Calibri" pitchFamily="34" charset="-122"/>
-                <a:cs typeface="Calibri" pitchFamily="34" charset="-120"/>
-              </a:rPr>
-              <a:t>Evaluating Expressions</a:t>
-            </a:r>
-            <a:endParaRPr lang="en-US" sz="1400" dirty="0"/>
-          </a:p>
-        </p:txBody>
-      </p:sp>
-      <p:sp>
-        <p:nvSpPr>
-          <p:cNvPr id="20" name="Text 18"/>
-          <p:cNvSpPr/>
-          <p:nvPr/>
-        </p:nvSpPr>
-        <p:spPr>
-          <a:xfrm>
-            <a:off x="1188720" y="4069080"/>
-            <a:ext cx="7132320" cy="320040"/>
-          </a:xfrm>
-          <a:prstGeom prst="rect">
-            <a:avLst/>
-          </a:prstGeom>
-          <a:noFill/>
-          <a:ln/>
-        </p:spPr>
-        <p:txBody>
-          <a:bodyPr wrap="square" rtlCol="0" anchor="ctr"/>
-          <a:lstStyle/>
-          <a:p>
-            <a:pPr indent="0" marL="0">
-              <a:buNone/>
-            </a:pPr>
-            <a:r>
-              <a:rPr lang="en-US" sz="1100" dirty="0">
-                <a:solidFill>
-                  <a:srgbClr val="6B6660"/>
-                </a:solidFill>
-                <a:latin typeface="Calibri" pitchFamily="34" charset="0"/>
-                <a:ea typeface="Calibri" pitchFamily="34" charset="-122"/>
-                <a:cs typeface="Calibri" pitchFamily="34" charset="-120"/>
-              </a:rPr>
-              <a:t>Math Antics  •  7 min</a:t>
-            </a:r>
-            <a:endParaRPr lang="en-US" sz="1100" dirty="0"/>
-          </a:p>
-        </p:txBody>
-      </p:sp>
-    </p:spTree>
-  </p:cSld>
-  <p:clrMapOvr>
-    <a:masterClrMapping/>
-  </p:clrMapOvr>
-</p:sld>
-</file>
-
-<file path=ppt/slides/slide8.xml><?xml version="1.0" encoding="utf-8"?>
-<p:sld xmlns:a="http://schemas.openxmlformats.org/drawingml/2006/main" xmlns:r="http://schemas.openxmlformats.org/officeDocument/2006/relationships" xmlns:p="http://schemas.openxmlformats.org/presentationml/2006/main">
-  <p:cSld name="Slide 8">
-    <p:spTree>
-      <p:nvGrpSpPr>
-        <p:cNvPr id="1" name=""/>
-        <p:cNvGrpSpPr/>
-        <p:nvPr/>
-      </p:nvGrpSpPr>
-      <p:grpSpPr>
-        <a:xfrm>
-          <a:off x="0" y="0"/>
-          <a:ext cx="0" cy="0"/>
-          <a:chOff x="0" y="0"/>
-          <a:chExt cx="0" cy="0"/>
-        </a:xfrm>
-      </p:grpSpPr>
-      <p:sp>
-        <p:nvSpPr>
-          <p:cNvPr id="2" name="Shape 0"/>
-          <p:cNvSpPr/>
-          <p:nvPr/>
-        </p:nvSpPr>
-        <p:spPr>
-          <a:xfrm>
-            <a:off x="0" y="0"/>
-            <a:ext cx="9144000" cy="5143500"/>
-          </a:xfrm>
-          <a:prstGeom prst="rect">
-            <a:avLst/>
-          </a:prstGeom>
-          <a:solidFill>
-            <a:srgbClr val="1B2A4A"/>
-          </a:solidFill>
-          <a:ln/>
-        </p:spPr>
-      </p:sp>
-      <p:sp>
-        <p:nvSpPr>
-          <p:cNvPr id="3" name="Shape 1"/>
-          <p:cNvSpPr/>
-          <p:nvPr/>
-        </p:nvSpPr>
-        <p:spPr>
-          <a:xfrm>
-            <a:off x="0" y="4777740"/>
-            <a:ext cx="9144000" cy="365760"/>
-          </a:xfrm>
-          <a:prstGeom prst="rect">
-            <a:avLst/>
-          </a:prstGeom>
-          <a:solidFill>
-            <a:srgbClr val="2A9D8F"/>
-          </a:solidFill>
-          <a:ln/>
-        </p:spPr>
-      </p:sp>
-      <p:sp>
-        <p:nvSpPr>
-          <p:cNvPr id="4" name="Text 2"/>
-          <p:cNvSpPr/>
-          <p:nvPr/>
-        </p:nvSpPr>
-        <p:spPr>
-          <a:xfrm>
-            <a:off x="731520" y="1371600"/>
-            <a:ext cx="7680960" cy="914400"/>
-          </a:xfrm>
-          <a:prstGeom prst="rect">
-            <a:avLst/>
-          </a:prstGeom>
-          <a:noFill/>
-          <a:ln/>
-        </p:spPr>
-        <p:txBody>
-          <a:bodyPr wrap="square" rtlCol="0" anchor="ctr"/>
-          <a:lstStyle/>
-          <a:p>
-            <a:pPr algn="ctr" indent="0" marL="0">
-              <a:buNone/>
-            </a:pPr>
-            <a:r>
-              <a:rPr lang="en-US" sz="3600" b="1" dirty="0">
-                <a:solidFill>
-                  <a:srgbClr val="FFFFFF"/>
+              <a:rPr lang="en-US" sz="1800" b="1" dirty="0">
+                <a:solidFill>
+                  <a:srgbClr val="E9C46A"/>
                 </a:solidFill>
                 <a:latin typeface="Georgia" pitchFamily="34" charset="0"/>
                 <a:ea typeface="Georgia" pitchFamily="34" charset="-122"/>
                 <a:cs typeface="Georgia" pitchFamily="34" charset="-120"/>
               </a:rPr>
-              <a:t>Review &amp; Practise</a:t>
-            </a:r>
-            <a:endParaRPr lang="en-US" sz="3600" dirty="0"/>
-          </a:p>
-        </p:txBody>
-      </p:sp>
-      <p:sp>
-        <p:nvSpPr>
-          <p:cNvPr id="5" name="Text 3"/>
-          <p:cNvSpPr/>
-          <p:nvPr/>
-        </p:nvSpPr>
-        <p:spPr>
-          <a:xfrm>
-            <a:off x="731520" y="2560320"/>
-            <a:ext cx="7680960" cy="548640"/>
-          </a:xfrm>
-          <a:prstGeom prst="rect">
-            <a:avLst/>
-          </a:prstGeom>
-          <a:noFill/>
-          <a:ln/>
-        </p:spPr>
-        <p:txBody>
-          <a:bodyPr wrap="square" rtlCol="0" anchor="ctr"/>
-          <a:lstStyle/>
-          <a:p>
-            <a:pPr algn="ctr" indent="0" marL="0">
-              <a:buNone/>
-            </a:pPr>
-            <a:r>
-              <a:rPr lang="en-US" sz="2000" dirty="0">
-                <a:solidFill>
-                  <a:srgbClr val="2A9D8F"/>
-                </a:solidFill>
-                <a:latin typeface="Calibri" pitchFamily="34" charset="0"/>
-                <a:ea typeface="Calibri" pitchFamily="34" charset="-122"/>
-                <a:cs typeface="Calibri" pitchFamily="34" charset="-120"/>
-              </a:rPr>
               <a:t>mrzocchi.com</a:t>
             </a:r>
-            <a:endParaRPr lang="en-US" sz="2000" dirty="0"/>
+            <a:endParaRPr lang="en-US" sz="1800" dirty="0"/>
           </a:p>
         </p:txBody>
       </p:sp>
